--- a/Raspberry_Pi/contents/Module02_LinuxBasedEmbeddedSystemComponentStack/Lecture02_LinuxBasedEmbeddedSystemComponentStack.pptx
+++ b/Raspberry_Pi/contents/Module02_LinuxBasedEmbeddedSystemComponentStack/Lecture02_LinuxBasedEmbeddedSystemComponentStack.pptx
@@ -208,7 +208,7 @@
 <file path=ppt/revisionInfo.xml><?xml version="1.0" encoding="utf-8"?>
 <p1510:revInfo xmlns:a="http://schemas.openxmlformats.org/drawingml/2006/main" xmlns:r="http://schemas.openxmlformats.org/officeDocument/2006/relationships" xmlns:p1510="http://schemas.microsoft.com/office/powerpoint/2015/10/main">
   <p1510:revLst>
-    <p1510:client id="{D4C89A0E-ED9D-4A03-AC64-686ADCD0D2BF}" v="9" dt="2019-03-07T10:17:26.854"/>
+    <p1510:client id="{033EE7FA-21B3-B9FA-70CB-407B2CCDFD60}" v="47" dt="2025-11-24T09:24:34.843"/>
   </p1510:revLst>
 </p1510:revInfo>
 </file>
@@ -334,7 +334,7 @@
               <a:pPr>
                 <a:defRPr/>
               </a:pPr>
-              <a:t>3/7/2019</a:t>
+              <a:t>11/24/2025</a:t>
             </a:fld>
             <a:endParaRPr lang="en-US" altLang="en-US"/>
           </a:p>
@@ -443,6 +443,11 @@
         </p:txBody>
       </p:sp>
     </p:spTree>
+    <p:extLst>
+      <p:ext uri="{BB962C8B-B14F-4D97-AF65-F5344CB8AC3E}">
+        <p14:creationId xmlns:p14="http://schemas.microsoft.com/office/powerpoint/2010/main" val="1"/>
+      </p:ext>
+    </p:extLst>
   </p:cSld>
   <p:clrMap bg1="lt1" tx1="dk1" bg2="lt2" tx2="dk2" accent1="accent1" accent2="accent2" accent3="accent3" accent4="accent4" accent5="accent5" accent6="accent6" hlink="hlink" folHlink="folHlink"/>
 </p:handoutMaster>
@@ -569,7 +574,7 @@
               <a:pPr>
                 <a:defRPr/>
               </a:pPr>
-              <a:t>3/7/2019</a:t>
+              <a:t>11/24/2025</a:t>
             </a:fld>
             <a:endParaRPr lang="en-US" altLang="en-US"/>
           </a:p>
@@ -1179,21 +1184,7 @@
           <a:bodyPr/>
           <a:lstStyle/>
           <a:p>
-            <a:pPr marL="0" marR="0" lvl="0" indent="0" algn="l" defTabSz="914400" rtl="0" eaLnBrk="0" fontAlgn="base" latinLnBrk="0" hangingPunct="0">
-              <a:lnSpc>
-                <a:spcPct val="100000"/>
-              </a:lnSpc>
-              <a:spcBef>
-                <a:spcPct val="30000"/>
-              </a:spcBef>
-              <a:spcAft>
-                <a:spcPct val="0"/>
-              </a:spcAft>
-              <a:buClrTx/>
-              <a:buSzTx/>
-              <a:buFontTx/>
-              <a:buNone/>
-              <a:tabLst/>
+            <a:pPr>
               <a:defRPr/>
             </a:pPr>
             <a:r>
@@ -1203,10 +1194,86 @@
                 </a:solidFill>
                 <a:effectLst/>
                 <a:latin typeface="+mn-lt"/>
-                <a:ea typeface="ＭＳ Ｐゴシック" charset="0"/>
-                <a:cs typeface="ＭＳ Ｐゴシック" charset="0"/>
-              </a:rPr>
-              <a:t>The bootloader has an important role in the initial stages of booting up the machine. In order for software to be run, the processor needs to know where the software is located, how it can access the location, and where the stack is located.</a:t>
+                <a:ea typeface="ＭＳ Ｐゴシック"/>
+                <a:cs typeface="Calibri"/>
+              </a:rPr>
+              <a:t>The bootloader </a:t>
+            </a:r>
+            <a:r>
+              <a:rPr lang="en-US" dirty="0">
+                <a:ea typeface="ＭＳ Ｐゴシック"/>
+                <a:cs typeface="Calibri"/>
+              </a:rPr>
+              <a:t>plays an</a:t>
+            </a:r>
+            <a:r>
+              <a:rPr lang="en-US" sz="1200" kern="1200" dirty="0">
+                <a:solidFill>
+                  <a:schemeClr val="tx1"/>
+                </a:solidFill>
+                <a:effectLst/>
+                <a:latin typeface="+mn-lt"/>
+                <a:ea typeface="ＭＳ Ｐゴシック"/>
+                <a:cs typeface="Calibri"/>
+              </a:rPr>
+              <a:t> important role in the initial stages of </a:t>
+            </a:r>
+            <a:r>
+              <a:rPr lang="en-US" dirty="0">
+                <a:ea typeface="ＭＳ Ｐゴシック"/>
+                <a:cs typeface="Calibri"/>
+              </a:rPr>
+              <a:t>the boot process</a:t>
+            </a:r>
+            <a:r>
+              <a:rPr lang="en-US" sz="1200" kern="1200" dirty="0">
+                <a:solidFill>
+                  <a:schemeClr val="tx1"/>
+                </a:solidFill>
+                <a:effectLst/>
+                <a:latin typeface="+mn-lt"/>
+                <a:ea typeface="ＭＳ Ｐゴシック"/>
+                <a:cs typeface="Calibri"/>
+              </a:rPr>
+              <a:t>. </a:t>
+            </a:r>
+            <a:r>
+              <a:rPr lang="en-US" dirty="0">
+                <a:ea typeface="ＭＳ Ｐゴシック"/>
+                <a:cs typeface="Calibri"/>
+              </a:rPr>
+              <a:t>For</a:t>
+            </a:r>
+            <a:r>
+              <a:rPr lang="en-US" sz="1200" kern="1200" dirty="0">
+                <a:solidFill>
+                  <a:schemeClr val="tx1"/>
+                </a:solidFill>
+                <a:effectLst/>
+                <a:latin typeface="+mn-lt"/>
+                <a:ea typeface="ＭＳ Ｐゴシック"/>
+                <a:cs typeface="Calibri"/>
+              </a:rPr>
+              <a:t> software to run, the processor </a:t>
+            </a:r>
+            <a:r>
+              <a:rPr lang="en-US" dirty="0">
+                <a:ea typeface="ＭＳ Ｐゴシック"/>
+                <a:cs typeface="Calibri"/>
+              </a:rPr>
+              <a:t>must</a:t>
+            </a:r>
+            <a:r>
+              <a:rPr lang="en-US" sz="1200" kern="1200" dirty="0">
+                <a:solidFill>
+                  <a:schemeClr val="tx1"/>
+                </a:solidFill>
+                <a:effectLst/>
+                <a:latin typeface="+mn-lt"/>
+                <a:ea typeface="ＭＳ Ｐゴシック"/>
+                <a:cs typeface="Calibri"/>
+              </a:rPr>
+              <a:t> know where the software is located, how it can access the location, and where the stack is located.</a:t>
             </a:r>
           </a:p>
           <a:p>
@@ -1310,7 +1377,7 @@
                 <a:ea typeface="ＭＳ Ｐゴシック" charset="0"/>
                 <a:cs typeface="ＭＳ Ｐゴシック" charset="0"/>
               </a:rPr>
-              <a:t>When a system is powered-up, a program counter is set to a default known value, which is the reset vector. </a:t>
+              <a:t>When a system is powered-up, a program counter is set to a default known value, which is the reset vector. On Cortex-M, this is generally address 0x4</a:t>
             </a:r>
           </a:p>
           <a:p>
@@ -1329,6 +1396,46 @@
           </a:p>
           <a:p>
             <a:r>
+              <a:rPr lang="en-US" dirty="0">
+                <a:ea typeface="ＭＳ Ｐゴシック"/>
+                <a:cs typeface="Calibri"/>
+              </a:rPr>
+              <a:t>The</a:t>
+            </a:r>
+            <a:r>
+              <a:rPr lang="en-US" sz="1200" kern="1200" dirty="0">
+                <a:solidFill>
+                  <a:schemeClr val="tx1"/>
+                </a:solidFill>
+                <a:effectLst/>
+                <a:latin typeface="+mn-lt"/>
+                <a:ea typeface="ＭＳ Ｐゴシック"/>
+                <a:cs typeface="Calibri"/>
+              </a:rPr>
+              <a:t> program counter is a register that holds the address of the instruction that is next to be </a:t>
+            </a:r>
+            <a:r>
+              <a:rPr lang="en-US" dirty="0">
+                <a:ea typeface="ＭＳ Ｐゴシック"/>
+                <a:cs typeface="Calibri"/>
+              </a:rPr>
+              <a:t>executed</a:t>
+            </a:r>
+            <a:r>
+              <a:rPr lang="en-US" sz="1200" kern="1200" dirty="0">
+                <a:solidFill>
+                  <a:schemeClr val="tx1"/>
+                </a:solidFill>
+                <a:effectLst/>
+                <a:latin typeface="+mn-lt"/>
+                <a:ea typeface="ＭＳ Ｐゴシック"/>
+                <a:cs typeface="Calibri"/>
+              </a:rPr>
+              <a:t>. </a:t>
+            </a:r>
+          </a:p>
+          <a:p>
+            <a:r>
               <a:rPr lang="en-US" sz="1200" kern="1200" dirty="0">
                 <a:solidFill>
                   <a:schemeClr val="tx1"/>
@@ -1338,7 +1445,7 @@
                 <a:ea typeface="ＭＳ Ｐゴシック" charset="0"/>
                 <a:cs typeface="ＭＳ Ｐゴシック" charset="0"/>
               </a:rPr>
-              <a:t>A program counter is a register that holds the address of the instruction that is next to be run. </a:t>
+              <a:t> </a:t>
             </a:r>
           </a:p>
           <a:p>
@@ -1352,7 +1459,7 @@
                 <a:ea typeface="ＭＳ Ｐゴシック" charset="0"/>
                 <a:cs typeface="ＭＳ Ｐゴシック" charset="0"/>
               </a:rPr>
-              <a:t> </a:t>
+              <a:t>The reset vector is a pointer to an address that contains the first instruction to be executed for the firmware.</a:t>
             </a:r>
           </a:p>
           <a:p>
@@ -1366,7 +1473,7 @@
                 <a:ea typeface="ＭＳ Ｐゴシック" charset="0"/>
                 <a:cs typeface="ＭＳ Ｐゴシック" charset="0"/>
               </a:rPr>
-              <a:t>The reset vector is a pointer to an address that contains the first instruction to be executed for the firmware.</a:t>
+              <a:t> </a:t>
             </a:r>
           </a:p>
           <a:p>
@@ -1377,13 +1484,18 @@
                 </a:solidFill>
                 <a:effectLst/>
                 <a:latin typeface="+mn-lt"/>
-                <a:ea typeface="ＭＳ Ｐゴシック" charset="0"/>
-                <a:cs typeface="ＭＳ Ｐゴシック" charset="0"/>
-              </a:rPr>
-              <a:t> </a:t>
-            </a:r>
-          </a:p>
-          <a:p>
+                <a:ea typeface="ＭＳ Ｐゴシック"/>
+                <a:cs typeface="Calibri"/>
+              </a:rPr>
+              <a:t>The bootloader is the first </a:t>
+            </a:r>
+            <a:r>
+              <a:rPr lang="en-US" dirty="0">
+                <a:ea typeface="ＭＳ Ｐゴシック"/>
+                <a:cs typeface="Calibri"/>
+              </a:rPr>
+              <a:t>program</a:t>
+            </a:r>
             <a:r>
               <a:rPr lang="en-US" sz="1200" kern="1200" dirty="0">
                 <a:solidFill>
@@ -1391,10 +1503,48 @@
                 </a:solidFill>
                 <a:effectLst/>
                 <a:latin typeface="+mn-lt"/>
-                <a:ea typeface="ＭＳ Ｐゴシック" charset="0"/>
-                <a:cs typeface="ＭＳ Ｐゴシック" charset="0"/>
-              </a:rPr>
-              <a:t>The bootloader is the first thing to be run and will take care of providing the processer with all the information it needs, such as startup software location, how to access it, and where the stack is located.</a:t>
+                <a:ea typeface="ＭＳ Ｐゴシック"/>
+                <a:cs typeface="Calibri"/>
+              </a:rPr>
+              <a:t> </a:t>
+            </a:r>
+            <a:r>
+              <a:rPr lang="en-US" dirty="0">
+                <a:ea typeface="ＭＳ Ｐゴシック"/>
+                <a:cs typeface="Calibri"/>
+              </a:rPr>
+              <a:t>to run</a:t>
+            </a:r>
+            <a:r>
+              <a:rPr lang="en-US" sz="1200" kern="1200" dirty="0">
+                <a:solidFill>
+                  <a:schemeClr val="tx1"/>
+                </a:solidFill>
+                <a:effectLst/>
+                <a:latin typeface="+mn-lt"/>
+                <a:ea typeface="ＭＳ Ｐゴシック"/>
+                <a:cs typeface="Calibri"/>
+              </a:rPr>
+              <a:t> and </a:t>
+            </a:r>
+            <a:r>
+              <a:rPr lang="en-US" dirty="0">
+                <a:ea typeface="ＭＳ Ｐゴシック"/>
+                <a:cs typeface="Calibri"/>
+              </a:rPr>
+              <a:t>takes</a:t>
+            </a:r>
+            <a:r>
+              <a:rPr lang="en-US" sz="1200" kern="1200" dirty="0">
+                <a:solidFill>
+                  <a:schemeClr val="tx1"/>
+                </a:solidFill>
+                <a:effectLst/>
+                <a:latin typeface="+mn-lt"/>
+                <a:ea typeface="ＭＳ Ｐゴシック"/>
+                <a:cs typeface="Calibri"/>
+              </a:rPr>
+              <a:t> care of providing the processer with all the information it needs, such as startup software location, how to access it, and where the stack is located.</a:t>
             </a:r>
           </a:p>
           <a:p>
@@ -1523,10 +1673,29 @@
                 </a:solidFill>
                 <a:effectLst/>
                 <a:latin typeface="+mn-lt"/>
-                <a:ea typeface="ＭＳ Ｐゴシック" charset="0"/>
-                <a:cs typeface="ＭＳ Ｐゴシック" charset="0"/>
-              </a:rPr>
-              <a:t>Looking back to the two different implementations of the reference hardware model, we can see how the bootloader is used differently.</a:t>
+                <a:ea typeface="ＭＳ Ｐゴシック"/>
+                <a:cs typeface="Calibri"/>
+              </a:rPr>
+              <a:t>Looking back </a:t>
+            </a:r>
+            <a:r>
+              <a:rPr lang="en-US" dirty="0">
+                <a:ea typeface="ＭＳ Ｐゴシック"/>
+                <a:cs typeface="Calibri"/>
+              </a:rPr>
+              <a:t>at </a:t>
+            </a:r>
+            <a:r>
+              <a:rPr lang="en-US" sz="1200" kern="1200" dirty="0">
+                <a:solidFill>
+                  <a:schemeClr val="tx1"/>
+                </a:solidFill>
+                <a:effectLst/>
+                <a:latin typeface="+mn-lt"/>
+                <a:ea typeface="ＭＳ Ｐゴシック"/>
+                <a:cs typeface="Calibri"/>
+              </a:rPr>
+              <a:t>the two different implementations of the reference hardware model, we can see how the bootloader is used differently.</a:t>
             </a:r>
           </a:p>
           <a:p>
@@ -1545,6 +1714,46 @@
           </a:p>
           <a:p>
             <a:r>
+              <a:rPr lang="en-US" dirty="0">
+                <a:ea typeface="ＭＳ Ｐゴシック"/>
+                <a:cs typeface="Calibri"/>
+              </a:rPr>
+              <a:t>In the</a:t>
+            </a:r>
+            <a:r>
+              <a:rPr lang="en-US" sz="1200" kern="1200" dirty="0">
+                <a:solidFill>
+                  <a:schemeClr val="tx1"/>
+                </a:solidFill>
+                <a:effectLst/>
+                <a:latin typeface="+mn-lt"/>
+                <a:ea typeface="ＭＳ Ｐゴシック"/>
+                <a:cs typeface="Calibri"/>
+              </a:rPr>
+              <a:t> microcontroller-based implementation, all the software is stored in a form of persistent storage embedded </a:t>
+            </a:r>
+            <a:r>
+              <a:rPr lang="en-US" dirty="0">
+                <a:ea typeface="ＭＳ Ｐゴシック"/>
+                <a:cs typeface="Calibri"/>
+              </a:rPr>
+              <a:t>within</a:t>
+            </a:r>
+            <a:r>
+              <a:rPr lang="en-US" sz="1200" kern="1200" dirty="0">
+                <a:solidFill>
+                  <a:schemeClr val="tx1"/>
+                </a:solidFill>
+                <a:effectLst/>
+                <a:latin typeface="+mn-lt"/>
+                <a:ea typeface="ＭＳ Ｐゴシック"/>
+                <a:cs typeface="Calibri"/>
+              </a:rPr>
+              <a:t> the microcontroller. This software is executed from the persistent storage.</a:t>
+            </a:r>
+          </a:p>
+          <a:p>
+            <a:r>
               <a:rPr lang="en-US" sz="1200" kern="1200" dirty="0">
                 <a:solidFill>
                   <a:schemeClr val="tx1"/>
@@ -1554,7 +1763,78 @@
                 <a:ea typeface="ＭＳ Ｐゴシック" charset="0"/>
                 <a:cs typeface="ＭＳ Ｐゴシック" charset="0"/>
               </a:rPr>
-              <a:t>For the microcontroller-based implementation, all of the software is stored in a form of persistent storage that is embedded into the microcontroller. This software is executed from the persistent storage.</a:t>
+              <a:t> </a:t>
+            </a:r>
+          </a:p>
+          <a:p>
+            <a:r>
+              <a:rPr lang="en-US" sz="1200" kern="1200" dirty="0">
+                <a:solidFill>
+                  <a:schemeClr val="tx1"/>
+                </a:solidFill>
+                <a:effectLst/>
+                <a:latin typeface="+mn-lt"/>
+                <a:ea typeface="ＭＳ Ｐゴシック"/>
+                <a:cs typeface="Calibri"/>
+              </a:rPr>
+              <a:t>The CPU reset vector</a:t>
+            </a:r>
+            <a:r>
+              <a:rPr lang="en-US" dirty="0">
+                <a:ea typeface="ＭＳ Ｐゴシック"/>
+                <a:cs typeface="Calibri"/>
+              </a:rPr>
+              <a:t>,</a:t>
+            </a:r>
+            <a:r>
+              <a:rPr lang="en-US" sz="1200" kern="1200" dirty="0">
+                <a:solidFill>
+                  <a:schemeClr val="tx1"/>
+                </a:solidFill>
+                <a:effectLst/>
+                <a:latin typeface="+mn-lt"/>
+                <a:ea typeface="ＭＳ Ｐゴシック"/>
+                <a:cs typeface="Calibri"/>
+              </a:rPr>
+              <a:t> </a:t>
+            </a:r>
+            <a:r>
+              <a:rPr lang="en-US" dirty="0">
+                <a:ea typeface="ＭＳ Ｐゴシック"/>
+                <a:cs typeface="Calibri"/>
+              </a:rPr>
+              <a:t>which</a:t>
+            </a:r>
+            <a:r>
+              <a:rPr lang="en-US" sz="1200" kern="1200" dirty="0">
+                <a:solidFill>
+                  <a:schemeClr val="tx1"/>
+                </a:solidFill>
+                <a:effectLst/>
+                <a:latin typeface="+mn-lt"/>
+                <a:ea typeface="ＭＳ Ｐゴシック"/>
+                <a:cs typeface="Calibri"/>
+              </a:rPr>
+              <a:t> points to the bootloader</a:t>
+            </a:r>
+            <a:r>
+              <a:rPr lang="en-US" dirty="0">
+                <a:ea typeface="ＭＳ Ｐゴシック"/>
+                <a:cs typeface="Calibri"/>
+              </a:rPr>
+              <a:t>,</a:t>
+            </a:r>
+            <a:r>
+              <a:rPr lang="en-US" sz="1200" kern="1200" dirty="0">
+                <a:solidFill>
+                  <a:schemeClr val="tx1"/>
+                </a:solidFill>
+                <a:effectLst/>
+                <a:latin typeface="+mn-lt"/>
+                <a:ea typeface="ＭＳ Ｐゴシック"/>
+                <a:cs typeface="Calibri"/>
+              </a:rPr>
+              <a:t> is located in the boot flash.</a:t>
             </a:r>
           </a:p>
           <a:p>
@@ -1579,13 +1859,18 @@
                 </a:solidFill>
                 <a:effectLst/>
                 <a:latin typeface="+mn-lt"/>
-                <a:ea typeface="ＭＳ Ｐゴシック" charset="0"/>
-                <a:cs typeface="ＭＳ Ｐゴシック" charset="0"/>
-              </a:rPr>
-              <a:t>The CPU reset vector that points to the bootloader is located in the boot flash.</a:t>
-            </a:r>
-          </a:p>
-          <a:p>
+                <a:ea typeface="ＭＳ Ｐゴシック"/>
+                <a:cs typeface="Calibri"/>
+              </a:rPr>
+              <a:t>Finally, the RAM is also embedded </a:t>
+            </a:r>
+            <a:r>
+              <a:rPr lang="en-US" dirty="0">
+                <a:ea typeface="ＭＳ Ｐゴシック"/>
+                <a:cs typeface="Calibri"/>
+              </a:rPr>
+              <a:t>in</a:t>
+            </a:r>
             <a:r>
               <a:rPr lang="en-US" sz="1200" kern="1200" dirty="0">
                 <a:solidFill>
@@ -1593,13 +1878,18 @@
                 </a:solidFill>
                 <a:effectLst/>
                 <a:latin typeface="+mn-lt"/>
-                <a:ea typeface="ＭＳ Ｐゴシック" charset="0"/>
-                <a:cs typeface="ＭＳ Ｐゴシック" charset="0"/>
-              </a:rPr>
-              <a:t> </a:t>
-            </a:r>
-          </a:p>
-          <a:p>
+                <a:ea typeface="ＭＳ Ｐゴシック"/>
+                <a:cs typeface="Calibri"/>
+              </a:rPr>
+              <a:t> the microcontroller and is </a:t>
+            </a:r>
+            <a:r>
+              <a:rPr lang="en-US" dirty="0">
+                <a:ea typeface="ＭＳ Ｐゴシック"/>
+                <a:cs typeface="Calibri"/>
+              </a:rPr>
+              <a:t>used </a:t>
+            </a:r>
             <a:r>
               <a:rPr lang="en-US" sz="1200" kern="1200" dirty="0">
                 <a:solidFill>
@@ -1607,10 +1897,10 @@
                 </a:solidFill>
                 <a:effectLst/>
                 <a:latin typeface="+mn-lt"/>
-                <a:ea typeface="ＭＳ Ｐゴシック" charset="0"/>
-                <a:cs typeface="ＭＳ Ｐゴシック" charset="0"/>
-              </a:rPr>
-              <a:t>Finally, the RAM is also embedded into the microcontroller and is exclusively used for data, the stack, and the heap.</a:t>
+                <a:ea typeface="ＭＳ Ｐゴシック"/>
+                <a:cs typeface="Calibri"/>
+              </a:rPr>
+              <a:t>exclusively for data, the stack, and the heap.</a:t>
             </a:r>
           </a:p>
           <a:p>
@@ -1705,6 +1995,84 @@
           <a:lstStyle/>
           <a:p>
             <a:r>
+              <a:rPr lang="en-US" dirty="0">
+                <a:ea typeface="ＭＳ Ｐゴシック"/>
+                <a:cs typeface="Calibri"/>
+              </a:rPr>
+              <a:t>In</a:t>
+            </a:r>
+            <a:r>
+              <a:rPr lang="en-US" sz="1200" kern="1200" dirty="0">
+                <a:solidFill>
+                  <a:schemeClr val="tx1"/>
+                </a:solidFill>
+                <a:effectLst/>
+                <a:latin typeface="+mn-lt"/>
+                <a:ea typeface="ＭＳ Ｐゴシック"/>
+                <a:cs typeface="Calibri"/>
+              </a:rPr>
+              <a:t> the system-on-chip </a:t>
+            </a:r>
+            <a:r>
+              <a:rPr lang="en-US" dirty="0">
+                <a:ea typeface="ＭＳ Ｐゴシック"/>
+                <a:cs typeface="Calibri"/>
+              </a:rPr>
+              <a:t>(SoC) </a:t>
+            </a:r>
+            <a:r>
+              <a:rPr lang="en-US" sz="1200" kern="1200" dirty="0">
+                <a:solidFill>
+                  <a:schemeClr val="tx1"/>
+                </a:solidFill>
+                <a:effectLst/>
+                <a:latin typeface="+mn-lt"/>
+                <a:ea typeface="ＭＳ Ｐゴシック"/>
+                <a:cs typeface="Calibri"/>
+              </a:rPr>
+              <a:t>implementation of the reference hardware model, </a:t>
+            </a:r>
+            <a:r>
+              <a:rPr lang="en-US" dirty="0">
+                <a:ea typeface="ＭＳ Ｐゴシック"/>
+                <a:cs typeface="Calibri"/>
+              </a:rPr>
+              <a:t>the arrangement </a:t>
+            </a:r>
+            <a:r>
+              <a:rPr lang="en-US" sz="1200" kern="1200" dirty="0">
+                <a:solidFill>
+                  <a:schemeClr val="tx1"/>
+                </a:solidFill>
+                <a:effectLst/>
+                <a:latin typeface="+mn-lt"/>
+                <a:ea typeface="ＭＳ Ｐゴシック"/>
+                <a:cs typeface="Calibri"/>
+              </a:rPr>
+              <a:t>is </a:t>
+            </a:r>
+            <a:r>
+              <a:rPr lang="en-US" dirty="0">
+                <a:ea typeface="ＭＳ Ｐゴシック"/>
+                <a:cs typeface="Calibri"/>
+              </a:rPr>
+              <a:t>different</a:t>
+            </a:r>
+            <a:r>
+              <a:rPr lang="en-US" sz="1200" kern="1200" dirty="0">
+                <a:solidFill>
+                  <a:schemeClr val="tx1"/>
+                </a:solidFill>
+                <a:effectLst/>
+                <a:latin typeface="+mn-lt"/>
+                <a:ea typeface="ＭＳ Ｐゴシック"/>
+                <a:cs typeface="Calibri"/>
+              </a:rPr>
+              <a:t>.</a:t>
+            </a:r>
+          </a:p>
+          <a:p>
+            <a:r>
               <a:rPr lang="en-US" sz="1200" kern="1200" dirty="0">
                 <a:solidFill>
                   <a:schemeClr val="tx1"/>
@@ -1714,7 +2082,78 @@
                 <a:ea typeface="ＭＳ Ｐゴシック" charset="0"/>
                 <a:cs typeface="ＭＳ Ｐゴシック" charset="0"/>
               </a:rPr>
-              <a:t>For the system-on-chip based implementation of the reference hardware model, it is arranged differently.</a:t>
+              <a:t> </a:t>
+            </a:r>
+          </a:p>
+          <a:p>
+            <a:r>
+              <a:rPr lang="en-US" sz="1200" kern="1200" dirty="0">
+                <a:solidFill>
+                  <a:schemeClr val="tx1"/>
+                </a:solidFill>
+                <a:effectLst/>
+                <a:latin typeface="+mn-lt"/>
+                <a:ea typeface="ＭＳ Ｐゴシック"/>
+                <a:cs typeface="Calibri"/>
+              </a:rPr>
+              <a:t>The bootloader</a:t>
+            </a:r>
+            <a:r>
+              <a:rPr lang="en-US" dirty="0">
+                <a:ea typeface="ＭＳ Ｐゴシック"/>
+                <a:cs typeface="Calibri"/>
+              </a:rPr>
+              <a:t>,</a:t>
+            </a:r>
+            <a:r>
+              <a:rPr lang="en-US" sz="1200" kern="1200" dirty="0">
+                <a:solidFill>
+                  <a:schemeClr val="tx1"/>
+                </a:solidFill>
+                <a:effectLst/>
+                <a:latin typeface="+mn-lt"/>
+                <a:ea typeface="ＭＳ Ｐゴシック"/>
+                <a:cs typeface="Calibri"/>
+              </a:rPr>
+              <a:t> </a:t>
+            </a:r>
+            <a:r>
+              <a:rPr lang="en-US" dirty="0">
+                <a:ea typeface="ＭＳ Ｐゴシック"/>
+                <a:cs typeface="Calibri"/>
+              </a:rPr>
+              <a:t>along with the CPU reset vector, </a:t>
+            </a:r>
+            <a:r>
+              <a:rPr lang="en-US" sz="1200" kern="1200" dirty="0">
+                <a:solidFill>
+                  <a:schemeClr val="tx1"/>
+                </a:solidFill>
+                <a:effectLst/>
+                <a:latin typeface="+mn-lt"/>
+                <a:ea typeface="ＭＳ Ｐゴシック"/>
+                <a:cs typeface="Calibri"/>
+              </a:rPr>
+              <a:t>is still stored in </a:t>
+            </a:r>
+            <a:r>
+              <a:rPr lang="en-US" dirty="0">
+                <a:ea typeface="ＭＳ Ｐゴシック"/>
+                <a:cs typeface="Calibri"/>
+              </a:rPr>
+              <a:t>the boot</a:t>
+            </a:r>
+            <a:r>
+              <a:rPr lang="en-US" sz="1200" kern="1200" dirty="0">
+                <a:solidFill>
+                  <a:schemeClr val="tx1"/>
+                </a:solidFill>
+                <a:effectLst/>
+                <a:latin typeface="+mn-lt"/>
+                <a:ea typeface="ＭＳ Ｐゴシック"/>
+                <a:cs typeface="Calibri"/>
+              </a:rPr>
+              <a:t> flash, similar to the microcontroller implementation.</a:t>
             </a:r>
           </a:p>
           <a:p>
@@ -1733,6 +2172,103 @@
           </a:p>
           <a:p>
             <a:r>
+              <a:rPr lang="en-US" dirty="0">
+                <a:ea typeface="ＭＳ Ｐゴシック"/>
+                <a:cs typeface="Calibri"/>
+              </a:rPr>
+              <a:t>However,</a:t>
+            </a:r>
+            <a:r>
+              <a:rPr lang="en-US" sz="1200" kern="1200" dirty="0">
+                <a:solidFill>
+                  <a:schemeClr val="tx1"/>
+                </a:solidFill>
+                <a:effectLst/>
+                <a:latin typeface="+mn-lt"/>
+                <a:ea typeface="ＭＳ Ｐゴシック"/>
+                <a:cs typeface="Calibri"/>
+              </a:rPr>
+              <a:t> unlike the microcontroller, the software </a:t>
+            </a:r>
+            <a:r>
+              <a:rPr lang="en-US" dirty="0">
+                <a:ea typeface="ＭＳ Ｐゴシック"/>
+                <a:cs typeface="Calibri"/>
+              </a:rPr>
+              <a:t>components, such</a:t>
+            </a:r>
+            <a:r>
+              <a:rPr lang="en-US" sz="1200" kern="1200" dirty="0">
+                <a:solidFill>
+                  <a:schemeClr val="tx1"/>
+                </a:solidFill>
+                <a:effectLst/>
+                <a:latin typeface="+mn-lt"/>
+                <a:ea typeface="ＭＳ Ｐゴシック"/>
+                <a:cs typeface="Calibri"/>
+              </a:rPr>
+              <a:t> as applications, system programs, operating system, and device tree</a:t>
+            </a:r>
+            <a:r>
+              <a:rPr lang="en-US" dirty="0">
+                <a:ea typeface="ＭＳ Ｐゴシック"/>
+                <a:cs typeface="Calibri"/>
+              </a:rPr>
+              <a:t>,</a:t>
+            </a:r>
+            <a:r>
+              <a:rPr lang="en-US" sz="1200" kern="1200" dirty="0">
+                <a:solidFill>
+                  <a:schemeClr val="tx1"/>
+                </a:solidFill>
+                <a:effectLst/>
+                <a:latin typeface="+mn-lt"/>
+                <a:ea typeface="ＭＳ Ｐゴシック"/>
+                <a:cs typeface="Calibri"/>
+              </a:rPr>
+              <a:t> are stored </a:t>
+            </a:r>
+            <a:r>
+              <a:rPr lang="en-US" dirty="0">
+                <a:ea typeface="ＭＳ Ｐゴシック"/>
+                <a:cs typeface="Calibri"/>
+              </a:rPr>
+              <a:t>in</a:t>
+            </a:r>
+            <a:r>
+              <a:rPr lang="en-US" sz="1200" kern="1200" dirty="0">
+                <a:solidFill>
+                  <a:schemeClr val="tx1"/>
+                </a:solidFill>
+                <a:effectLst/>
+                <a:latin typeface="+mn-lt"/>
+                <a:ea typeface="ＭＳ Ｐゴシック"/>
+                <a:cs typeface="Calibri"/>
+              </a:rPr>
+              <a:t> the mass memory flash but are loaded </a:t>
+            </a:r>
+            <a:r>
+              <a:rPr lang="en-US" dirty="0">
+                <a:ea typeface="ＭＳ Ｐゴシック"/>
+                <a:cs typeface="Calibri"/>
+              </a:rPr>
+              <a:t>into</a:t>
+            </a:r>
+            <a:r>
+              <a:rPr lang="en-US" sz="1200" kern="1200" dirty="0">
+                <a:solidFill>
+                  <a:schemeClr val="tx1"/>
+                </a:solidFill>
+                <a:effectLst/>
+                <a:latin typeface="+mn-lt"/>
+                <a:ea typeface="ＭＳ Ｐゴシック"/>
+                <a:cs typeface="Calibri"/>
+              </a:rPr>
+              <a:t> RAM by the bootloader.</a:t>
+            </a:r>
+          </a:p>
+          <a:p>
+            <a:r>
               <a:rPr lang="en-US" sz="1200" kern="1200" dirty="0">
                 <a:solidFill>
                   <a:schemeClr val="tx1"/>
@@ -1742,7 +2278,7 @@
                 <a:ea typeface="ＭＳ Ｐゴシック" charset="0"/>
                 <a:cs typeface="ＭＳ Ｐゴシック" charset="0"/>
               </a:rPr>
-              <a:t>The bootloader is still stored in boot flash, similar to the microcontroller implementation, as well as the CPU reset vector.</a:t>
+              <a:t> </a:t>
             </a:r>
           </a:p>
           <a:p>
@@ -1753,13 +2289,18 @@
                 </a:solidFill>
                 <a:effectLst/>
                 <a:latin typeface="+mn-lt"/>
-                <a:ea typeface="ＭＳ Ｐゴシック" charset="0"/>
-                <a:cs typeface="ＭＳ Ｐゴシック" charset="0"/>
-              </a:rPr>
-              <a:t> </a:t>
-            </a:r>
-          </a:p>
-          <a:p>
+                <a:ea typeface="ＭＳ Ｐゴシック"/>
+                <a:cs typeface="Calibri"/>
+              </a:rPr>
+              <a:t>Finally, the RAM is external to the system-on-chip and </a:t>
+            </a:r>
+            <a:r>
+              <a:rPr lang="en-US" dirty="0">
+                <a:ea typeface="ＭＳ Ｐゴシック"/>
+                <a:cs typeface="Calibri"/>
+              </a:rPr>
+              <a:t>stores</a:t>
+            </a:r>
             <a:r>
               <a:rPr lang="en-US" sz="1200" kern="1200" dirty="0">
                 <a:solidFill>
@@ -1767,13 +2308,18 @@
                 </a:solidFill>
                 <a:effectLst/>
                 <a:latin typeface="+mn-lt"/>
-                <a:ea typeface="ＭＳ Ｐゴシック" charset="0"/>
-                <a:cs typeface="ＭＳ Ｐゴシック" charset="0"/>
-              </a:rPr>
-              <a:t>But unlike the microcontroller, the software such as applications, system programs, operating system, and device tree are stored on the mass memory flash but are loaded onto RAM by the bootloader.</a:t>
-            </a:r>
-          </a:p>
-          <a:p>
+                <a:ea typeface="ＭＳ Ｐゴシック"/>
+                <a:cs typeface="Calibri"/>
+              </a:rPr>
+              <a:t> what </a:t>
+            </a:r>
+            <a:r>
+              <a:rPr lang="en-US" dirty="0">
+                <a:ea typeface="ＭＳ Ｐゴシック"/>
+                <a:cs typeface="Calibri"/>
+              </a:rPr>
+              <a:t>has been loaded</a:t>
+            </a:r>
             <a:r>
               <a:rPr lang="en-US" sz="1200" kern="1200" dirty="0">
                 <a:solidFill>
@@ -1781,13 +2327,18 @@
                 </a:solidFill>
                 <a:effectLst/>
                 <a:latin typeface="+mn-lt"/>
-                <a:ea typeface="ＭＳ Ｐゴシック" charset="0"/>
-                <a:cs typeface="ＭＳ Ｐゴシック" charset="0"/>
-              </a:rPr>
-              <a:t> </a:t>
-            </a:r>
-          </a:p>
-          <a:p>
+                <a:ea typeface="ＭＳ Ｐゴシック"/>
+                <a:cs typeface="Calibri"/>
+              </a:rPr>
+              <a:t> </a:t>
+            </a:r>
+            <a:r>
+              <a:rPr lang="en-US" dirty="0">
+                <a:ea typeface="ＭＳ Ｐゴシック"/>
+                <a:cs typeface="Calibri"/>
+              </a:rPr>
+              <a:t>into</a:t>
+            </a:r>
             <a:r>
               <a:rPr lang="en-US" sz="1200" kern="1200" dirty="0">
                 <a:solidFill>
@@ -1795,10 +2346,10 @@
                 </a:solidFill>
                 <a:effectLst/>
                 <a:latin typeface="+mn-lt"/>
-                <a:ea typeface="ＭＳ Ｐゴシック" charset="0"/>
-                <a:cs typeface="ＭＳ Ｐゴシック" charset="0"/>
-              </a:rPr>
-              <a:t>Finally, the RAM is external to the system-on-chip and it will store what was loaded onto it by the bootloader, as well as data, the stack, and the heap.</a:t>
+                <a:ea typeface="ＭＳ Ｐゴシック"/>
+                <a:cs typeface="Calibri"/>
+              </a:rPr>
+              <a:t> it by the bootloader, as well as data, the stack, and the heap.</a:t>
             </a:r>
           </a:p>
           <a:p>
@@ -1899,10 +2450,29 @@
                 </a:solidFill>
                 <a:effectLst/>
                 <a:latin typeface="+mn-lt"/>
-                <a:ea typeface="ＭＳ Ｐゴシック" charset="0"/>
-                <a:cs typeface="ＭＳ Ｐゴシック" charset="0"/>
-              </a:rPr>
-              <a:t>Let’s look at an example of the bootloader’s operations for the system-on-chip implementation.</a:t>
+                <a:ea typeface="ＭＳ Ｐゴシック"/>
+                <a:cs typeface="Calibri"/>
+              </a:rPr>
+              <a:t>Let’s look at an example of the bootloader’s operations for the system-on-chip </a:t>
+            </a:r>
+            <a:r>
+              <a:rPr lang="en-US" dirty="0">
+                <a:ea typeface="ＭＳ Ｐゴシック"/>
+                <a:cs typeface="Calibri"/>
+              </a:rPr>
+              <a:t>(SoC) </a:t>
+            </a:r>
+            <a:r>
+              <a:rPr lang="en-US" sz="1200" kern="1200" dirty="0">
+                <a:solidFill>
+                  <a:schemeClr val="tx1"/>
+                </a:solidFill>
+                <a:effectLst/>
+                <a:latin typeface="+mn-lt"/>
+                <a:ea typeface="ＭＳ Ｐゴシック"/>
+                <a:cs typeface="Calibri"/>
+              </a:rPr>
+              <a:t>implementation.</a:t>
             </a:r>
           </a:p>
           <a:p>
@@ -2171,10 +2741,29 @@
                 </a:solidFill>
                 <a:effectLst/>
                 <a:latin typeface="+mn-lt"/>
-                <a:ea typeface="ＭＳ Ｐゴシック" charset="0"/>
-                <a:cs typeface="ＭＳ Ｐゴシック" charset="0"/>
-              </a:rPr>
-              <a:t>The mass memory flash address range will be preloaded with the components such as the device tree, the operating system, the systems programs, and the applications.</a:t>
+                <a:ea typeface="ＭＳ Ｐゴシック"/>
+                <a:cs typeface="Calibri"/>
+              </a:rPr>
+              <a:t>The mass memory flash address range </a:t>
+            </a:r>
+            <a:r>
+              <a:rPr lang="en-US" dirty="0">
+                <a:ea typeface="ＭＳ Ｐゴシック"/>
+                <a:cs typeface="Calibri"/>
+              </a:rPr>
+              <a:t>is </a:t>
+            </a:r>
+            <a:r>
+              <a:rPr lang="en-US" sz="1200" kern="1200" dirty="0">
+                <a:solidFill>
+                  <a:schemeClr val="tx1"/>
+                </a:solidFill>
+                <a:effectLst/>
+                <a:latin typeface="+mn-lt"/>
+                <a:ea typeface="ＭＳ Ｐゴシック"/>
+                <a:cs typeface="Calibri"/>
+              </a:rPr>
+              <a:t>preloaded with the components such as the device tree, the operating system, the systems programs, and the applications.</a:t>
             </a:r>
           </a:p>
           <a:p>
@@ -2303,10 +2892,29 @@
                 </a:solidFill>
                 <a:effectLst/>
                 <a:latin typeface="+mn-lt"/>
-                <a:ea typeface="ＭＳ Ｐゴシック" charset="0"/>
-                <a:cs typeface="ＭＳ Ｐゴシック" charset="0"/>
-              </a:rPr>
-              <a:t>At this point, the CPU will start executing processes using the reset vector. It will initially jump to the first instruction of the bootloader and then run the bootloader software from boot flash memory.</a:t>
+                <a:ea typeface="ＭＳ Ｐゴシック"/>
+                <a:cs typeface="Calibri"/>
+              </a:rPr>
+              <a:t>At this point, the CPU </a:t>
+            </a:r>
+            <a:r>
+              <a:rPr lang="en-US" dirty="0">
+                <a:ea typeface="ＭＳ Ｐゴシック"/>
+                <a:cs typeface="Calibri"/>
+              </a:rPr>
+              <a:t>starts</a:t>
+            </a:r>
+            <a:r>
+              <a:rPr lang="en-US" sz="1200" kern="1200" dirty="0">
+                <a:solidFill>
+                  <a:schemeClr val="tx1"/>
+                </a:solidFill>
+                <a:effectLst/>
+                <a:latin typeface="+mn-lt"/>
+                <a:ea typeface="ＭＳ Ｐゴシック"/>
+                <a:cs typeface="Calibri"/>
+              </a:rPr>
+              <a:t> executing processes using the reset vector. It will initially jump to the first instruction of the bootloader and then run the bootloader software from boot flash memory.</a:t>
             </a:r>
           </a:p>
           <a:p>
@@ -2401,6 +3009,77 @@
           <a:lstStyle/>
           <a:p>
             <a:r>
+              <a:rPr lang="en-US" sz="1200" kern="1200">
+                <a:solidFill>
+                  <a:schemeClr val="tx1"/>
+                </a:solidFill>
+                <a:effectLst/>
+                <a:latin typeface="+mn-lt"/>
+                <a:ea typeface="ＭＳ Ｐゴシック"/>
+                <a:cs typeface="Calibri"/>
+              </a:rPr>
+              <a:t>The next state is during the bootstrap process. In this phase, the </a:t>
+            </a:r>
+            <a:r>
+              <a:rPr lang="en-US">
+                <a:ea typeface="ＭＳ Ｐゴシック"/>
+                <a:cs typeface="Calibri"/>
+              </a:rPr>
+              <a:t>CPU's</a:t>
+            </a:r>
+            <a:r>
+              <a:rPr lang="en-US" sz="1200" kern="1200">
+                <a:solidFill>
+                  <a:schemeClr val="tx1"/>
+                </a:solidFill>
+                <a:effectLst/>
+                <a:latin typeface="+mn-lt"/>
+                <a:ea typeface="ＭＳ Ｐゴシック"/>
+                <a:cs typeface="Calibri"/>
+              </a:rPr>
+              <a:t> RAM controller will be initialized</a:t>
+            </a:r>
+            <a:r>
+              <a:rPr lang="en-US">
+                <a:ea typeface="ＭＳ Ｐゴシック"/>
+                <a:cs typeface="Calibri"/>
+              </a:rPr>
+              <a:t>, and the</a:t>
+            </a:r>
+            <a:r>
+              <a:rPr lang="en-US" sz="1200" kern="1200">
+                <a:solidFill>
+                  <a:schemeClr val="tx1"/>
+                </a:solidFill>
+                <a:effectLst/>
+                <a:latin typeface="+mn-lt"/>
+                <a:ea typeface="ＭＳ Ｐゴシック"/>
+                <a:cs typeface="Calibri"/>
+              </a:rPr>
+              <a:t> CPU registers for mapping the stack and heap to RAM </a:t>
+            </a:r>
+            <a:r>
+              <a:rPr lang="en-US">
+                <a:ea typeface="ＭＳ Ｐゴシック"/>
+                <a:cs typeface="Calibri"/>
+              </a:rPr>
+              <a:t>will be set up</a:t>
+            </a:r>
+            <a:r>
+              <a:rPr lang="en-US" sz="1200" kern="1200">
+                <a:solidFill>
+                  <a:schemeClr val="tx1"/>
+                </a:solidFill>
+                <a:effectLst/>
+                <a:latin typeface="+mn-lt"/>
+                <a:ea typeface="ＭＳ Ｐゴシック"/>
+                <a:cs typeface="Calibri"/>
+              </a:rPr>
+              <a:t>.</a:t>
+            </a:r>
+          </a:p>
+          <a:p>
+            <a:r>
               <a:rPr lang="en-US" sz="1200" kern="1200" dirty="0">
                 <a:solidFill>
                   <a:schemeClr val="tx1"/>
@@ -2410,7 +3089,7 @@
                 <a:ea typeface="ＭＳ Ｐゴシック" charset="0"/>
                 <a:cs typeface="ＭＳ Ｐゴシック" charset="0"/>
               </a:rPr>
-              <a:t>The next state is during the bootstrap process. In this phase, the CPU RAM controller will be initialized. Also, the CPU registers for mapping the stack and heap to RAM will be set up.</a:t>
+              <a:t> </a:t>
             </a:r>
           </a:p>
           <a:p>
@@ -2421,13 +3100,18 @@
                 </a:solidFill>
                 <a:effectLst/>
                 <a:latin typeface="+mn-lt"/>
-                <a:ea typeface="ＭＳ Ｐゴシック" charset="0"/>
-                <a:cs typeface="ＭＳ Ｐゴシック" charset="0"/>
-              </a:rPr>
-              <a:t> </a:t>
-            </a:r>
-          </a:p>
-          <a:p>
+                <a:ea typeface="ＭＳ Ｐゴシック"/>
+                <a:cs typeface="Calibri"/>
+              </a:rPr>
+              <a:t>Finally, the device tree, operating system, system programs, and applications </a:t>
+            </a:r>
+            <a:r>
+              <a:rPr lang="en-US" dirty="0">
+                <a:ea typeface="ＭＳ Ｐゴシック"/>
+                <a:cs typeface="Calibri"/>
+              </a:rPr>
+              <a:t>are copied</a:t>
+            </a:r>
             <a:r>
               <a:rPr lang="en-US" sz="1200" kern="1200" dirty="0">
                 <a:solidFill>
@@ -2435,10 +3119,10 @@
                 </a:solidFill>
                 <a:effectLst/>
                 <a:latin typeface="+mn-lt"/>
-                <a:ea typeface="ＭＳ Ｐゴシック" charset="0"/>
-                <a:cs typeface="ＭＳ Ｐゴシック" charset="0"/>
-              </a:rPr>
-              <a:t>Finally, the device tree, operating system, system programs, and applications will be copied across to RAM.</a:t>
+                <a:ea typeface="ＭＳ Ｐゴシック"/>
+                <a:cs typeface="Calibri"/>
+              </a:rPr>
+              <a:t> to RAM.</a:t>
             </a:r>
           </a:p>
           <a:p>
@@ -2539,10 +3223,29 @@
                 </a:solidFill>
                 <a:effectLst/>
                 <a:latin typeface="+mn-lt"/>
-                <a:ea typeface="ＭＳ Ｐゴシック" charset="0"/>
-                <a:cs typeface="ＭＳ Ｐゴシック" charset="0"/>
-              </a:rPr>
-              <a:t>The final stage we will look at is the end of the bootstrap, in which the bootloader jumps to the first instruction of the operating system.</a:t>
+                <a:ea typeface="ＭＳ Ｐゴシック"/>
+                <a:cs typeface="Calibri"/>
+              </a:rPr>
+              <a:t>The final stage we will look at is the end of the bootstrap, </a:t>
+            </a:r>
+            <a:r>
+              <a:rPr lang="en-US" dirty="0">
+                <a:ea typeface="ＭＳ Ｐゴシック"/>
+                <a:cs typeface="Calibri"/>
+              </a:rPr>
+              <a:t>during which</a:t>
+            </a:r>
+            <a:r>
+              <a:rPr lang="en-US" sz="1200" kern="1200" dirty="0">
+                <a:solidFill>
+                  <a:schemeClr val="tx1"/>
+                </a:solidFill>
+                <a:effectLst/>
+                <a:latin typeface="+mn-lt"/>
+                <a:ea typeface="ＭＳ Ｐゴシック"/>
+                <a:cs typeface="Calibri"/>
+              </a:rPr>
+              <a:t> the bootloader jumps to the first instruction of the operating system.</a:t>
             </a:r>
           </a:p>
           <a:p>
@@ -2688,10 +3391,10 @@
                 </a:solidFill>
                 <a:effectLst/>
                 <a:latin typeface="+mn-lt"/>
-                <a:ea typeface="ＭＳ Ｐゴシック" charset="0"/>
-                <a:cs typeface="ＭＳ Ｐゴシック" charset="0"/>
-              </a:rPr>
-              <a:t>The aim of this lecture is to illustrate the main components of a Linux-based embedded system, as well as to take a look at the bootstrap process.</a:t>
+                <a:ea typeface="ＭＳ Ｐゴシック"/>
+                <a:cs typeface="Calibri"/>
+              </a:rPr>
+              <a:t>The aim of this lecture is to illustrate the main components of a Linux-based embedded system, as well as to look at the bootstrap process.</a:t>
             </a:r>
           </a:p>
           <a:p>
@@ -2896,10 +3599,48 @@
                 </a:solidFill>
                 <a:effectLst/>
                 <a:latin typeface="+mn-lt"/>
-                <a:ea typeface="ＭＳ Ｐゴシック" charset="0"/>
-                <a:cs typeface="ＭＳ Ｐゴシック" charset="0"/>
-              </a:rPr>
-              <a:t>The Linux kernel is the software or operating system kernel that is responsible for optimally managing the embedded system’s hardware resources. </a:t>
+                <a:ea typeface="ＭＳ Ｐゴシック"/>
+                <a:cs typeface="Calibri"/>
+              </a:rPr>
+              <a:t>The Linux kernel is the software</a:t>
+            </a:r>
+            <a:r>
+              <a:rPr lang="en-US" dirty="0">
+                <a:ea typeface="ＭＳ Ｐゴシック"/>
+                <a:cs typeface="Calibri"/>
+              </a:rPr>
+              <a:t>,</a:t>
+            </a:r>
+            <a:r>
+              <a:rPr lang="en-US" sz="1200" kern="1200" dirty="0">
+                <a:solidFill>
+                  <a:schemeClr val="tx1"/>
+                </a:solidFill>
+                <a:effectLst/>
+                <a:latin typeface="+mn-lt"/>
+                <a:ea typeface="ＭＳ Ｐゴシック"/>
+                <a:cs typeface="Calibri"/>
+              </a:rPr>
+              <a:t> or operating system kernel</a:t>
+            </a:r>
+            <a:r>
+              <a:rPr lang="en-US" dirty="0">
+                <a:ea typeface="ＭＳ Ｐゴシック"/>
+                <a:cs typeface="Calibri"/>
+              </a:rPr>
+              <a:t>,</a:t>
+            </a:r>
+            <a:r>
+              <a:rPr lang="en-US" sz="1200" kern="1200" dirty="0">
+                <a:solidFill>
+                  <a:schemeClr val="tx1"/>
+                </a:solidFill>
+                <a:effectLst/>
+                <a:latin typeface="+mn-lt"/>
+                <a:ea typeface="ＭＳ Ｐゴシック"/>
+                <a:cs typeface="Calibri"/>
+              </a:rPr>
+              <a:t> responsible for optimally managing the embedded system’s hardware resources. </a:t>
             </a:r>
           </a:p>
           <a:p>
@@ -2924,10 +3665,86 @@
                 </a:solidFill>
                 <a:effectLst/>
                 <a:latin typeface="+mn-lt"/>
-                <a:ea typeface="ＭＳ Ｐゴシック" charset="0"/>
-                <a:cs typeface="ＭＳ Ｐゴシック" charset="0"/>
-              </a:rPr>
-              <a:t>It offers a range of services that perform a variety of essential functions for an operating system. This includes process management and scheduling via mechanisms such as task schedulers. This is primarily to do with how the CPU allocates its resources to different processes that require execution concurrently, and how they are scheduled to prevent any conflicts or interrupts within the system.</a:t>
+                <a:ea typeface="ＭＳ Ｐゴシック"/>
+                <a:cs typeface="Calibri"/>
+              </a:rPr>
+              <a:t>It offers a range of services that perform essential </a:t>
+            </a:r>
+            <a:r>
+              <a:rPr lang="en-US" dirty="0">
+                <a:ea typeface="ＭＳ Ｐゴシック"/>
+                <a:cs typeface="Calibri"/>
+              </a:rPr>
+              <a:t>operating system </a:t>
+            </a:r>
+            <a:r>
+              <a:rPr lang="en-US" sz="1200" kern="1200" dirty="0">
+                <a:solidFill>
+                  <a:schemeClr val="tx1"/>
+                </a:solidFill>
+                <a:effectLst/>
+                <a:latin typeface="+mn-lt"/>
+                <a:ea typeface="ＭＳ Ｐゴシック"/>
+                <a:cs typeface="Calibri"/>
+              </a:rPr>
+              <a:t>functions. </a:t>
+            </a:r>
+            <a:r>
+              <a:rPr lang="en-US" dirty="0">
+                <a:ea typeface="ＭＳ Ｐゴシック"/>
+                <a:cs typeface="Calibri"/>
+              </a:rPr>
+              <a:t>These</a:t>
+            </a:r>
+            <a:r>
+              <a:rPr lang="en-US" sz="1200" kern="1200" dirty="0">
+                <a:solidFill>
+                  <a:schemeClr val="tx1"/>
+                </a:solidFill>
+                <a:effectLst/>
+                <a:latin typeface="+mn-lt"/>
+                <a:ea typeface="ＭＳ Ｐゴシック"/>
+                <a:cs typeface="Calibri"/>
+              </a:rPr>
+              <a:t> </a:t>
+            </a:r>
+            <a:r>
+              <a:rPr lang="en-US" dirty="0">
+                <a:ea typeface="ＭＳ Ｐゴシック"/>
+                <a:cs typeface="Calibri"/>
+              </a:rPr>
+              <a:t>include</a:t>
+            </a:r>
+            <a:r>
+              <a:rPr lang="en-US" sz="1200" kern="1200" dirty="0">
+                <a:solidFill>
+                  <a:schemeClr val="tx1"/>
+                </a:solidFill>
+                <a:effectLst/>
+                <a:latin typeface="+mn-lt"/>
+                <a:ea typeface="ＭＳ Ｐゴシック"/>
+                <a:cs typeface="Calibri"/>
+              </a:rPr>
+              <a:t> process management and scheduling </a:t>
+            </a:r>
+            <a:r>
+              <a:rPr lang="en-US" dirty="0">
+                <a:ea typeface="ＭＳ Ｐゴシック"/>
+                <a:cs typeface="Calibri"/>
+              </a:rPr>
+              <a:t>through </a:t>
+            </a:r>
+            <a:r>
+              <a:rPr lang="en-US" sz="1200" kern="1200" dirty="0">
+                <a:solidFill>
+                  <a:schemeClr val="tx1"/>
+                </a:solidFill>
+                <a:effectLst/>
+                <a:latin typeface="+mn-lt"/>
+                <a:ea typeface="ＭＳ Ｐゴシック"/>
+                <a:cs typeface="Calibri"/>
+              </a:rPr>
+              <a:t>mechanisms such as task schedulers. This is primarily to do with how the CPU allocates its resources to different processes that require execution concurrently, and how they are scheduled to prevent any conflicts or interrupts within the system.</a:t>
             </a:r>
           </a:p>
           <a:p>
@@ -2946,16 +3763,137 @@
           </a:p>
           <a:p>
             <a:r>
+              <a:rPr lang="en-US" dirty="0">
+                <a:ea typeface="ＭＳ Ｐゴシック"/>
+                <a:cs typeface="Calibri"/>
+              </a:rPr>
+              <a:t>The kernel also</a:t>
+            </a:r>
+            <a:r>
               <a:rPr lang="en-US" sz="1200" kern="1200" dirty="0">
                 <a:solidFill>
                   <a:schemeClr val="tx1"/>
                 </a:solidFill>
                 <a:effectLst/>
                 <a:latin typeface="+mn-lt"/>
-                <a:ea typeface="ＭＳ Ｐゴシック" charset="0"/>
-                <a:cs typeface="ＭＳ Ｐゴシック" charset="0"/>
-              </a:rPr>
-              <a:t>It also offers the ability for processes to communicate with each other and to share data via inter-process communication. This can be achieved in a variety of ways. One method is via sockets, which send data via a network interface to another process. Another method is shared memory, in which multiple processes have access to the same block of memory. The processes can then alter this block and share information.</a:t>
+                <a:ea typeface="ＭＳ Ｐゴシック"/>
+                <a:cs typeface="Calibri"/>
+              </a:rPr>
+              <a:t> </a:t>
+            </a:r>
+            <a:r>
+              <a:rPr lang="en-US" dirty="0">
+                <a:ea typeface="ＭＳ Ｐゴシック"/>
+                <a:cs typeface="Calibri"/>
+              </a:rPr>
+              <a:t>enables</a:t>
+            </a:r>
+            <a:r>
+              <a:rPr lang="en-US" sz="1200" kern="1200" dirty="0">
+                <a:solidFill>
+                  <a:schemeClr val="tx1"/>
+                </a:solidFill>
+                <a:effectLst/>
+                <a:latin typeface="+mn-lt"/>
+                <a:ea typeface="ＭＳ Ｐゴシック"/>
+                <a:cs typeface="Calibri"/>
+              </a:rPr>
+              <a:t> processes to communicate and share data </a:t>
+            </a:r>
+            <a:r>
+              <a:rPr lang="en-US" dirty="0">
+                <a:ea typeface="ＭＳ Ｐゴシック"/>
+                <a:cs typeface="Calibri"/>
+              </a:rPr>
+              <a:t>through</a:t>
+            </a:r>
+            <a:r>
+              <a:rPr lang="en-US" sz="1200" kern="1200" dirty="0">
+                <a:solidFill>
+                  <a:schemeClr val="tx1"/>
+                </a:solidFill>
+                <a:effectLst/>
+                <a:latin typeface="+mn-lt"/>
+                <a:ea typeface="ＭＳ Ｐゴシック"/>
+                <a:cs typeface="Calibri"/>
+              </a:rPr>
+              <a:t> inter-process communication. This can be achieved in a variety of ways. One method is via sockets, which send data via a network interface to another process. Another method is shared memory, </a:t>
+            </a:r>
+            <a:r>
+              <a:rPr lang="en-US" dirty="0">
+                <a:ea typeface="ＭＳ Ｐゴシック"/>
+                <a:cs typeface="Calibri"/>
+              </a:rPr>
+              <a:t>where </a:t>
+            </a:r>
+            <a:r>
+              <a:rPr lang="en-US" sz="1200" kern="1200" dirty="0">
+                <a:solidFill>
+                  <a:schemeClr val="tx1"/>
+                </a:solidFill>
+                <a:effectLst/>
+                <a:latin typeface="+mn-lt"/>
+                <a:ea typeface="ＭＳ Ｐゴシック"/>
+                <a:cs typeface="Calibri"/>
+              </a:rPr>
+              <a:t>multiple </a:t>
+            </a:r>
+            <a:r>
+              <a:rPr lang="en-US" dirty="0">
+                <a:ea typeface="ＭＳ Ｐゴシック"/>
+                <a:cs typeface="Calibri"/>
+              </a:rPr>
+              <a:t>processes</a:t>
+            </a:r>
+            <a:r>
+              <a:rPr lang="en-US" sz="1200" kern="1200" dirty="0">
+                <a:solidFill>
+                  <a:schemeClr val="tx1"/>
+                </a:solidFill>
+                <a:effectLst/>
+                <a:latin typeface="+mn-lt"/>
+                <a:ea typeface="ＭＳ Ｐゴシック"/>
+                <a:cs typeface="Calibri"/>
+              </a:rPr>
+              <a:t> </a:t>
+            </a:r>
+            <a:r>
+              <a:rPr lang="en-US" dirty="0">
+                <a:ea typeface="ＭＳ Ｐゴシック"/>
+                <a:cs typeface="Calibri"/>
+              </a:rPr>
+              <a:t>have </a:t>
+            </a:r>
+            <a:r>
+              <a:rPr lang="en-US" sz="1200" kern="1200" dirty="0">
+                <a:solidFill>
+                  <a:schemeClr val="tx1"/>
+                </a:solidFill>
+                <a:effectLst/>
+                <a:latin typeface="+mn-lt"/>
+                <a:ea typeface="ＭＳ Ｐゴシック"/>
+                <a:cs typeface="Calibri"/>
+              </a:rPr>
+              <a:t>access </a:t>
+            </a:r>
+            <a:r>
+              <a:rPr lang="en-US" dirty="0">
+                <a:ea typeface="ＭＳ Ｐゴシック"/>
+                <a:cs typeface="Calibri"/>
+              </a:rPr>
+              <a:t>to </a:t>
+            </a:r>
+            <a:r>
+              <a:rPr lang="en-US" sz="1200" kern="1200" dirty="0">
+                <a:solidFill>
+                  <a:schemeClr val="tx1"/>
+                </a:solidFill>
+                <a:effectLst/>
+                <a:latin typeface="+mn-lt"/>
+                <a:ea typeface="ＭＳ Ｐゴシック"/>
+                <a:cs typeface="Calibri"/>
+              </a:rPr>
+              <a:t>the same block of memory. The processes can then alter this block and share information.</a:t>
             </a:r>
           </a:p>
           <a:p>
@@ -3134,6 +4072,70 @@
           <a:lstStyle/>
           <a:p>
             <a:r>
+              <a:rPr lang="en-US" sz="1200" kern="1200">
+                <a:solidFill>
+                  <a:schemeClr val="tx1"/>
+                </a:solidFill>
+                <a:effectLst/>
+                <a:latin typeface="+mn-lt"/>
+                <a:ea typeface="ＭＳ Ｐゴシック"/>
+                <a:cs typeface="Calibri"/>
+              </a:rPr>
+              <a:t>The Linux kernel </a:t>
+            </a:r>
+            <a:r>
+              <a:rPr lang="en-US">
+                <a:ea typeface="ＭＳ Ｐゴシック"/>
+                <a:cs typeface="Calibri"/>
+              </a:rPr>
+              <a:t>follows a</a:t>
+            </a:r>
+            <a:r>
+              <a:rPr lang="en-US" sz="1200" kern="1200">
+                <a:solidFill>
+                  <a:schemeClr val="tx1"/>
+                </a:solidFill>
+                <a:effectLst/>
+                <a:latin typeface="+mn-lt"/>
+                <a:ea typeface="ＭＳ Ｐゴシック"/>
+                <a:cs typeface="Calibri"/>
+              </a:rPr>
+              <a:t> layered operating system architecture. This leads to the operating system being divided into two main layers. One layer is user space; this layer is typically the higher-level parts of the system and mainly consists of applications or system programs, essentially, code that does not run on the operating system’s kernel. This is built on top of the kernel space layer. This is where the kernel operates, executing services for the system. These two layers occupy </a:t>
+            </a:r>
+            <a:r>
+              <a:rPr lang="en-US">
+                <a:ea typeface="ＭＳ Ｐゴシック"/>
+                <a:cs typeface="Calibri"/>
+              </a:rPr>
+              <a:t>separate regions</a:t>
+            </a:r>
+            <a:r>
+              <a:rPr lang="en-US" sz="1200" kern="1200">
+                <a:solidFill>
+                  <a:schemeClr val="tx1"/>
+                </a:solidFill>
+                <a:effectLst/>
+                <a:latin typeface="+mn-lt"/>
+                <a:ea typeface="ＭＳ Ｐゴシック"/>
+                <a:cs typeface="Calibri"/>
+              </a:rPr>
+              <a:t> </a:t>
+            </a:r>
+            <a:r>
+              <a:rPr lang="en-US" sz="1200" kern="1200" dirty="0">
+                <a:solidFill>
+                  <a:schemeClr val="tx1"/>
+                </a:solidFill>
+                <a:effectLst/>
+                <a:latin typeface="+mn-lt"/>
+                <a:ea typeface="ＭＳ Ｐゴシック"/>
+                <a:cs typeface="Calibri"/>
+              </a:rPr>
+              <a:t>of the address spaces. </a:t>
+            </a:r>
+          </a:p>
+          <a:p>
+            <a:r>
               <a:rPr lang="en-US" sz="1200" kern="1200" dirty="0">
                 <a:solidFill>
                   <a:schemeClr val="tx1"/>
@@ -3143,7 +4145,7 @@
                 <a:ea typeface="ＭＳ Ｐゴシック" charset="0"/>
                 <a:cs typeface="ＭＳ Ｐゴシック" charset="0"/>
               </a:rPr>
-              <a:t>The Linux kernel takes advantage of a layered operating system architecture. This leads to the operating system being divided into two main layers. One layer is user space; this layer is typically the higher-level parts of the system and mainly consists of applications or system programs, essentially, code that does not run on the operating system’s kernel. This is built on top of the kernel space layer. This is where the kernel operates, executing services for the system. These two layers have different address spaces. </a:t>
+              <a:t> </a:t>
             </a:r>
           </a:p>
           <a:p>
@@ -3157,7 +4159,7 @@
                 <a:ea typeface="ＭＳ Ｐゴシック" charset="0"/>
                 <a:cs typeface="ＭＳ Ｐゴシック" charset="0"/>
               </a:rPr>
-              <a:t> </a:t>
+              <a:t>Basic services are delivered by one single executable. This is in line with monolithic kernels, where the entire operating system works in kernel space. </a:t>
             </a:r>
           </a:p>
           <a:p>
@@ -3171,36 +4173,38 @@
                 <a:ea typeface="ＭＳ Ｐゴシック" charset="0"/>
                 <a:cs typeface="ＭＳ Ｐゴシック" charset="0"/>
               </a:rPr>
-              <a:t>Basic services are delivered by one single executable. This is in line with monolithic kernels, where the entire operating system works in kernel space. </a:t>
-            </a:r>
-          </a:p>
-          <a:p>
-            <a:r>
-              <a:rPr lang="en-US" sz="1200" kern="1200" dirty="0">
+              <a:t> </a:t>
+            </a:r>
+          </a:p>
+          <a:p>
+            <a:r>
+              <a:rPr lang="en-US" sz="1200" kern="1200">
                 <a:solidFill>
                   <a:schemeClr val="tx1"/>
                 </a:solidFill>
                 <a:effectLst/>
                 <a:latin typeface="+mn-lt"/>
-                <a:ea typeface="ＭＳ Ｐゴシック" charset="0"/>
-                <a:cs typeface="ＭＳ Ｐゴシック" charset="0"/>
-              </a:rPr>
-              <a:t> </a:t>
-            </a:r>
-          </a:p>
-          <a:p>
-            <a:r>
-              <a:rPr lang="en-US" sz="1200" kern="1200" dirty="0">
-                <a:solidFill>
-                  <a:schemeClr val="tx1"/>
-                </a:solidFill>
-                <a:effectLst/>
-                <a:latin typeface="+mn-lt"/>
-                <a:ea typeface="ＭＳ Ｐゴシック" charset="0"/>
-                <a:cs typeface="ＭＳ Ｐゴシック" charset="0"/>
-              </a:rPr>
-              <a:t>These services can be extended or added to at run-time by using loadable kernel modules.</a:t>
-            </a:r>
+                <a:ea typeface="ＭＳ Ｐゴシック"/>
+                <a:cs typeface="Calibri"/>
+              </a:rPr>
+              <a:t>These services can be extended or added to at run-time by using loadable kernel modules</a:t>
+            </a:r>
+            <a:r>
+              <a:rPr lang="en-US">
+                <a:ea typeface="ＭＳ Ｐゴシック"/>
+                <a:cs typeface="Calibri"/>
+              </a:rPr>
+              <a:t> (LKMs).</a:t>
+            </a:r>
+            <a:endParaRPr lang="en-US" sz="1200" kern="1200">
+              <a:solidFill>
+                <a:schemeClr val="tx1"/>
+              </a:solidFill>
+              <a:effectLst/>
+              <a:latin typeface="+mn-lt"/>
+              <a:ea typeface="ＭＳ Ｐゴシック"/>
+              <a:cs typeface="Calibri"/>
+            </a:endParaRPr>
           </a:p>
           <a:p>
             <a:endParaRPr lang="en-US" dirty="0"/>
@@ -3328,10 +4332,67 @@
                 </a:solidFill>
                 <a:effectLst/>
                 <a:latin typeface="+mn-lt"/>
-                <a:ea typeface="ＭＳ Ｐゴシック" charset="0"/>
-                <a:cs typeface="ＭＳ Ｐゴシック" charset="0"/>
-              </a:rPr>
-              <a:t>However, the disadvantage to it is that if there is a bug in one kernel component, which could be a new device driver, it has the potential to crash the whole system.</a:t>
+                <a:ea typeface="ＭＳ Ｐゴシック"/>
+                <a:cs typeface="Calibri"/>
+              </a:rPr>
+              <a:t>However, </a:t>
+            </a:r>
+            <a:r>
+              <a:rPr lang="en-US" dirty="0">
+                <a:ea typeface="ＭＳ Ｐゴシック"/>
+                <a:cs typeface="Calibri"/>
+              </a:rPr>
+              <a:t>a disadvantage </a:t>
+            </a:r>
+            <a:r>
+              <a:rPr lang="en-US" sz="1200" kern="1200" dirty="0">
+                <a:solidFill>
+                  <a:schemeClr val="tx1"/>
+                </a:solidFill>
+                <a:effectLst/>
+                <a:latin typeface="+mn-lt"/>
+                <a:ea typeface="ＭＳ Ｐゴシック"/>
+                <a:cs typeface="Calibri"/>
+              </a:rPr>
+              <a:t>is that if there is a bug in one kernel component, </a:t>
+            </a:r>
+            <a:r>
+              <a:rPr lang="en-US" dirty="0">
+                <a:ea typeface="ＭＳ Ｐゴシック"/>
+                <a:cs typeface="Calibri"/>
+              </a:rPr>
+              <a:t>such as</a:t>
+            </a:r>
+            <a:r>
+              <a:rPr lang="en-US" sz="1200" kern="1200" dirty="0">
+                <a:solidFill>
+                  <a:schemeClr val="tx1"/>
+                </a:solidFill>
+                <a:effectLst/>
+                <a:latin typeface="+mn-lt"/>
+                <a:ea typeface="ＭＳ Ｐゴシック"/>
+                <a:cs typeface="Calibri"/>
+              </a:rPr>
+              <a:t> a new device driver, it has the potential to crash the </a:t>
+            </a:r>
+            <a:r>
+              <a:rPr lang="en-US" dirty="0">
+                <a:ea typeface="ＭＳ Ｐゴシック"/>
+                <a:cs typeface="Calibri"/>
+              </a:rPr>
+              <a:t>entire</a:t>
+            </a:r>
+            <a:r>
+              <a:rPr lang="en-US" sz="1200" kern="1200" dirty="0">
+                <a:solidFill>
+                  <a:schemeClr val="tx1"/>
+                </a:solidFill>
+                <a:effectLst/>
+                <a:latin typeface="+mn-lt"/>
+                <a:ea typeface="ＭＳ Ｐゴシック"/>
+                <a:cs typeface="Calibri"/>
+              </a:rPr>
+              <a:t> system (usually with a kernel panic event which halts the running system)</a:t>
             </a:r>
           </a:p>
           <a:p>
@@ -3530,6 +4591,81 @@
           <a:lstStyle/>
           <a:p>
             <a:r>
+              <a:rPr lang="en-US" dirty="0">
+                <a:ea typeface="ＭＳ Ｐゴシック"/>
+                <a:cs typeface="Calibri"/>
+              </a:rPr>
+              <a:t>For</a:t>
+            </a:r>
+            <a:r>
+              <a:rPr lang="en-US" sz="1200" kern="1200" dirty="0">
+                <a:solidFill>
+                  <a:schemeClr val="tx1"/>
+                </a:solidFill>
+                <a:effectLst/>
+                <a:latin typeface="+mn-lt"/>
+                <a:ea typeface="ＭＳ Ｐゴシック"/>
+                <a:cs typeface="Calibri"/>
+              </a:rPr>
+              <a:t> the kernel to manage hardware resources, it needs to know which resources are currently available in the embedded system (i.e., the hardware description</a:t>
+            </a:r>
+            <a:r>
+              <a:rPr lang="en-US" dirty="0">
+                <a:ea typeface="ＭＳ Ｐゴシック"/>
+                <a:cs typeface="Calibri"/>
+              </a:rPr>
+              <a:t>,</a:t>
+            </a:r>
+            <a:r>
+              <a:rPr lang="en-US" sz="1200" kern="1200" dirty="0">
+                <a:solidFill>
+                  <a:schemeClr val="tx1"/>
+                </a:solidFill>
+                <a:effectLst/>
+                <a:latin typeface="+mn-lt"/>
+                <a:ea typeface="ＭＳ Ｐゴシック"/>
+                <a:cs typeface="Calibri"/>
+              </a:rPr>
+              <a:t> </a:t>
+            </a:r>
+            <a:r>
+              <a:rPr lang="en-US" dirty="0">
+                <a:ea typeface="ＭＳ Ｐゴシック"/>
+                <a:cs typeface="Calibri"/>
+              </a:rPr>
+              <a:t>such as </a:t>
+            </a:r>
+            <a:r>
+              <a:rPr lang="en-US" sz="1200" kern="1200" dirty="0">
+                <a:solidFill>
+                  <a:schemeClr val="tx1"/>
+                </a:solidFill>
+                <a:effectLst/>
+                <a:latin typeface="+mn-lt"/>
+                <a:ea typeface="ＭＳ Ｐゴシック"/>
+                <a:cs typeface="Calibri"/>
+              </a:rPr>
+              <a:t>I/O devices, memory, </a:t>
+            </a:r>
+            <a:r>
+              <a:rPr lang="en-US" dirty="0">
+                <a:ea typeface="ＭＳ Ｐゴシック"/>
+                <a:cs typeface="Calibri"/>
+              </a:rPr>
+              <a:t>and others).</a:t>
+            </a:r>
+            <a:endParaRPr lang="en-US" sz="1200" kern="1200" dirty="0">
+              <a:solidFill>
+                <a:schemeClr val="tx1"/>
+              </a:solidFill>
+              <a:effectLst/>
+              <a:latin typeface="+mn-lt"/>
+              <a:ea typeface="ＭＳ Ｐゴシック"/>
+              <a:cs typeface="Calibri"/>
+            </a:endParaRPr>
+          </a:p>
+          <a:p>
+            <a:r>
               <a:rPr lang="en-US" sz="1200" kern="1200" dirty="0">
                 <a:solidFill>
                   <a:schemeClr val="tx1"/>
@@ -3539,8 +4675,57 @@
                 <a:ea typeface="ＭＳ Ｐゴシック" charset="0"/>
                 <a:cs typeface="ＭＳ Ｐゴシック" charset="0"/>
               </a:rPr>
-              <a:t>In order for the kernel to manage hardware resources, it needs to know which resources are currently available in the embedded system (i.e., the hardware description: I/O devices, memory, etc.).</a:t>
-            </a:r>
+              <a:t> </a:t>
+            </a:r>
+          </a:p>
+          <a:p>
+            <a:r>
+              <a:rPr lang="en-US" sz="1200" kern="1200" dirty="0">
+                <a:solidFill>
+                  <a:schemeClr val="tx1"/>
+                </a:solidFill>
+                <a:effectLst/>
+                <a:latin typeface="+mn-lt"/>
+                <a:ea typeface="ＭＳ Ｐゴシック"/>
+                <a:cs typeface="Calibri"/>
+              </a:rPr>
+              <a:t>This information can be provided to the kernel in two ways. One method is to hardcode it into the kernel binary code. However, this means that each modification to the hardware definition would require the source code to be recompiled. The alternative is to provide it to the kernel when the bootloader uses a binary file, which is </a:t>
+            </a:r>
+            <a:r>
+              <a:rPr lang="en-US" dirty="0">
+                <a:ea typeface="ＭＳ Ｐゴシック"/>
+                <a:cs typeface="Calibri"/>
+              </a:rPr>
+              <a:t>known as the</a:t>
+            </a:r>
+            <a:r>
+              <a:rPr lang="en-US" sz="1200" kern="1200" dirty="0">
+                <a:solidFill>
+                  <a:schemeClr val="tx1"/>
+                </a:solidFill>
+                <a:effectLst/>
+                <a:latin typeface="+mn-lt"/>
+                <a:ea typeface="ＭＳ Ｐゴシック"/>
+                <a:cs typeface="Calibri"/>
+              </a:rPr>
+              <a:t> device tree blob</a:t>
+            </a:r>
+            <a:r>
+              <a:rPr lang="en-US" dirty="0">
+                <a:ea typeface="ＭＳ Ｐゴシック"/>
+                <a:cs typeface="Calibri"/>
+              </a:rPr>
+              <a:t> (DTB).</a:t>
+            </a:r>
+            <a:endParaRPr lang="en-US" sz="1200" kern="1200" dirty="0">
+              <a:solidFill>
+                <a:schemeClr val="tx1"/>
+              </a:solidFill>
+              <a:effectLst/>
+              <a:latin typeface="+mn-lt"/>
+              <a:ea typeface="ＭＳ Ｐゴシック"/>
+              <a:cs typeface="Calibri"/>
+            </a:endParaRPr>
           </a:p>
           <a:p>
             <a:r>
@@ -3564,13 +4749,18 @@
                 </a:solidFill>
                 <a:effectLst/>
                 <a:latin typeface="+mn-lt"/>
-                <a:ea typeface="ＭＳ Ｐゴシック" charset="0"/>
-                <a:cs typeface="ＭＳ Ｐゴシック" charset="0"/>
-              </a:rPr>
-              <a:t>This information can be provided to the kernel in two ways. One method is to hardcode it into the kernel binary code. However, this means that each modification to the hardware definition would require the source code to be recompiled. The alternative is to provide it to the kernel when the bootloader uses a binary file, which is the device tree blob.</a:t>
-            </a:r>
-          </a:p>
-          <a:p>
+                <a:ea typeface="ＭＳ Ｐゴシック"/>
+                <a:cs typeface="Calibri"/>
+              </a:rPr>
+              <a:t>A device tree blob is a file that is produced from a device tree source</a:t>
+            </a:r>
+            <a:r>
+              <a:rPr lang="en-US" dirty="0">
+                <a:ea typeface="ＭＳ Ｐゴシック"/>
+                <a:cs typeface="Calibri"/>
+              </a:rPr>
+              <a:t> (DTS).</a:t>
+            </a:r>
             <a:r>
               <a:rPr lang="en-US" sz="1200" kern="1200" dirty="0">
                 <a:solidFill>
@@ -3578,13 +4768,18 @@
                 </a:solidFill>
                 <a:effectLst/>
                 <a:latin typeface="+mn-lt"/>
-                <a:ea typeface="ＭＳ Ｐゴシック" charset="0"/>
-                <a:cs typeface="ＭＳ Ｐゴシック" charset="0"/>
-              </a:rPr>
-              <a:t> </a:t>
-            </a:r>
-          </a:p>
-          <a:p>
+                <a:ea typeface="ＭＳ Ｐゴシック"/>
+                <a:cs typeface="Calibri"/>
+              </a:rPr>
+              <a:t> </a:t>
+            </a:r>
+            <a:r>
+              <a:rPr lang="en-US" dirty="0">
+                <a:ea typeface="ＭＳ Ｐゴシック"/>
+                <a:cs typeface="Calibri"/>
+              </a:rPr>
+              <a:t>Hardware</a:t>
+            </a:r>
             <a:r>
               <a:rPr lang="en-US" sz="1200" kern="1200" dirty="0">
                 <a:solidFill>
@@ -3592,10 +4787,67 @@
                 </a:solidFill>
                 <a:effectLst/>
                 <a:latin typeface="+mn-lt"/>
-                <a:ea typeface="ＭＳ Ｐゴシック" charset="0"/>
-                <a:cs typeface="ＭＳ Ｐゴシック" charset="0"/>
-              </a:rPr>
-              <a:t>A device tree blob is a file that is produced from a device tree source. A hardware definition can be changed more easily as only the device tree source needs recompilation. Thus saving time by not needing to recompile the kernel.</a:t>
+                <a:ea typeface="ＭＳ Ｐゴシック"/>
+                <a:cs typeface="Calibri"/>
+              </a:rPr>
+              <a:t> </a:t>
+            </a:r>
+            <a:r>
+              <a:rPr lang="en-US" dirty="0">
+                <a:ea typeface="ＭＳ Ｐゴシック"/>
+                <a:cs typeface="Calibri"/>
+              </a:rPr>
+              <a:t>definitions</a:t>
+            </a:r>
+            <a:r>
+              <a:rPr lang="en-US" sz="1200" kern="1200" dirty="0">
+                <a:solidFill>
+                  <a:schemeClr val="tx1"/>
+                </a:solidFill>
+                <a:effectLst/>
+                <a:latin typeface="+mn-lt"/>
+                <a:ea typeface="ＭＳ Ｐゴシック"/>
+                <a:cs typeface="Calibri"/>
+              </a:rPr>
+              <a:t> can be changed more easily</a:t>
+            </a:r>
+            <a:r>
+              <a:rPr lang="en-US" dirty="0">
+                <a:ea typeface="ＭＳ Ｐゴシック"/>
+                <a:cs typeface="Calibri"/>
+              </a:rPr>
+              <a:t>,</a:t>
+            </a:r>
+            <a:r>
+              <a:rPr lang="en-US" sz="1200" kern="1200" dirty="0">
+                <a:solidFill>
+                  <a:schemeClr val="tx1"/>
+                </a:solidFill>
+                <a:effectLst/>
+                <a:latin typeface="+mn-lt"/>
+                <a:ea typeface="ＭＳ Ｐゴシック"/>
+                <a:cs typeface="Calibri"/>
+              </a:rPr>
+              <a:t> as only the device tree source needs recompilation</a:t>
+            </a:r>
+            <a:r>
+              <a:rPr lang="en-US" dirty="0">
+                <a:ea typeface="ＭＳ Ｐゴシック"/>
+                <a:cs typeface="Calibri"/>
+              </a:rPr>
+              <a:t>,</a:t>
+            </a:r>
+            <a:r>
+              <a:rPr lang="en-US" sz="1200" kern="1200" dirty="0">
+                <a:solidFill>
+                  <a:schemeClr val="tx1"/>
+                </a:solidFill>
+                <a:effectLst/>
+                <a:latin typeface="+mn-lt"/>
+                <a:ea typeface="ＭＳ Ｐゴシック"/>
+                <a:cs typeface="Calibri"/>
+              </a:rPr>
+              <a:t> saving time by not needing to recompile the kernel.</a:t>
             </a:r>
           </a:p>
           <a:p>
@@ -3815,10 +5067,29 @@
                 </a:solidFill>
                 <a:effectLst/>
                 <a:latin typeface="+mn-lt"/>
-                <a:ea typeface="ＭＳ Ｐゴシック" charset="0"/>
-                <a:cs typeface="ＭＳ Ｐゴシック" charset="0"/>
-              </a:rPr>
-              <a:t>System programs are executable from the command-line and provide a convenient environment for program development and execution. </a:t>
+                <a:ea typeface="ＭＳ Ｐゴシック"/>
+                <a:cs typeface="Calibri"/>
+              </a:rPr>
+              <a:t>System programs are executable from the </a:t>
+            </a:r>
+            <a:r>
+              <a:rPr lang="en-US" dirty="0">
+                <a:ea typeface="ＭＳ Ｐゴシック"/>
+                <a:cs typeface="Calibri"/>
+              </a:rPr>
+              <a:t>command line</a:t>
+            </a:r>
+            <a:r>
+              <a:rPr lang="en-US" sz="1200" kern="1200" dirty="0">
+                <a:solidFill>
+                  <a:schemeClr val="tx1"/>
+                </a:solidFill>
+                <a:effectLst/>
+                <a:latin typeface="+mn-lt"/>
+                <a:ea typeface="ＭＳ Ｐゴシック"/>
+                <a:cs typeface="Calibri"/>
+              </a:rPr>
+              <a:t> and provide a convenient environment for program development and execution. </a:t>
             </a:r>
           </a:p>
           <a:p>
@@ -4224,10 +5495,48 @@
                 </a:solidFill>
                 <a:effectLst/>
                 <a:latin typeface="+mn-lt"/>
-                <a:ea typeface="ＭＳ Ｐゴシック" charset="0"/>
-                <a:cs typeface="ＭＳ Ｐゴシック" charset="0"/>
-              </a:rPr>
-              <a:t>An application is the software required in order to provide the user with a service, conventionally for which the embedded system was conceived.</a:t>
+                <a:ea typeface="ＭＳ Ｐゴシック"/>
+                <a:cs typeface="Calibri"/>
+              </a:rPr>
+              <a:t>An application is the software required in order to provide the user with a service, </a:t>
+            </a:r>
+            <a:r>
+              <a:rPr lang="en-US" dirty="0">
+                <a:ea typeface="ＭＳ Ｐゴシック"/>
+                <a:cs typeface="Calibri"/>
+              </a:rPr>
+              <a:t>typically the primary purpose or</a:t>
+            </a:r>
+            <a:r>
+              <a:rPr lang="en-US" sz="1200" kern="1200" dirty="0">
+                <a:solidFill>
+                  <a:schemeClr val="tx1"/>
+                </a:solidFill>
+                <a:effectLst/>
+                <a:latin typeface="+mn-lt"/>
+                <a:ea typeface="ＭＳ Ｐゴシック"/>
+                <a:cs typeface="Calibri"/>
+              </a:rPr>
+              <a:t> which the embedded system was </a:t>
+            </a:r>
+            <a:r>
+              <a:rPr lang="en-US" dirty="0">
+                <a:ea typeface="ＭＳ Ｐゴシック"/>
+                <a:cs typeface="Calibri"/>
+              </a:rPr>
+              <a:t>designed</a:t>
+            </a:r>
+            <a:r>
+              <a:rPr lang="en-US" sz="1200" kern="1200" dirty="0">
+                <a:solidFill>
+                  <a:schemeClr val="tx1"/>
+                </a:solidFill>
+                <a:effectLst/>
+                <a:latin typeface="+mn-lt"/>
+                <a:ea typeface="ＭＳ Ｐゴシック"/>
+                <a:cs typeface="Calibri"/>
+              </a:rPr>
+              <a:t>.</a:t>
             </a:r>
           </a:p>
           <a:p>
@@ -4610,10 +5919,48 @@
                 </a:solidFill>
                 <a:effectLst/>
                 <a:latin typeface="+mn-lt"/>
-                <a:ea typeface="ＭＳ Ｐゴシック" charset="0"/>
-                <a:cs typeface="ＭＳ Ｐゴシック" charset="0"/>
-              </a:rPr>
-              <a:t>Upon startup, the Linux kernel needs a file system, called a root file system. This contains all the configuration files that are required in order to prepare the execution environment for the application, for example, setting up the Ethernet address.</a:t>
+                <a:ea typeface="ＭＳ Ｐゴシック"/>
+                <a:cs typeface="Calibri"/>
+              </a:rPr>
+              <a:t>Upon startup, the Linux kernel </a:t>
+            </a:r>
+            <a:r>
+              <a:rPr lang="en-US" dirty="0">
+                <a:ea typeface="ＭＳ Ｐゴシック"/>
+                <a:cs typeface="Calibri"/>
+              </a:rPr>
+              <a:t>requires </a:t>
+            </a:r>
+            <a:r>
+              <a:rPr lang="en-US" sz="1200" kern="1200" dirty="0">
+                <a:solidFill>
+                  <a:schemeClr val="tx1"/>
+                </a:solidFill>
+                <a:effectLst/>
+                <a:latin typeface="+mn-lt"/>
+                <a:ea typeface="ＭＳ Ｐゴシック"/>
+                <a:cs typeface="Calibri"/>
+              </a:rPr>
+              <a:t>a file system, </a:t>
+            </a:r>
+            <a:r>
+              <a:rPr lang="en-US" dirty="0">
+                <a:ea typeface="ＭＳ Ｐゴシック"/>
+                <a:cs typeface="Calibri"/>
+              </a:rPr>
+              <a:t>known as the</a:t>
+            </a:r>
+            <a:r>
+              <a:rPr lang="en-US" sz="1200" kern="1200" dirty="0">
+                <a:solidFill>
+                  <a:schemeClr val="tx1"/>
+                </a:solidFill>
+                <a:effectLst/>
+                <a:latin typeface="+mn-lt"/>
+                <a:ea typeface="ＭＳ Ｐゴシック"/>
+                <a:cs typeface="Calibri"/>
+              </a:rPr>
+              <a:t> root file system. This contains all the configuration files that are required in order to prepare the execution environment for the application, for example, setting up the Ethernet address.</a:t>
             </a:r>
           </a:p>
           <a:p>
@@ -4687,14 +6034,33 @@
                 </a:solidFill>
                 <a:effectLst/>
                 <a:latin typeface="+mn-lt"/>
-                <a:ea typeface="ＭＳ Ｐゴシック" charset="0"/>
-                <a:cs typeface="ＭＳ Ｐゴシック" charset="0"/>
+                <a:ea typeface="ＭＳ Ｐゴシック"/>
+                <a:cs typeface="Calibri"/>
               </a:rPr>
               <a:t>A root file system can be</a:t>
             </a:r>
-          </a:p>
-          <a:p>
-            <a:pPr lvl="1"/>
+            <a:r>
+              <a:rPr lang="en-US" dirty="0">
+                <a:ea typeface="ＭＳ Ｐゴシック"/>
+                <a:cs typeface="Calibri"/>
+              </a:rPr>
+              <a:t>:</a:t>
+            </a:r>
+            <a:endParaRPr lang="en-US" sz="1200" kern="1200" dirty="0">
+              <a:solidFill>
+                <a:schemeClr val="tx1"/>
+              </a:solidFill>
+              <a:effectLst/>
+              <a:latin typeface="+mn-lt"/>
+              <a:ea typeface="ＭＳ Ｐゴシック" charset="0"/>
+              <a:cs typeface="Calibri"/>
+            </a:endParaRPr>
+          </a:p>
+          <a:p>
+            <a:pPr marL="742950" lvl="1" indent="-285750">
+              <a:buFont typeface="Calibri"/>
+              <a:buChar char="-"/>
+            </a:pPr>
             <a:r>
               <a:rPr lang="en-US" sz="1200" kern="1200" dirty="0">
                 <a:solidFill>
@@ -4702,38 +6068,42 @@
                 </a:solidFill>
                 <a:effectLst/>
                 <a:latin typeface="+mn-lt"/>
-                <a:ea typeface="ＭＳ Ｐゴシック" charset="0"/>
-                <a:cs typeface="ＭＳ Ｐゴシック" charset="0"/>
-              </a:rPr>
-              <a:t>A portion of RAM that is treated as a file system: This is known as an “initial RAM disk” or “</a:t>
-            </a:r>
-            <a:r>
-              <a:rPr lang="en-US" sz="1200" kern="1200" dirty="0" err="1">
+                <a:ea typeface="ＭＳ Ｐゴシック"/>
+                <a:cs typeface="Calibri"/>
+              </a:rPr>
+              <a:t>A portion of RAM that is treated as a file system</a:t>
+            </a:r>
+            <a:r>
+              <a:rPr lang="en-US" dirty="0">
+                <a:ea typeface="ＭＳ Ｐゴシック"/>
+                <a:cs typeface="Calibri"/>
+              </a:rPr>
+              <a:t>.</a:t>
+            </a:r>
+            <a:r>
+              <a:rPr lang="en-US" sz="1200" kern="1200" dirty="0">
                 <a:solidFill>
                   <a:schemeClr val="tx1"/>
                 </a:solidFill>
                 <a:effectLst/>
                 <a:latin typeface="+mn-lt"/>
-                <a:ea typeface="ＭＳ Ｐゴシック" charset="0"/>
-                <a:cs typeface="ＭＳ Ｐゴシック" charset="0"/>
-              </a:rPr>
-              <a:t>initrd</a:t>
-            </a:r>
-            <a:r>
-              <a:rPr lang="en-US" sz="1200" kern="1200" dirty="0">
+                <a:ea typeface="ＭＳ Ｐゴシック"/>
+                <a:cs typeface="Calibri"/>
+              </a:rPr>
+              <a:t> This is known as an “initial RAM disk” or “</a:t>
+            </a:r>
+            <a:r>
+              <a:rPr lang="en-US" sz="1200" kern="1200" dirty="0" err="1">
                 <a:solidFill>
                   <a:schemeClr val="tx1"/>
                 </a:solidFill>
                 <a:effectLst/>
                 <a:latin typeface="+mn-lt"/>
-                <a:ea typeface="ＭＳ Ｐゴシック" charset="0"/>
-                <a:cs typeface="ＭＳ Ｐゴシック" charset="0"/>
-              </a:rPr>
-              <a:t>”. This can be used if the embedded system does not need to store data persistently during its operations.</a:t>
-            </a:r>
-          </a:p>
-          <a:p>
-            <a:pPr lvl="1"/>
+                <a:ea typeface="ＭＳ Ｐゴシック"/>
+                <a:cs typeface="Calibri"/>
+              </a:rPr>
+              <a:t>initrd</a:t>
+            </a:r>
             <a:r>
               <a:rPr lang="en-US" sz="1200" kern="1200" dirty="0">
                 <a:solidFill>
@@ -4741,14 +6111,17 @@
                 </a:solidFill>
                 <a:effectLst/>
                 <a:latin typeface="+mn-lt"/>
-                <a:ea typeface="ＭＳ Ｐゴシック" charset="0"/>
-                <a:cs typeface="ＭＳ Ｐゴシック" charset="0"/>
-              </a:rPr>
-              <a:t>A persistent storage in the embedded system: If the embedded system has to store data persistently during its operations</a:t>
-            </a:r>
-          </a:p>
-          <a:p>
-            <a:pPr lvl="1"/>
+                <a:ea typeface="ＭＳ Ｐゴシック"/>
+                <a:cs typeface="Calibri"/>
+              </a:rPr>
+              <a:t>”. This can be used if the embedded system does not need to store data persistently during its operations.</a:t>
+            </a:r>
+          </a:p>
+          <a:p>
+            <a:pPr marL="742950" lvl="1" indent="-285750">
+              <a:buFont typeface="Calibri"/>
+              <a:buChar char="-"/>
+            </a:pPr>
             <a:r>
               <a:rPr lang="en-US" sz="1200" kern="1200" dirty="0">
                 <a:solidFill>
@@ -4756,10 +6129,104 @@
                 </a:solidFill>
                 <a:effectLst/>
                 <a:latin typeface="+mn-lt"/>
-                <a:ea typeface="ＭＳ Ｐゴシック" charset="0"/>
-                <a:cs typeface="ＭＳ Ｐゴシック" charset="0"/>
-              </a:rPr>
-              <a:t>A persistent storage accessed over the network: If developing a Linux-based embedded system</a:t>
+                <a:ea typeface="ＭＳ Ｐゴシック"/>
+                <a:cs typeface="Calibri"/>
+              </a:rPr>
+              <a:t>A persistent storage in the embedded system</a:t>
+            </a:r>
+            <a:r>
+              <a:rPr lang="en-US" dirty="0">
+                <a:ea typeface="ＭＳ Ｐゴシック"/>
+                <a:cs typeface="Calibri"/>
+              </a:rPr>
+              <a:t>,</a:t>
+            </a:r>
+            <a:r>
+              <a:rPr lang="en-US" sz="1200" kern="1200" dirty="0">
+                <a:solidFill>
+                  <a:schemeClr val="tx1"/>
+                </a:solidFill>
+                <a:effectLst/>
+                <a:latin typeface="+mn-lt"/>
+                <a:ea typeface="ＭＳ Ｐゴシック"/>
+                <a:cs typeface="Calibri"/>
+              </a:rPr>
+              <a:t> </a:t>
+            </a:r>
+            <a:r>
+              <a:rPr lang="en-US" dirty="0">
+                <a:ea typeface="ＭＳ Ｐゴシック"/>
+                <a:cs typeface="Calibri"/>
+              </a:rPr>
+              <a:t>if</a:t>
+            </a:r>
+            <a:r>
+              <a:rPr lang="en-US" sz="1200" kern="1200" dirty="0">
+                <a:solidFill>
+                  <a:schemeClr val="tx1"/>
+                </a:solidFill>
+                <a:effectLst/>
+                <a:latin typeface="+mn-lt"/>
+                <a:ea typeface="ＭＳ Ｐゴシック"/>
+                <a:cs typeface="Calibri"/>
+              </a:rPr>
+              <a:t> the embedded system has to store data persistently during its operations</a:t>
+            </a:r>
+          </a:p>
+          <a:p>
+            <a:pPr marL="742950" lvl="1" indent="-285750">
+              <a:buFont typeface="Calibri"/>
+              <a:buChar char="-"/>
+            </a:pPr>
+            <a:r>
+              <a:rPr lang="en-US" sz="1200" kern="1200" dirty="0">
+                <a:solidFill>
+                  <a:schemeClr val="tx1"/>
+                </a:solidFill>
+                <a:effectLst/>
+                <a:latin typeface="+mn-lt"/>
+                <a:ea typeface="ＭＳ Ｐゴシック"/>
+                <a:cs typeface="Calibri"/>
+              </a:rPr>
+              <a:t>A persistent storage accessed over the network</a:t>
+            </a:r>
+            <a:r>
+              <a:rPr lang="en-US" dirty="0">
+                <a:ea typeface="ＭＳ Ｐゴシック"/>
+                <a:cs typeface="Calibri"/>
+              </a:rPr>
+              <a:t>,</a:t>
+            </a:r>
+            <a:r>
+              <a:rPr lang="en-US" sz="1200" kern="1200" dirty="0">
+                <a:solidFill>
+                  <a:schemeClr val="tx1"/>
+                </a:solidFill>
+                <a:effectLst/>
+                <a:latin typeface="+mn-lt"/>
+                <a:ea typeface="ＭＳ Ｐゴシック"/>
+                <a:cs typeface="Calibri"/>
+              </a:rPr>
+              <a:t> </a:t>
+            </a:r>
+            <a:r>
+              <a:rPr lang="en-US" dirty="0">
+                <a:ea typeface="ＭＳ Ｐゴシック"/>
+                <a:cs typeface="Calibri"/>
+              </a:rPr>
+              <a:t>if</a:t>
+            </a:r>
+            <a:r>
+              <a:rPr lang="en-US" sz="1200" kern="1200" dirty="0">
+                <a:solidFill>
+                  <a:schemeClr val="tx1"/>
+                </a:solidFill>
+                <a:effectLst/>
+                <a:latin typeface="+mn-lt"/>
+                <a:ea typeface="ＭＳ Ｐゴシック"/>
+                <a:cs typeface="Calibri"/>
+              </a:rPr>
+              <a:t> developing a Linux-based embedded system</a:t>
             </a:r>
           </a:p>
           <a:p>
@@ -5096,10 +6563,48 @@
                 </a:solidFill>
                 <a:effectLst/>
                 <a:latin typeface="+mn-lt"/>
-                <a:ea typeface="ＭＳ Ｐゴシック" charset="0"/>
-                <a:cs typeface="ＭＳ Ｐゴシック" charset="0"/>
-              </a:rPr>
-              <a:t>A typical Linux-based embedded system is made up of numerous components. One of these components is the bootloader. This is a piece of software that is executed at power-up and sets up the hardware to run the operating system.</a:t>
+                <a:ea typeface="ＭＳ Ｐゴシック"/>
+                <a:cs typeface="Calibri"/>
+              </a:rPr>
+              <a:t>A typical Linux-based embedded system is made up of numerous components. One of these components is the bootloader. This is a piece of software</a:t>
+            </a:r>
+            <a:r>
+              <a:rPr lang="en-US" dirty="0">
+                <a:ea typeface="ＭＳ Ｐゴシック"/>
+                <a:cs typeface="Calibri"/>
+              </a:rPr>
+              <a:t>,</a:t>
+            </a:r>
+            <a:r>
+              <a:rPr lang="en-US" sz="1200" kern="1200" dirty="0">
+                <a:solidFill>
+                  <a:schemeClr val="tx1"/>
+                </a:solidFill>
+                <a:effectLst/>
+                <a:latin typeface="+mn-lt"/>
+                <a:ea typeface="ＭＳ Ｐゴシック"/>
+                <a:cs typeface="Calibri"/>
+              </a:rPr>
+              <a:t> executed at power-up </a:t>
+            </a:r>
+            <a:r>
+              <a:rPr lang="en-US" dirty="0">
+                <a:ea typeface="ＭＳ Ｐゴシック"/>
+                <a:cs typeface="Calibri"/>
+              </a:rPr>
+              <a:t>to set</a:t>
+            </a:r>
+            <a:r>
+              <a:rPr lang="en-US" sz="1200" kern="1200" dirty="0">
+                <a:solidFill>
+                  <a:schemeClr val="tx1"/>
+                </a:solidFill>
+                <a:effectLst/>
+                <a:latin typeface="+mn-lt"/>
+                <a:ea typeface="ＭＳ Ｐゴシック"/>
+                <a:cs typeface="Calibri"/>
+              </a:rPr>
+              <a:t> up the hardware to run the operating system.</a:t>
             </a:r>
           </a:p>
           <a:p>
@@ -5146,16 +6651,42 @@
           </a:p>
           <a:p>
             <a:r>
+              <a:rPr lang="en-US" dirty="0">
+                <a:ea typeface="ＭＳ Ｐゴシック"/>
+                <a:cs typeface="Calibri"/>
+              </a:rPr>
+              <a:t>Perhaps the most important component</a:t>
+            </a:r>
+            <a:r>
               <a:rPr lang="en-US" sz="1200" kern="1200" dirty="0">
                 <a:solidFill>
                   <a:schemeClr val="tx1"/>
                 </a:solidFill>
                 <a:effectLst/>
                 <a:latin typeface="+mn-lt"/>
-                <a:ea typeface="ＭＳ Ｐゴシック" charset="0"/>
-                <a:cs typeface="ＭＳ Ｐゴシック" charset="0"/>
-              </a:rPr>
-              <a:t>Also, potentially the main component is the Linux kernel. This is essentially the operating system code and provides all of the services to manage hardware resources and many other tasks.</a:t>
+                <a:ea typeface="ＭＳ Ｐゴシック"/>
+                <a:cs typeface="Calibri"/>
+              </a:rPr>
+              <a:t> is the Linux kernel. This is essentially the operating system code and provides all the services to manage hardware resources and </a:t>
+            </a:r>
+            <a:r>
+              <a:rPr lang="en-US" dirty="0">
+                <a:ea typeface="ＭＳ Ｐゴシック"/>
+                <a:cs typeface="Calibri"/>
+              </a:rPr>
+              <a:t>perform </a:t>
+            </a:r>
+            <a:r>
+              <a:rPr lang="en-US" sz="1200" kern="1200" dirty="0">
+                <a:solidFill>
+                  <a:schemeClr val="tx1"/>
+                </a:solidFill>
+                <a:effectLst/>
+                <a:latin typeface="+mn-lt"/>
+                <a:ea typeface="ＭＳ Ｐゴシック"/>
+                <a:cs typeface="Calibri"/>
+              </a:rPr>
+              <a:t>many other tasks.</a:t>
             </a:r>
           </a:p>
           <a:p>
@@ -5256,10 +6787,29 @@
                 </a:solidFill>
                 <a:effectLst/>
                 <a:latin typeface="+mn-lt"/>
-                <a:ea typeface="ＭＳ Ｐゴシック" charset="0"/>
-                <a:cs typeface="ＭＳ Ｐゴシック" charset="0"/>
-              </a:rPr>
-              <a:t>System programs are user-friendly utilities that implement and provide access to deeper-lying operating system services.</a:t>
+                <a:ea typeface="ＭＳ Ｐゴシック"/>
+                <a:cs typeface="Calibri"/>
+              </a:rPr>
+              <a:t>System programs are user-friendly utilities that implement and provide access to </a:t>
+            </a:r>
+            <a:r>
+              <a:rPr lang="en-US" dirty="0">
+                <a:ea typeface="ＭＳ Ｐゴシック"/>
+                <a:cs typeface="Calibri"/>
+              </a:rPr>
+              <a:t>underlying</a:t>
+            </a:r>
+            <a:r>
+              <a:rPr lang="en-US" sz="1200" kern="1200" dirty="0">
+                <a:solidFill>
+                  <a:schemeClr val="tx1"/>
+                </a:solidFill>
+                <a:effectLst/>
+                <a:latin typeface="+mn-lt"/>
+                <a:ea typeface="ＭＳ Ｐゴシック"/>
+                <a:cs typeface="Calibri"/>
+              </a:rPr>
+              <a:t> operating system services.</a:t>
             </a:r>
           </a:p>
           <a:p>
@@ -5278,16 +6828,80 @@
           </a:p>
           <a:p>
             <a:r>
+              <a:rPr lang="en-US" dirty="0">
+                <a:ea typeface="ＭＳ Ｐゴシック"/>
+                <a:cs typeface="Calibri"/>
+              </a:rPr>
+              <a:t>Applications</a:t>
+            </a:r>
+            <a:r>
               <a:rPr lang="en-US" sz="1200" kern="1200" dirty="0">
                 <a:solidFill>
                   <a:schemeClr val="tx1"/>
                 </a:solidFill>
                 <a:effectLst/>
                 <a:latin typeface="+mn-lt"/>
-                <a:ea typeface="ＭＳ Ｐゴシック" charset="0"/>
-                <a:cs typeface="ＭＳ Ｐゴシック" charset="0"/>
-              </a:rPr>
-              <a:t>The applications are software that implement the functionality that the system is required to provide to the user.</a:t>
+                <a:ea typeface="ＭＳ Ｐゴシック"/>
+                <a:cs typeface="Calibri"/>
+              </a:rPr>
+              <a:t> are software </a:t>
+            </a:r>
+            <a:r>
+              <a:rPr lang="en-US" dirty="0">
+                <a:ea typeface="ＭＳ Ｐゴシック"/>
+                <a:cs typeface="Calibri"/>
+              </a:rPr>
+              <a:t>programs </a:t>
+            </a:r>
+            <a:r>
+              <a:rPr lang="en-US" sz="1200" kern="1200" dirty="0">
+                <a:solidFill>
+                  <a:schemeClr val="tx1"/>
+                </a:solidFill>
+                <a:effectLst/>
+                <a:latin typeface="+mn-lt"/>
+                <a:ea typeface="ＭＳ Ｐゴシック"/>
+                <a:cs typeface="Calibri"/>
+              </a:rPr>
+              <a:t>that implement the functionality </a:t>
+            </a:r>
+            <a:r>
+              <a:rPr lang="en-US" dirty="0">
+                <a:ea typeface="ＭＳ Ｐゴシック"/>
+                <a:cs typeface="Calibri"/>
+              </a:rPr>
+              <a:t>required by the </a:t>
+            </a:r>
+            <a:r>
+              <a:rPr lang="en-US" sz="1200" kern="1200" dirty="0">
+                <a:solidFill>
+                  <a:schemeClr val="tx1"/>
+                </a:solidFill>
+                <a:effectLst/>
+                <a:latin typeface="+mn-lt"/>
+                <a:ea typeface="ＭＳ Ｐゴシック"/>
+                <a:cs typeface="Calibri"/>
+              </a:rPr>
+              <a:t>system to </a:t>
+            </a:r>
+            <a:r>
+              <a:rPr lang="en-US" dirty="0">
+                <a:ea typeface="ＭＳ Ｐゴシック"/>
+                <a:cs typeface="Calibri"/>
+              </a:rPr>
+              <a:t>serve</a:t>
+            </a:r>
+            <a:r>
+              <a:rPr lang="en-US" sz="1200" kern="1200" dirty="0">
+                <a:solidFill>
+                  <a:schemeClr val="tx1"/>
+                </a:solidFill>
+                <a:effectLst/>
+                <a:latin typeface="+mn-lt"/>
+                <a:ea typeface="ＭＳ Ｐゴシック"/>
+                <a:cs typeface="Calibri"/>
+              </a:rPr>
+              <a:t> the user.</a:t>
             </a:r>
           </a:p>
           <a:p>
@@ -5444,10 +7058,29 @@
                 </a:solidFill>
                 <a:effectLst/>
                 <a:latin typeface="+mn-lt"/>
-                <a:ea typeface="ＭＳ Ｐゴシック" charset="0"/>
-                <a:cs typeface="ＭＳ Ｐゴシック" charset="0"/>
-              </a:rPr>
-              <a:t>One component is the RAM (random-access memory), which is a type of volatile memory and is used for storing data and code that is currently in use.</a:t>
+                <a:ea typeface="ＭＳ Ｐゴシック"/>
+                <a:cs typeface="Calibri"/>
+              </a:rPr>
+              <a:t>One component is the RAM (random-access memory), which is a type of volatile memory</a:t>
+            </a:r>
+            <a:r>
+              <a:rPr lang="en-US" dirty="0">
+                <a:ea typeface="ＭＳ Ｐゴシック"/>
+                <a:cs typeface="Calibri"/>
+              </a:rPr>
+              <a:t> </a:t>
+            </a:r>
+            <a:r>
+              <a:rPr lang="en-US" sz="1200" kern="1200" dirty="0">
+                <a:solidFill>
+                  <a:schemeClr val="tx1"/>
+                </a:solidFill>
+                <a:effectLst/>
+                <a:latin typeface="+mn-lt"/>
+                <a:ea typeface="ＭＳ Ｐゴシック"/>
+                <a:cs typeface="Calibri"/>
+              </a:rPr>
+              <a:t>used for storing data and code that is currently in use.</a:t>
             </a:r>
           </a:p>
           <a:p>
@@ -5472,10 +7105,29 @@
                 </a:solidFill>
                 <a:effectLst/>
                 <a:latin typeface="+mn-lt"/>
-                <a:ea typeface="ＭＳ Ｐゴシック" charset="0"/>
-                <a:cs typeface="ＭＳ Ｐゴシック" charset="0"/>
-              </a:rPr>
-              <a:t>Another component is the CPU (central processing unit), which is the processor that the software is run on. The CPU is where the computation occurs within the system and will include the arithmetic logic unit.</a:t>
+                <a:ea typeface="ＭＳ Ｐゴシック"/>
+                <a:cs typeface="Calibri"/>
+              </a:rPr>
+              <a:t>Another component is the CPU (central processing unit), which is the processor that the software is run on. The CPU is where the computation occurs within the system and </a:t>
+            </a:r>
+            <a:r>
+              <a:rPr lang="en-US" dirty="0">
+                <a:ea typeface="ＭＳ Ｐゴシック"/>
+                <a:cs typeface="Calibri"/>
+              </a:rPr>
+              <a:t>includes</a:t>
+            </a:r>
+            <a:r>
+              <a:rPr lang="en-US" sz="1200" kern="1200" dirty="0">
+                <a:solidFill>
+                  <a:schemeClr val="tx1"/>
+                </a:solidFill>
+                <a:effectLst/>
+                <a:latin typeface="+mn-lt"/>
+                <a:ea typeface="ＭＳ Ｐゴシック"/>
+                <a:cs typeface="Calibri"/>
+              </a:rPr>
+              <a:t> the arithmetic logic unit.</a:t>
             </a:r>
           </a:p>
           <a:p>
@@ -5500,10 +7152,48 @@
                 </a:solidFill>
                 <a:effectLst/>
                 <a:latin typeface="+mn-lt"/>
-                <a:ea typeface="ＭＳ Ｐゴシック" charset="0"/>
-                <a:cs typeface="ＭＳ Ｐゴシック" charset="0"/>
-              </a:rPr>
-              <a:t>Embedded systems also include input/output (I/O), which are peripherals that enable the process of information communication between the system and the user to occur.</a:t>
+                <a:ea typeface="ＭＳ Ｐゴシック"/>
+                <a:cs typeface="Calibri"/>
+              </a:rPr>
+              <a:t>Embedded systems also include input/output (I/O</a:t>
+            </a:r>
+            <a:r>
+              <a:rPr lang="en-US" dirty="0">
+                <a:ea typeface="ＭＳ Ｐゴシック"/>
+                <a:cs typeface="Calibri"/>
+              </a:rPr>
+              <a:t>) devices,</a:t>
+            </a:r>
+            <a:r>
+              <a:rPr lang="en-US" sz="1200" kern="1200" dirty="0">
+                <a:solidFill>
+                  <a:schemeClr val="tx1"/>
+                </a:solidFill>
+                <a:effectLst/>
+                <a:latin typeface="+mn-lt"/>
+                <a:ea typeface="ＭＳ Ｐゴシック"/>
+                <a:cs typeface="Calibri"/>
+              </a:rPr>
+              <a:t> which are peripherals that enable the </a:t>
+            </a:r>
+            <a:r>
+              <a:rPr lang="en-US" dirty="0">
+                <a:ea typeface="ＭＳ Ｐゴシック"/>
+                <a:cs typeface="Calibri"/>
+              </a:rPr>
+              <a:t>communication</a:t>
+            </a:r>
+            <a:r>
+              <a:rPr lang="en-US" sz="1200" kern="1200" dirty="0">
+                <a:solidFill>
+                  <a:schemeClr val="tx1"/>
+                </a:solidFill>
+                <a:effectLst/>
+                <a:latin typeface="+mn-lt"/>
+                <a:ea typeface="ＭＳ Ｐゴシック"/>
+                <a:cs typeface="Calibri"/>
+              </a:rPr>
+              <a:t> of information between the system and the user.</a:t>
             </a:r>
           </a:p>
           <a:p>
@@ -5528,10 +7218,10 @@
                 </a:solidFill>
                 <a:effectLst/>
                 <a:latin typeface="+mn-lt"/>
-                <a:ea typeface="ＭＳ Ｐゴシック" charset="0"/>
-                <a:cs typeface="ＭＳ Ｐゴシック" charset="0"/>
-              </a:rPr>
-              <a:t>They also include boot flash and mass memory flash. Boot flash is a smaller type of non-volatile memory and mass memory flash is large non-volatile memory storage. These will both be discussed later on.</a:t>
+                <a:ea typeface="ＭＳ Ｐゴシック"/>
+                <a:cs typeface="Calibri"/>
+              </a:rPr>
+              <a:t>They also include boot flash and mass memory flash. Boot flash is a smaller type of non-volatile memory and mass memory flash is large non-volatile memory storage. These will both be discussed later.</a:t>
             </a:r>
           </a:p>
           <a:p>
@@ -5646,10 +7336,67 @@
                 </a:solidFill>
                 <a:effectLst/>
                 <a:latin typeface="+mn-lt"/>
-                <a:ea typeface="ＭＳ Ｐゴシック" charset="0"/>
-                <a:cs typeface="ＭＳ Ｐゴシック" charset="0"/>
-              </a:rPr>
-              <a:t>One option is a microcontroller-based implementation. This option incorporates the majority of the reference model components onto a single device. This typically includes the CPU, RAM, boot flash, and I/O. </a:t>
+                <a:ea typeface="ＭＳ Ｐゴシック"/>
+                <a:cs typeface="Calibri"/>
+              </a:rPr>
+              <a:t>One option is a microcontroller-based implementation. This </a:t>
+            </a:r>
+            <a:r>
+              <a:rPr lang="en-US" dirty="0">
+                <a:ea typeface="ＭＳ Ｐゴシック"/>
+                <a:cs typeface="Calibri"/>
+              </a:rPr>
+              <a:t>approach incorporates</a:t>
+            </a:r>
+            <a:r>
+              <a:rPr lang="en-US" sz="1200" kern="1200" dirty="0">
+                <a:solidFill>
+                  <a:schemeClr val="tx1"/>
+                </a:solidFill>
+                <a:effectLst/>
+                <a:latin typeface="+mn-lt"/>
+                <a:ea typeface="ＭＳ Ｐゴシック"/>
+                <a:cs typeface="Calibri"/>
+              </a:rPr>
+              <a:t> the majority of the reference model components onto a single device</a:t>
+            </a:r>
+            <a:r>
+              <a:rPr lang="en-US" dirty="0">
+                <a:ea typeface="ＭＳ Ｐゴシック"/>
+                <a:cs typeface="Calibri"/>
+              </a:rPr>
+              <a:t>,</a:t>
+            </a:r>
+            <a:r>
+              <a:rPr lang="en-US" sz="1200" kern="1200" dirty="0">
+                <a:solidFill>
+                  <a:schemeClr val="tx1"/>
+                </a:solidFill>
+                <a:effectLst/>
+                <a:latin typeface="+mn-lt"/>
+                <a:ea typeface="ＭＳ Ｐゴシック"/>
+                <a:cs typeface="Calibri"/>
+              </a:rPr>
+              <a:t> typically </a:t>
+            </a:r>
+            <a:r>
+              <a:rPr lang="en-US" dirty="0">
+                <a:ea typeface="ＭＳ Ｐゴシック"/>
+                <a:cs typeface="Calibri"/>
+              </a:rPr>
+              <a:t>including</a:t>
+            </a:r>
+            <a:r>
+              <a:rPr lang="en-US" sz="1200" kern="1200" dirty="0">
+                <a:solidFill>
+                  <a:schemeClr val="tx1"/>
+                </a:solidFill>
+                <a:effectLst/>
+                <a:latin typeface="+mn-lt"/>
+                <a:ea typeface="ＭＳ Ｐゴシック"/>
+                <a:cs typeface="Calibri"/>
+              </a:rPr>
+              <a:t> the CPU, RAM, boot flash, and I/O. </a:t>
             </a:r>
           </a:p>
           <a:p>
@@ -5674,10 +7421,86 @@
                 </a:solidFill>
                 <a:effectLst/>
                 <a:latin typeface="+mn-lt"/>
-                <a:ea typeface="ＭＳ Ｐゴシック" charset="0"/>
-                <a:cs typeface="ＭＳ Ｐゴシック" charset="0"/>
-              </a:rPr>
-              <a:t>An alternative option is a system-on-chip based implementation. With this option, a number of the reference model components are discrete components. The CPU can then be integrated with some of them, for example, the I/O and boot flash.</a:t>
+                <a:ea typeface="ＭＳ Ｐゴシック"/>
+                <a:cs typeface="Calibri"/>
+              </a:rPr>
+              <a:t>An alternative option is a system-on-chip </a:t>
+            </a:r>
+            <a:r>
+              <a:rPr lang="en-US" dirty="0">
+                <a:ea typeface="ＭＳ Ｐゴシック"/>
+                <a:cs typeface="Calibri"/>
+              </a:rPr>
+              <a:t>(SoC) </a:t>
+            </a:r>
+            <a:r>
+              <a:rPr lang="en-US" sz="1200" kern="1200" dirty="0">
+                <a:solidFill>
+                  <a:schemeClr val="tx1"/>
+                </a:solidFill>
+                <a:effectLst/>
+                <a:latin typeface="+mn-lt"/>
+                <a:ea typeface="ＭＳ Ｐゴシック"/>
+                <a:cs typeface="Calibri"/>
+              </a:rPr>
+              <a:t>based implementation. </a:t>
+            </a:r>
+            <a:r>
+              <a:rPr lang="en-US" dirty="0">
+                <a:ea typeface="ＭＳ Ｐゴシック"/>
+                <a:cs typeface="Calibri"/>
+              </a:rPr>
+              <a:t>In </a:t>
+            </a:r>
+            <a:r>
+              <a:rPr lang="en-US" sz="1200" kern="1200" dirty="0">
+                <a:solidFill>
+                  <a:schemeClr val="tx1"/>
+                </a:solidFill>
+                <a:effectLst/>
+                <a:latin typeface="+mn-lt"/>
+                <a:ea typeface="ＭＳ Ｐゴシック"/>
+                <a:cs typeface="Calibri"/>
+              </a:rPr>
+              <a:t>this </a:t>
+            </a:r>
+            <a:r>
+              <a:rPr lang="en-US" dirty="0">
+                <a:ea typeface="ＭＳ Ｐゴシック"/>
+                <a:cs typeface="Calibri"/>
+              </a:rPr>
+              <a:t>approach</a:t>
+            </a:r>
+            <a:r>
+              <a:rPr lang="en-US" sz="1200" kern="1200" dirty="0">
+                <a:solidFill>
+                  <a:schemeClr val="tx1"/>
+                </a:solidFill>
+                <a:effectLst/>
+                <a:latin typeface="+mn-lt"/>
+                <a:ea typeface="ＭＳ Ｐゴシック"/>
+                <a:cs typeface="Calibri"/>
+              </a:rPr>
+              <a:t>, </a:t>
+            </a:r>
+            <a:r>
+              <a:rPr lang="en-US" dirty="0">
+                <a:ea typeface="ＭＳ Ｐゴシック"/>
+                <a:cs typeface="Calibri"/>
+              </a:rPr>
+              <a:t>several of</a:t>
+            </a:r>
+            <a:r>
+              <a:rPr lang="en-US" sz="1200" kern="1200" dirty="0">
+                <a:solidFill>
+                  <a:schemeClr val="tx1"/>
+                </a:solidFill>
+                <a:effectLst/>
+                <a:latin typeface="+mn-lt"/>
+                <a:ea typeface="ＭＳ Ｐゴシック"/>
+                <a:cs typeface="Calibri"/>
+              </a:rPr>
+              <a:t> the reference model components are discrete. The CPU can then be integrated with some of them, for example, the I/O and boot flash.</a:t>
             </a:r>
           </a:p>
           <a:p>
@@ -5792,10 +7615,48 @@
                 </a:solidFill>
                 <a:effectLst/>
                 <a:latin typeface="+mn-lt"/>
-                <a:ea typeface="ＭＳ Ｐゴシック" charset="0"/>
-                <a:cs typeface="ＭＳ Ｐゴシック" charset="0"/>
-              </a:rPr>
-              <a:t>These addresses are then assigned to different devices or components (memory, I/O, etc.) that require space in memory. </a:t>
+                <a:ea typeface="ＭＳ Ｐゴシック"/>
+                <a:cs typeface="Calibri"/>
+              </a:rPr>
+              <a:t>These addresses are then assigned to different devices or components (</a:t>
+            </a:r>
+            <a:r>
+              <a:rPr lang="en-US" dirty="0">
+                <a:ea typeface="ＭＳ Ｐゴシック"/>
+                <a:cs typeface="Calibri"/>
+              </a:rPr>
+              <a:t>e.g., memory</a:t>
+            </a:r>
+            <a:r>
+              <a:rPr lang="en-US" sz="1200" kern="1200" dirty="0">
+                <a:solidFill>
+                  <a:schemeClr val="tx1"/>
+                </a:solidFill>
+                <a:effectLst/>
+                <a:latin typeface="+mn-lt"/>
+                <a:ea typeface="ＭＳ Ｐゴシック"/>
+                <a:cs typeface="Calibri"/>
+              </a:rPr>
+              <a:t>, I/O</a:t>
+            </a:r>
+            <a:r>
+              <a:rPr lang="en-US" dirty="0">
+                <a:ea typeface="ＭＳ Ｐゴシック"/>
+                <a:cs typeface="Calibri"/>
+              </a:rPr>
+              <a:t>)</a:t>
+            </a:r>
+            <a:r>
+              <a:rPr lang="en-US" sz="1200" kern="1200" dirty="0">
+                <a:solidFill>
+                  <a:schemeClr val="tx1"/>
+                </a:solidFill>
+                <a:effectLst/>
+                <a:latin typeface="+mn-lt"/>
+                <a:ea typeface="ＭＳ Ｐゴシック"/>
+                <a:cs typeface="Calibri"/>
+              </a:rPr>
+              <a:t> that require space in memory. </a:t>
             </a:r>
           </a:p>
           <a:p>
@@ -6010,7 +7871,6 @@
           <a:ln>
             <a:noFill/>
           </a:ln>
-          <a:extLst/>
         </p:spPr>
         <p:txBody>
           <a:bodyPr lIns="0" tIns="0" rIns="0" bIns="0"/>
@@ -6166,7 +8026,6 @@
           <a:ln>
             <a:noFill/>
           </a:ln>
-          <a:extLst/>
         </p:spPr>
         <p:txBody>
           <a:bodyPr lIns="0" tIns="0" rIns="0" bIns="0"/>
@@ -6671,7 +8530,6 @@
           <a:ln>
             <a:noFill/>
           </a:ln>
-          <a:extLst/>
         </p:spPr>
         <p:txBody>
           <a:bodyPr lIns="0" tIns="0" rIns="0" bIns="0">
@@ -6869,9 +8727,7 @@
       </p:pic>
       <p:sp>
         <p:nvSpPr>
-          <p:cNvPr id="21" name="Text Placeholder 28">
-            <a:extLst/>
-          </p:cNvPr>
+          <p:cNvPr id="21" name="Text Placeholder 28"/>
           <p:cNvSpPr>
             <a:spLocks noGrp="1"/>
           </p:cNvSpPr>
@@ -6910,9 +8766,7 @@
       </p:sp>
       <p:sp>
         <p:nvSpPr>
-          <p:cNvPr id="22" name="Text Placeholder 28">
-            <a:extLst/>
-          </p:cNvPr>
+          <p:cNvPr id="22" name="Text Placeholder 28"/>
           <p:cNvSpPr>
             <a:spLocks noGrp="1"/>
           </p:cNvSpPr>
@@ -6951,9 +8805,7 @@
       </p:sp>
       <p:sp>
         <p:nvSpPr>
-          <p:cNvPr id="26" name="Title 1">
-            <a:extLst/>
-          </p:cNvPr>
+          <p:cNvPr id="26" name="Title 1"/>
           <p:cNvSpPr>
             <a:spLocks noGrp="1"/>
           </p:cNvSpPr>
@@ -7028,9 +8880,7 @@
       </p:sp>
       <p:sp>
         <p:nvSpPr>
-          <p:cNvPr id="20" name="Subtitle 2">
-            <a:extLst/>
-          </p:cNvPr>
+          <p:cNvPr id="20" name="Subtitle 2"/>
           <p:cNvSpPr>
             <a:spLocks noGrp="1"/>
           </p:cNvSpPr>
@@ -7202,9 +9052,7 @@
       </p:cxnSp>
       <p:sp>
         <p:nvSpPr>
-          <p:cNvPr id="2" name="Title 1">
-            <a:extLst/>
-          </p:cNvPr>
+          <p:cNvPr id="2" name="Title 1"/>
           <p:cNvSpPr>
             <a:spLocks noGrp="1"/>
           </p:cNvSpPr>
@@ -7226,9 +9074,7 @@
       </p:sp>
       <p:sp>
         <p:nvSpPr>
-          <p:cNvPr id="44" name="Text Placeholder 43">
-            <a:extLst/>
-          </p:cNvPr>
+          <p:cNvPr id="44" name="Text Placeholder 43"/>
           <p:cNvSpPr>
             <a:spLocks noGrp="1"/>
           </p:cNvSpPr>
@@ -7271,9 +9117,7 @@
       </p:sp>
       <p:sp>
         <p:nvSpPr>
-          <p:cNvPr id="9" name="Text Placeholder 131">
-            <a:extLst/>
-          </p:cNvPr>
+          <p:cNvPr id="9" name="Text Placeholder 131"/>
           <p:cNvSpPr>
             <a:spLocks noGrp="1"/>
           </p:cNvSpPr>
@@ -7323,9 +9167,7 @@
       </p:sp>
       <p:sp>
         <p:nvSpPr>
-          <p:cNvPr id="4" name="Content Placeholder 3">
-            <a:extLst/>
-          </p:cNvPr>
+          <p:cNvPr id="4" name="Content Placeholder 3"/>
           <p:cNvSpPr>
             <a:spLocks noGrp="1"/>
           </p:cNvSpPr>
@@ -7415,9 +9257,7 @@
       </p:sp>
       <p:sp>
         <p:nvSpPr>
-          <p:cNvPr id="10" name="Text Placeholder 131">
-            <a:extLst/>
-          </p:cNvPr>
+          <p:cNvPr id="10" name="Text Placeholder 131"/>
           <p:cNvSpPr>
             <a:spLocks noGrp="1"/>
           </p:cNvSpPr>
@@ -7467,9 +9307,7 @@
       </p:sp>
       <p:sp>
         <p:nvSpPr>
-          <p:cNvPr id="8" name="Content Placeholder 7">
-            <a:extLst/>
-          </p:cNvPr>
+          <p:cNvPr id="8" name="Content Placeholder 7"/>
           <p:cNvSpPr>
             <a:spLocks noGrp="1"/>
           </p:cNvSpPr>
@@ -7690,9 +9528,7 @@
       </p:grpSp>
       <p:sp>
         <p:nvSpPr>
-          <p:cNvPr id="2" name="Title 1">
-            <a:extLst/>
-          </p:cNvPr>
+          <p:cNvPr id="2" name="Title 1"/>
           <p:cNvSpPr>
             <a:spLocks noGrp="1"/>
           </p:cNvSpPr>
@@ -7714,9 +9550,7 @@
       </p:sp>
       <p:sp>
         <p:nvSpPr>
-          <p:cNvPr id="44" name="Text Placeholder 43">
-            <a:extLst/>
-          </p:cNvPr>
+          <p:cNvPr id="44" name="Text Placeholder 43"/>
           <p:cNvSpPr>
             <a:spLocks noGrp="1"/>
           </p:cNvSpPr>
@@ -7756,9 +9590,7 @@
       </p:sp>
       <p:sp>
         <p:nvSpPr>
-          <p:cNvPr id="7" name="Text Placeholder 2">
-            <a:extLst/>
-          </p:cNvPr>
+          <p:cNvPr id="7" name="Text Placeholder 2"/>
           <p:cNvSpPr>
             <a:spLocks noGrp="1"/>
           </p:cNvSpPr>
@@ -7829,9 +9661,7 @@
       </p:sp>
       <p:sp>
         <p:nvSpPr>
-          <p:cNvPr id="100" name="Text Placeholder 131">
-            <a:extLst/>
-          </p:cNvPr>
+          <p:cNvPr id="100" name="Text Placeholder 131"/>
           <p:cNvSpPr>
             <a:spLocks noGrp="1"/>
           </p:cNvSpPr>
@@ -7881,9 +9711,7 @@
       </p:sp>
       <p:sp>
         <p:nvSpPr>
-          <p:cNvPr id="13" name="Text Placeholder 2">
-            <a:extLst/>
-          </p:cNvPr>
+          <p:cNvPr id="13" name="Text Placeholder 2"/>
           <p:cNvSpPr>
             <a:spLocks noGrp="1"/>
           </p:cNvSpPr>
@@ -7926,9 +9754,7 @@
       </p:sp>
       <p:sp>
         <p:nvSpPr>
-          <p:cNvPr id="14" name="Text Placeholder 2">
-            <a:extLst/>
-          </p:cNvPr>
+          <p:cNvPr id="14" name="Text Placeholder 2"/>
           <p:cNvSpPr>
             <a:spLocks noGrp="1"/>
           </p:cNvSpPr>
@@ -7978,9 +9804,7 @@
       </p:sp>
       <p:sp>
         <p:nvSpPr>
-          <p:cNvPr id="15" name="Text Placeholder 131">
-            <a:extLst/>
-          </p:cNvPr>
+          <p:cNvPr id="15" name="Text Placeholder 131"/>
           <p:cNvSpPr>
             <a:spLocks noGrp="1"/>
           </p:cNvSpPr>
@@ -8030,9 +9854,7 @@
       </p:sp>
       <p:sp>
         <p:nvSpPr>
-          <p:cNvPr id="16" name="Text Placeholder 131">
-            <a:extLst/>
-          </p:cNvPr>
+          <p:cNvPr id="16" name="Text Placeholder 131"/>
           <p:cNvSpPr>
             <a:spLocks noGrp="1"/>
           </p:cNvSpPr>
@@ -8151,9 +9973,7 @@
       </p:cxnSp>
       <p:sp>
         <p:nvSpPr>
-          <p:cNvPr id="2" name="Title 1">
-            <a:extLst/>
-          </p:cNvPr>
+          <p:cNvPr id="2" name="Title 1"/>
           <p:cNvSpPr>
             <a:spLocks noGrp="1"/>
           </p:cNvSpPr>
@@ -8175,9 +9995,7 @@
       </p:sp>
       <p:sp>
         <p:nvSpPr>
-          <p:cNvPr id="44" name="Text Placeholder 43">
-            <a:extLst/>
-          </p:cNvPr>
+          <p:cNvPr id="44" name="Text Placeholder 43"/>
           <p:cNvSpPr>
             <a:spLocks noGrp="1"/>
           </p:cNvSpPr>
@@ -8217,9 +10035,7 @@
       </p:sp>
       <p:sp>
         <p:nvSpPr>
-          <p:cNvPr id="47" name="Text Placeholder 2">
-            <a:extLst/>
-          </p:cNvPr>
+          <p:cNvPr id="47" name="Text Placeholder 2"/>
           <p:cNvSpPr>
             <a:spLocks noGrp="1"/>
           </p:cNvSpPr>
@@ -8312,9 +10128,7 @@
       </p:sp>
       <p:sp>
         <p:nvSpPr>
-          <p:cNvPr id="18" name="Text Placeholder 2">
-            <a:extLst/>
-          </p:cNvPr>
+          <p:cNvPr id="18" name="Text Placeholder 2"/>
           <p:cNvSpPr>
             <a:spLocks noGrp="1"/>
           </p:cNvSpPr>
@@ -8433,9 +10247,7 @@
       </p:cxnSp>
       <p:sp>
         <p:nvSpPr>
-          <p:cNvPr id="2" name="Title 1">
-            <a:extLst/>
-          </p:cNvPr>
+          <p:cNvPr id="2" name="Title 1"/>
           <p:cNvSpPr>
             <a:spLocks noGrp="1"/>
           </p:cNvSpPr>
@@ -8457,9 +10269,7 @@
       </p:sp>
       <p:sp>
         <p:nvSpPr>
-          <p:cNvPr id="44" name="Text Placeholder 43">
-            <a:extLst/>
-          </p:cNvPr>
+          <p:cNvPr id="44" name="Text Placeholder 43"/>
           <p:cNvSpPr>
             <a:spLocks noGrp="1"/>
           </p:cNvSpPr>
@@ -8499,9 +10309,7 @@
       </p:sp>
       <p:sp>
         <p:nvSpPr>
-          <p:cNvPr id="4" name="Content Placeholder 3">
-            <a:extLst/>
-          </p:cNvPr>
+          <p:cNvPr id="4" name="Content Placeholder 3"/>
           <p:cNvSpPr>
             <a:spLocks noGrp="1"/>
           </p:cNvSpPr>
@@ -8591,9 +10399,7 @@
       </p:sp>
       <p:sp>
         <p:nvSpPr>
-          <p:cNvPr id="6" name="Content Placeholder 5">
-            <a:extLst/>
-          </p:cNvPr>
+          <p:cNvPr id="6" name="Content Placeholder 5"/>
           <p:cNvSpPr>
             <a:spLocks noGrp="1"/>
           </p:cNvSpPr>
@@ -8771,9 +10577,7 @@
       </p:grpSp>
       <p:sp>
         <p:nvSpPr>
-          <p:cNvPr id="2" name="Title 1">
-            <a:extLst/>
-          </p:cNvPr>
+          <p:cNvPr id="2" name="Title 1"/>
           <p:cNvSpPr>
             <a:spLocks noGrp="1"/>
           </p:cNvSpPr>
@@ -8795,9 +10599,7 @@
       </p:sp>
       <p:sp>
         <p:nvSpPr>
-          <p:cNvPr id="44" name="Text Placeholder 43">
-            <a:extLst/>
-          </p:cNvPr>
+          <p:cNvPr id="44" name="Text Placeholder 43"/>
           <p:cNvSpPr>
             <a:spLocks noGrp="1"/>
           </p:cNvSpPr>
@@ -8837,9 +10639,7 @@
       </p:sp>
       <p:sp>
         <p:nvSpPr>
-          <p:cNvPr id="18" name="Text Placeholder 131">
-            <a:extLst/>
-          </p:cNvPr>
+          <p:cNvPr id="18" name="Text Placeholder 131"/>
           <p:cNvSpPr>
             <a:spLocks noGrp="1"/>
           </p:cNvSpPr>
@@ -8889,9 +10689,7 @@
       </p:sp>
       <p:sp>
         <p:nvSpPr>
-          <p:cNvPr id="19" name="Text Placeholder 131">
-            <a:extLst/>
-          </p:cNvPr>
+          <p:cNvPr id="19" name="Text Placeholder 131"/>
           <p:cNvSpPr>
             <a:spLocks noGrp="1"/>
           </p:cNvSpPr>
@@ -8931,9 +10729,7 @@
       </p:sp>
       <p:sp>
         <p:nvSpPr>
-          <p:cNvPr id="20" name="Text Placeholder 131">
-            <a:extLst/>
-          </p:cNvPr>
+          <p:cNvPr id="20" name="Text Placeholder 131"/>
           <p:cNvSpPr>
             <a:spLocks noGrp="1"/>
           </p:cNvSpPr>
@@ -8973,9 +10769,7 @@
       </p:sp>
       <p:sp>
         <p:nvSpPr>
-          <p:cNvPr id="4" name="Content Placeholder 3">
-            <a:extLst/>
-          </p:cNvPr>
+          <p:cNvPr id="4" name="Content Placeholder 3"/>
           <p:cNvSpPr>
             <a:spLocks noGrp="1"/>
           </p:cNvSpPr>
@@ -9036,9 +10830,7 @@
       </p:sp>
       <p:sp>
         <p:nvSpPr>
-          <p:cNvPr id="6" name="Content Placeholder 5">
-            <a:extLst/>
-          </p:cNvPr>
+          <p:cNvPr id="6" name="Content Placeholder 5"/>
           <p:cNvSpPr>
             <a:spLocks noGrp="1"/>
           </p:cNvSpPr>
@@ -9099,9 +10891,7 @@
       </p:sp>
       <p:sp>
         <p:nvSpPr>
-          <p:cNvPr id="9" name="Content Placeholder 8">
-            <a:extLst/>
-          </p:cNvPr>
+          <p:cNvPr id="9" name="Content Placeholder 8"/>
           <p:cNvSpPr>
             <a:spLocks noGrp="1"/>
           </p:cNvSpPr>
@@ -9192,9 +10982,7 @@
       </p:grpSpPr>
       <p:sp>
         <p:nvSpPr>
-          <p:cNvPr id="2" name="Title 1">
-            <a:extLst/>
-          </p:cNvPr>
+          <p:cNvPr id="2" name="Title 1"/>
           <p:cNvSpPr>
             <a:spLocks noGrp="1"/>
           </p:cNvSpPr>
@@ -9216,9 +11004,7 @@
       </p:sp>
       <p:sp>
         <p:nvSpPr>
-          <p:cNvPr id="44" name="Text Placeholder 43">
-            <a:extLst/>
-          </p:cNvPr>
+          <p:cNvPr id="44" name="Text Placeholder 43"/>
           <p:cNvSpPr>
             <a:spLocks noGrp="1"/>
           </p:cNvSpPr>
@@ -9258,9 +11044,7 @@
       </p:sp>
       <p:sp>
         <p:nvSpPr>
-          <p:cNvPr id="6" name="Picture Placeholder 5">
-            <a:extLst/>
-          </p:cNvPr>
+          <p:cNvPr id="6" name="Picture Placeholder 5"/>
           <p:cNvSpPr>
             <a:spLocks noGrp="1"/>
           </p:cNvSpPr>
@@ -9294,9 +11078,7 @@
       </p:sp>
       <p:sp>
         <p:nvSpPr>
-          <p:cNvPr id="104" name="Picture Placeholder 5">
-            <a:extLst/>
-          </p:cNvPr>
+          <p:cNvPr id="104" name="Picture Placeholder 5"/>
           <p:cNvSpPr>
             <a:spLocks noGrp="1"/>
           </p:cNvSpPr>
@@ -9330,9 +11112,7 @@
       </p:sp>
       <p:sp>
         <p:nvSpPr>
-          <p:cNvPr id="105" name="Picture Placeholder 5">
-            <a:extLst/>
-          </p:cNvPr>
+          <p:cNvPr id="105" name="Picture Placeholder 5"/>
           <p:cNvSpPr>
             <a:spLocks noGrp="1"/>
           </p:cNvSpPr>
@@ -9366,9 +11146,7 @@
       </p:sp>
       <p:sp>
         <p:nvSpPr>
-          <p:cNvPr id="106" name="Picture Placeholder 5">
-            <a:extLst/>
-          </p:cNvPr>
+          <p:cNvPr id="106" name="Picture Placeholder 5"/>
           <p:cNvSpPr>
             <a:spLocks noGrp="1"/>
           </p:cNvSpPr>
@@ -9402,9 +11180,7 @@
       </p:sp>
       <p:sp>
         <p:nvSpPr>
-          <p:cNvPr id="14" name="Text Placeholder 7">
-            <a:extLst/>
-          </p:cNvPr>
+          <p:cNvPr id="14" name="Text Placeholder 7"/>
           <p:cNvSpPr>
             <a:spLocks noGrp="1"/>
           </p:cNvSpPr>
@@ -9498,9 +11274,7 @@
       </p:sp>
       <p:sp>
         <p:nvSpPr>
-          <p:cNvPr id="16" name="Text Placeholder 7">
-            <a:extLst/>
-          </p:cNvPr>
+          <p:cNvPr id="16" name="Text Placeholder 7"/>
           <p:cNvSpPr>
             <a:spLocks noGrp="1"/>
           </p:cNvSpPr>
@@ -9620,9 +11394,7 @@
       </p:grpSpPr>
       <p:sp>
         <p:nvSpPr>
-          <p:cNvPr id="2" name="Title 1">
-            <a:extLst/>
-          </p:cNvPr>
+          <p:cNvPr id="2" name="Title 1"/>
           <p:cNvSpPr>
             <a:spLocks noGrp="1"/>
           </p:cNvSpPr>
@@ -9644,9 +11416,7 @@
       </p:sp>
       <p:sp>
         <p:nvSpPr>
-          <p:cNvPr id="44" name="Text Placeholder 43">
-            <a:extLst/>
-          </p:cNvPr>
+          <p:cNvPr id="44" name="Text Placeholder 43"/>
           <p:cNvSpPr>
             <a:spLocks noGrp="1"/>
           </p:cNvSpPr>
@@ -9686,9 +11456,7 @@
       </p:sp>
       <p:sp>
         <p:nvSpPr>
-          <p:cNvPr id="7" name="Text Placeholder 2">
-            <a:extLst/>
-          </p:cNvPr>
+          <p:cNvPr id="7" name="Text Placeholder 2"/>
           <p:cNvSpPr>
             <a:spLocks noGrp="1"/>
           </p:cNvSpPr>
@@ -9752,9 +11520,7 @@
       </p:sp>
       <p:sp>
         <p:nvSpPr>
-          <p:cNvPr id="50" name="Picture Placeholder 5">
-            <a:extLst/>
-          </p:cNvPr>
+          <p:cNvPr id="50" name="Picture Placeholder 5"/>
           <p:cNvSpPr>
             <a:spLocks noGrp="1"/>
           </p:cNvSpPr>
@@ -9818,9 +11584,7 @@
       </p:grpSpPr>
       <p:sp>
         <p:nvSpPr>
-          <p:cNvPr id="2" name="Title 1">
-            <a:extLst/>
-          </p:cNvPr>
+          <p:cNvPr id="2" name="Title 1"/>
           <p:cNvSpPr>
             <a:spLocks noGrp="1"/>
           </p:cNvSpPr>
@@ -9849,9 +11613,7 @@
       </p:sp>
       <p:sp>
         <p:nvSpPr>
-          <p:cNvPr id="10" name="Table Placeholder 3">
-            <a:extLst/>
-          </p:cNvPr>
+          <p:cNvPr id="10" name="Table Placeholder 3"/>
           <p:cNvSpPr>
             <a:spLocks noGrp="1"/>
           </p:cNvSpPr>
@@ -9915,9 +11677,7 @@
       </p:grpSpPr>
       <p:sp>
         <p:nvSpPr>
-          <p:cNvPr id="2" name="Title 1">
-            <a:extLst/>
-          </p:cNvPr>
+          <p:cNvPr id="2" name="Title 1"/>
           <p:cNvSpPr>
             <a:spLocks noGrp="1"/>
           </p:cNvSpPr>
@@ -9939,9 +11699,7 @@
       </p:sp>
       <p:sp>
         <p:nvSpPr>
-          <p:cNvPr id="44" name="Text Placeholder 43">
-            <a:extLst/>
-          </p:cNvPr>
+          <p:cNvPr id="44" name="Text Placeholder 43"/>
           <p:cNvSpPr>
             <a:spLocks noGrp="1"/>
           </p:cNvSpPr>
@@ -9981,9 +11739,7 @@
       </p:sp>
       <p:sp>
         <p:nvSpPr>
-          <p:cNvPr id="7" name="Text Placeholder 2">
-            <a:extLst/>
-          </p:cNvPr>
+          <p:cNvPr id="7" name="Text Placeholder 2"/>
           <p:cNvSpPr>
             <a:spLocks noGrp="1"/>
           </p:cNvSpPr>
@@ -10110,9 +11866,7 @@
       </p:grpSpPr>
       <p:sp>
         <p:nvSpPr>
-          <p:cNvPr id="2" name="Title 1">
-            <a:extLst/>
-          </p:cNvPr>
+          <p:cNvPr id="2" name="Title 1"/>
           <p:cNvSpPr>
             <a:spLocks noGrp="1"/>
           </p:cNvSpPr>
@@ -10311,7 +12065,6 @@
           <a:ln>
             <a:noFill/>
           </a:ln>
-          <a:extLst/>
         </p:spPr>
         <p:txBody>
           <a:bodyPr lIns="0" tIns="0" rIns="0" bIns="0"/>
@@ -10467,7 +12220,6 @@
           <a:ln>
             <a:noFill/>
           </a:ln>
-          <a:extLst/>
         </p:spPr>
         <p:txBody>
           <a:bodyPr lIns="0" tIns="0" rIns="0" bIns="0"/>
@@ -10972,7 +12724,6 @@
           <a:ln>
             <a:noFill/>
           </a:ln>
-          <a:extLst/>
         </p:spPr>
         <p:txBody>
           <a:bodyPr lIns="0" tIns="0" rIns="0" bIns="0">
@@ -11170,9 +12921,7 @@
       </p:pic>
       <p:sp>
         <p:nvSpPr>
-          <p:cNvPr id="21" name="Text Placeholder 28">
-            <a:extLst/>
-          </p:cNvPr>
+          <p:cNvPr id="21" name="Text Placeholder 28"/>
           <p:cNvSpPr>
             <a:spLocks noGrp="1"/>
           </p:cNvSpPr>
@@ -11211,9 +12960,7 @@
       </p:sp>
       <p:sp>
         <p:nvSpPr>
-          <p:cNvPr id="22" name="Text Placeholder 28">
-            <a:extLst/>
-          </p:cNvPr>
+          <p:cNvPr id="22" name="Text Placeholder 28"/>
           <p:cNvSpPr>
             <a:spLocks noGrp="1"/>
           </p:cNvSpPr>
@@ -11252,9 +12999,7 @@
       </p:sp>
       <p:sp>
         <p:nvSpPr>
-          <p:cNvPr id="26" name="Title 1">
-            <a:extLst/>
-          </p:cNvPr>
+          <p:cNvPr id="26" name="Title 1"/>
           <p:cNvSpPr>
             <a:spLocks noGrp="1"/>
           </p:cNvSpPr>
@@ -11329,9 +13074,7 @@
       </p:sp>
       <p:sp>
         <p:nvSpPr>
-          <p:cNvPr id="17" name="Subtitle 2">
-            <a:extLst/>
-          </p:cNvPr>
+          <p:cNvPr id="17" name="Subtitle 2"/>
           <p:cNvSpPr>
             <a:spLocks noGrp="1"/>
           </p:cNvSpPr>
@@ -11496,7 +13239,6 @@
           <a:ln>
             <a:noFill/>
           </a:ln>
-          <a:extLst/>
         </p:spPr>
         <p:txBody>
           <a:bodyPr lIns="0" tIns="0" rIns="0" bIns="0">
@@ -11734,7 +13476,6 @@
           <a:ln>
             <a:noFill/>
           </a:ln>
-          <a:extLst/>
         </p:spPr>
         <p:txBody>
           <a:bodyPr lIns="0" tIns="0" rIns="0" bIns="0">
@@ -12285,7 +14026,6 @@
           <a:ln>
             <a:noFill/>
           </a:ln>
-          <a:extLst/>
         </p:spPr>
         <p:txBody>
           <a:bodyPr lIns="0" tIns="0" rIns="0" bIns="0">
@@ -12485,7 +14225,6 @@
           <a:ln>
             <a:noFill/>
           </a:ln>
-          <a:extLst/>
         </p:spPr>
         <p:txBody>
           <a:bodyPr lIns="0" tIns="0" rIns="0" bIns="0">
@@ -12663,7 +14402,6 @@
           <a:ln>
             <a:noFill/>
           </a:ln>
-          <a:extLst/>
         </p:spPr>
         <p:txBody>
           <a:bodyPr lIns="0" tIns="0" rIns="0" bIns="0">
@@ -12901,7 +14639,6 @@
           <a:ln>
             <a:noFill/>
           </a:ln>
-          <a:extLst/>
         </p:spPr>
         <p:txBody>
           <a:bodyPr lIns="0" tIns="0" rIns="0" bIns="0">
@@ -13527,9 +15264,7 @@
       </p:pic>
       <p:sp>
         <p:nvSpPr>
-          <p:cNvPr id="2" name="Title 1">
-            <a:extLst/>
-          </p:cNvPr>
+          <p:cNvPr id="2" name="Title 1"/>
           <p:cNvSpPr>
             <a:spLocks noGrp="1"/>
           </p:cNvSpPr>
@@ -13560,9 +15295,7 @@
       </p:sp>
       <p:sp>
         <p:nvSpPr>
-          <p:cNvPr id="7" name="Text Placeholder 43">
-            <a:extLst/>
-          </p:cNvPr>
+          <p:cNvPr id="7" name="Text Placeholder 43"/>
           <p:cNvSpPr>
             <a:spLocks noGrp="1"/>
           </p:cNvSpPr>
@@ -13599,9 +15332,7 @@
       </p:sp>
       <p:sp>
         <p:nvSpPr>
-          <p:cNvPr id="8" name="Text Placeholder 2">
-            <a:extLst/>
-          </p:cNvPr>
+          <p:cNvPr id="8" name="Text Placeholder 2"/>
           <p:cNvSpPr>
             <a:spLocks noGrp="1"/>
           </p:cNvSpPr>
@@ -13916,7 +15647,6 @@
           <a:ln>
             <a:noFill/>
           </a:ln>
-          <a:extLst/>
         </p:spPr>
         <p:txBody>
           <a:bodyPr lIns="0" tIns="0" rIns="0" bIns="0"/>
@@ -14072,7 +15802,6 @@
           <a:ln>
             <a:noFill/>
           </a:ln>
-          <a:extLst/>
         </p:spPr>
         <p:txBody>
           <a:bodyPr lIns="0" tIns="0" rIns="0" bIns="0"/>
@@ -14577,7 +16306,6 @@
           <a:ln>
             <a:noFill/>
           </a:ln>
-          <a:extLst/>
         </p:spPr>
         <p:txBody>
           <a:bodyPr lIns="0" tIns="0" rIns="0" bIns="0">
@@ -14775,9 +16503,7 @@
       </p:pic>
       <p:sp>
         <p:nvSpPr>
-          <p:cNvPr id="21" name="Text Placeholder 28">
-            <a:extLst/>
-          </p:cNvPr>
+          <p:cNvPr id="21" name="Text Placeholder 28"/>
           <p:cNvSpPr>
             <a:spLocks noGrp="1"/>
           </p:cNvSpPr>
@@ -14816,9 +16542,7 @@
       </p:sp>
       <p:sp>
         <p:nvSpPr>
-          <p:cNvPr id="22" name="Text Placeholder 28">
-            <a:extLst/>
-          </p:cNvPr>
+          <p:cNvPr id="22" name="Text Placeholder 28"/>
           <p:cNvSpPr>
             <a:spLocks noGrp="1"/>
           </p:cNvSpPr>
@@ -14857,9 +16581,7 @@
       </p:sp>
       <p:sp>
         <p:nvSpPr>
-          <p:cNvPr id="26" name="Title 1">
-            <a:extLst/>
-          </p:cNvPr>
+          <p:cNvPr id="26" name="Title 1"/>
           <p:cNvSpPr>
             <a:spLocks noGrp="1"/>
           </p:cNvSpPr>
@@ -14934,9 +16656,7 @@
       </p:sp>
       <p:sp>
         <p:nvSpPr>
-          <p:cNvPr id="20" name="Subtitle 2">
-            <a:extLst/>
-          </p:cNvPr>
+          <p:cNvPr id="20" name="Subtitle 2"/>
           <p:cNvSpPr>
             <a:spLocks noGrp="1"/>
           </p:cNvSpPr>
@@ -15101,7 +16821,6 @@
           <a:ln>
             <a:noFill/>
           </a:ln>
-          <a:extLst/>
         </p:spPr>
         <p:txBody>
           <a:bodyPr lIns="0" tIns="0" rIns="0" bIns="0"/>
@@ -15257,7 +16976,6 @@
           <a:ln>
             <a:noFill/>
           </a:ln>
-          <a:extLst/>
         </p:spPr>
         <p:txBody>
           <a:bodyPr lIns="0" tIns="0" rIns="0" bIns="0">
@@ -15388,7 +17106,7 @@
                   <a:schemeClr val="bg1"/>
                 </a:solidFill>
               </a:rPr>
-              <a:t>© 2017 Arm Limited </a:t>
+              <a:t>© 2025 Arm Limited </a:t>
             </a:r>
           </a:p>
         </p:txBody>
@@ -15455,9 +17173,7 @@
       </p:pic>
       <p:sp>
         <p:nvSpPr>
-          <p:cNvPr id="19" name="Title 1">
-            <a:extLst/>
-          </p:cNvPr>
+          <p:cNvPr id="19" name="Title 1"/>
           <p:cNvSpPr>
             <a:spLocks noGrp="1"/>
           </p:cNvSpPr>
@@ -15496,9 +17212,7 @@
       </p:sp>
       <p:sp>
         <p:nvSpPr>
-          <p:cNvPr id="20" name="Subtitle 2">
-            <a:extLst/>
-          </p:cNvPr>
+          <p:cNvPr id="20" name="Subtitle 2"/>
           <p:cNvSpPr>
             <a:spLocks noGrp="1"/>
           </p:cNvSpPr>
@@ -15601,9 +17315,7 @@
       </p:sp>
       <p:sp>
         <p:nvSpPr>
-          <p:cNvPr id="21" name="Text Placeholder 28">
-            <a:extLst/>
-          </p:cNvPr>
+          <p:cNvPr id="21" name="Text Placeholder 28"/>
           <p:cNvSpPr>
             <a:spLocks noGrp="1"/>
           </p:cNvSpPr>
@@ -15642,9 +17354,7 @@
       </p:sp>
       <p:sp>
         <p:nvSpPr>
-          <p:cNvPr id="22" name="Text Placeholder 28">
-            <a:extLst/>
-          </p:cNvPr>
+          <p:cNvPr id="22" name="Text Placeholder 28"/>
           <p:cNvSpPr>
             <a:spLocks noGrp="1"/>
           </p:cNvSpPr>
@@ -16027,7 +17737,6 @@
           <a:ln>
             <a:noFill/>
           </a:ln>
-          <a:extLst/>
         </p:spPr>
         <p:txBody>
           <a:bodyPr lIns="0" tIns="0" rIns="0" bIns="0">
@@ -16514,7 +18223,6 @@
           <a:ln>
             <a:noFill/>
           </a:ln>
-          <a:extLst/>
         </p:spPr>
         <p:txBody>
           <a:bodyPr lIns="0" tIns="0" rIns="0" bIns="0">
@@ -16999,7 +18707,6 @@
           <a:ln>
             <a:noFill/>
           </a:ln>
-          <a:extLst/>
         </p:spPr>
         <p:txBody>
           <a:bodyPr lIns="0" tIns="0" rIns="0" bIns="0">
@@ -17420,7 +19127,6 @@
           <a:ln>
             <a:noFill/>
           </a:ln>
-          <a:extLst/>
         </p:spPr>
         <p:txBody>
           <a:bodyPr lIns="0" tIns="0" rIns="0" bIns="0">
@@ -17871,9 +19577,7 @@
       </p:grpSpPr>
       <p:sp>
         <p:nvSpPr>
-          <p:cNvPr id="2" name="Title 1">
-            <a:extLst/>
-          </p:cNvPr>
+          <p:cNvPr id="2" name="Title 1"/>
           <p:cNvSpPr>
             <a:spLocks noGrp="1"/>
           </p:cNvSpPr>
@@ -17895,9 +19599,7 @@
       </p:sp>
       <p:sp>
         <p:nvSpPr>
-          <p:cNvPr id="4" name="Text Placeholder 2">
-            <a:extLst/>
-          </p:cNvPr>
+          <p:cNvPr id="4" name="Text Placeholder 2"/>
           <p:cNvSpPr>
             <a:spLocks noGrp="1"/>
           </p:cNvSpPr>
@@ -18214,7 +19916,6 @@
           <a:ln>
             <a:noFill/>
           </a:ln>
-          <a:extLst/>
         </p:spPr>
         <p:txBody>
           <a:bodyPr lIns="0" tIns="0" rIns="0" bIns="0">
@@ -18345,7 +20046,7 @@
                   <a:srgbClr val="7F7F7F"/>
                 </a:solidFill>
               </a:rPr>
-              <a:t>© 2017 Arm Limited </a:t>
+              <a:t>© 2025 Arm Limited </a:t>
             </a:r>
           </a:p>
         </p:txBody>
@@ -18376,7 +20077,6 @@
           <a:ln>
             <a:noFill/>
           </a:ln>
-          <a:extLst/>
         </p:spPr>
         <p:txBody>
           <a:bodyPr lIns="0" tIns="0" rIns="0" bIns="0">
@@ -19197,8 +20897,10 @@
               </a:spcBef>
             </a:pPr>
             <a:r>
-              <a:rPr lang="en-US" dirty="0"/>
-              <a:t>Linux-based Embedded System Component Stack</a:t>
+              <a:rPr lang="en-US" dirty="0">
+                <a:ea typeface="ＭＳ Ｐゴシック"/>
+              </a:rPr>
+              <a:t>Linux-Based Embedded System Component Stack</a:t>
             </a:r>
           </a:p>
           <a:p>
@@ -19322,15 +21024,21 @@
           </a:p>
           <a:p>
             <a:r>
-              <a:rPr lang="en-US" dirty="0"/>
-              <a:t>Device tree</a:t>
-            </a:r>
-          </a:p>
-          <a:p>
-            <a:r>
-              <a:rPr lang="en-US" dirty="0"/>
-              <a:t>System programs</a:t>
-            </a:r>
+              <a:rPr lang="en-US" dirty="0">
+                <a:ea typeface="ＭＳ Ｐゴシック"/>
+              </a:rPr>
+              <a:t>Device Tree</a:t>
+            </a:r>
+            <a:endParaRPr lang="en-US"/>
+          </a:p>
+          <a:p>
+            <a:r>
+              <a:rPr lang="en-US">
+                <a:ea typeface="ＭＳ Ｐゴシック"/>
+              </a:rPr>
+              <a:t>System Programs</a:t>
+            </a:r>
+            <a:endParaRPr lang="en-US"/>
           </a:p>
           <a:p>
             <a:r>
@@ -19340,8 +21048,10 @@
           </a:p>
           <a:p>
             <a:r>
-              <a:rPr lang="en-US" dirty="0"/>
-              <a:t>Root filesystem</a:t>
+              <a:rPr lang="en-US" dirty="0">
+                <a:ea typeface="ＭＳ Ｐゴシック"/>
+              </a:rPr>
+              <a:t>Root Filesystem</a:t>
             </a:r>
             <a:endParaRPr lang="en-US" altLang="en-US" dirty="0">
               <a:ea typeface="ＭＳ Ｐゴシック" panose="020B0600070205080204" pitchFamily="34" charset="-128"/>
@@ -19789,50 +21499,49 @@
             </a:endParaRPr>
           </a:p>
           <a:p>
-            <a:pPr lvl="1"/>
+            <a:pPr marL="398145" lvl="1" indent="-166370"/>
             <a:r>
               <a:rPr lang="en-US" dirty="0"/>
-              <a:t>All the </a:t>
-            </a:r>
-            <a:r>
-              <a:rPr lang="en-US" dirty="0" err="1"/>
-              <a:t>sw</a:t>
-            </a:r>
+              <a:t>All the software (bootloader + device tree + operating system + root filesystem) is stored in persistent storage (boot flash) embedded in the microcontroller.</a:t>
+            </a:r>
+            <a:endParaRPr lang="en-US" dirty="0">
+              <a:cs typeface="Calibri"/>
+            </a:endParaRPr>
+          </a:p>
+          <a:p>
+            <a:pPr marL="398145" lvl="1" indent="-166370"/>
             <a:r>
               <a:rPr lang="en-US" dirty="0"/>
-              <a:t> (bootloader + device tree + operating system + root filesystem) is stored in persistent storage (boot flash) embedded in the microcontroller.</a:t>
-            </a:r>
-          </a:p>
-          <a:p>
-            <a:pPr lvl="1"/>
-            <a:r>
-              <a:rPr lang="en-US" dirty="0"/>
-              <a:t>All the </a:t>
-            </a:r>
-            <a:r>
-              <a:rPr lang="en-US" dirty="0" err="1"/>
-              <a:t>sw</a:t>
-            </a:r>
-            <a:r>
-              <a:rPr lang="en-US" dirty="0"/>
-              <a:t> is executed from the persistent storage.</a:t>
-            </a:r>
-          </a:p>
-          <a:p>
-            <a:pPr lvl="1"/>
-            <a:r>
-              <a:rPr lang="en-US" dirty="0"/>
+              <a:t>All the software is executed from the persistent storage.</a:t>
+            </a:r>
+            <a:endParaRPr lang="en-US" dirty="0">
+              <a:cs typeface="Calibri"/>
+            </a:endParaRPr>
+          </a:p>
+          <a:p>
+            <a:pPr marL="398145" lvl="1" indent="-166370"/>
+            <a:r>
+              <a:rPr lang="en-US" dirty="0">
+                <a:ea typeface="ＭＳ Ｐゴシック"/>
+              </a:rPr>
               <a:t>The CPU reset vector is located in the boot flash.</a:t>
             </a:r>
-          </a:p>
-          <a:p>
-            <a:pPr lvl="1"/>
-            <a:r>
-              <a:rPr lang="en-US" dirty="0"/>
-              <a:t>The RAM Memory is embedded in the microcontroller and is used for data, stack and heap only.</a:t>
+            <a:endParaRPr lang="en-US" dirty="0">
+              <a:ea typeface="ＭＳ Ｐゴシック"/>
+              <a:cs typeface="Calibri"/>
+            </a:endParaRPr>
+          </a:p>
+          <a:p>
+            <a:pPr marL="398145" lvl="1" indent="-166370"/>
+            <a:r>
+              <a:rPr lang="en-US" dirty="0">
+                <a:ea typeface="ＭＳ Ｐゴシック"/>
+              </a:rPr>
+              <a:t>The RAM is embedded in the microcontroller and is used for data, stack and heap only.</a:t>
             </a:r>
             <a:endParaRPr lang="en-US" altLang="en-US" dirty="0">
-              <a:ea typeface="ＭＳ Ｐゴシック" panose="020B0600070205080204" pitchFamily="34" charset="-128"/>
+              <a:ea typeface="ＭＳ Ｐゴシック"/>
+              <a:cs typeface="Calibri"/>
             </a:endParaRPr>
           </a:p>
         </p:txBody>
@@ -20181,7 +21890,7 @@
             <a:effectLst/>
           </p:spPr>
           <p:txBody>
-            <a:bodyPr wrap="square" rtlCol="0">
+            <a:bodyPr wrap="square" lIns="91440" tIns="45720" rIns="91440" bIns="45720" rtlCol="0" anchor="t">
               <a:noAutofit/>
             </a:bodyPr>
             <a:lstStyle/>
@@ -20208,19 +21917,11 @@
                   <a:solidFill>
                     <a:schemeClr val="bg1"/>
                   </a:solidFill>
+                  <a:latin typeface="Calibri"/>
+                  <a:ea typeface="ＭＳ Ｐゴシック"/>
+                  <a:cs typeface="Calibri"/>
                 </a:rPr>
                 <a:t>RAM</a:t>
-              </a:r>
-            </a:p>
-            <a:p>
-              <a:pPr algn="ctr"/>
-              <a:r>
-                <a:rPr lang="en-US" dirty="0">
-                  <a:solidFill>
-                    <a:schemeClr val="bg1"/>
-                  </a:solidFill>
-                </a:rPr>
-                <a:t>Memory</a:t>
               </a:r>
             </a:p>
             <a:p>
@@ -20939,42 +22640,67 @@
             </a:endParaRPr>
           </a:p>
           <a:p>
-            <a:pPr lvl="1"/>
-            <a:r>
-              <a:rPr lang="en-US" dirty="0"/>
+            <a:pPr marL="398145" lvl="1" indent="-166370"/>
+            <a:r>
+              <a:rPr lang="en-US" dirty="0">
+                <a:ea typeface="ＭＳ Ｐゴシック"/>
+              </a:rPr>
               <a:t>The bootloader is stored into the boot flash.</a:t>
             </a:r>
-          </a:p>
-          <a:p>
-            <a:pPr lvl="1"/>
-            <a:r>
-              <a:rPr lang="en-US" dirty="0"/>
+            <a:endParaRPr lang="en-US" dirty="0">
+              <a:ea typeface="ＭＳ Ｐゴシック"/>
+              <a:cs typeface="Calibri"/>
+            </a:endParaRPr>
+          </a:p>
+          <a:p>
+            <a:pPr marL="398145" lvl="1" indent="-166370"/>
+            <a:r>
+              <a:rPr lang="en-US" dirty="0">
+                <a:ea typeface="ＭＳ Ｐゴシック"/>
+              </a:rPr>
               <a:t>The CPU reset vector is located in the boot flash.</a:t>
             </a:r>
-          </a:p>
-          <a:p>
-            <a:pPr lvl="1"/>
-            <a:r>
-              <a:rPr lang="en-US" dirty="0"/>
-              <a:t>The root filesystem, operating systems, and device tree are stored in the mass memory flash and loaded in RAM memory by the bootloader.</a:t>
-            </a:r>
-          </a:p>
-          <a:p>
-            <a:pPr lvl="1"/>
-            <a:r>
-              <a:rPr lang="en-US" dirty="0"/>
-              <a:t>The RAM memory is external to the </a:t>
-            </a:r>
-            <a:r>
-              <a:rPr lang="en-US" dirty="0" err="1"/>
+            <a:endParaRPr lang="en-US" dirty="0">
+              <a:ea typeface="ＭＳ Ｐゴシック"/>
+              <a:cs typeface="Calibri"/>
+            </a:endParaRPr>
+          </a:p>
+          <a:p>
+            <a:pPr marL="398145" lvl="1" indent="-166370"/>
+            <a:r>
+              <a:rPr lang="en-US" dirty="0">
+                <a:ea typeface="ＭＳ Ｐゴシック"/>
+              </a:rPr>
+              <a:t>The root filesystem, operating system, and device tree are stored in the mass memory flash and loaded in RAM by the bootloader.</a:t>
+            </a:r>
+            <a:endParaRPr lang="en-US" dirty="0">
+              <a:ea typeface="ＭＳ Ｐゴシック"/>
+              <a:cs typeface="Calibri"/>
+            </a:endParaRPr>
+          </a:p>
+          <a:p>
+            <a:pPr marL="398145" lvl="1" indent="-166370"/>
+            <a:r>
+              <a:rPr lang="en-US" dirty="0">
+                <a:ea typeface="ＭＳ Ｐゴシック"/>
+              </a:rPr>
+              <a:t>The RAM is external to the </a:t>
+            </a:r>
+            <a:r>
+              <a:rPr lang="en-US" dirty="0" err="1">
+                <a:ea typeface="ＭＳ Ｐゴシック"/>
+              </a:rPr>
               <a:t>SoC.</a:t>
             </a:r>
             <a:r>
-              <a:rPr lang="en-US" dirty="0"/>
+              <a:rPr lang="en-US" dirty="0">
+                <a:ea typeface="ＭＳ Ｐゴシック"/>
+              </a:rPr>
               <a:t>  It will store the operating system + application software, root filesystem (if configured as RAM disk), data, stack, and heap.</a:t>
             </a:r>
             <a:endParaRPr lang="en-US" altLang="en-US" dirty="0">
-              <a:ea typeface="ＭＳ Ｐゴシック" panose="020B0600070205080204" pitchFamily="34" charset="-128"/>
+              <a:ea typeface="ＭＳ Ｐゴシック"/>
+              <a:cs typeface="Calibri"/>
             </a:endParaRPr>
           </a:p>
         </p:txBody>
@@ -21404,7 +23130,7 @@
             <a:effectLst/>
           </p:spPr>
           <p:txBody>
-            <a:bodyPr wrap="square" rtlCol="0">
+            <a:bodyPr wrap="square" lIns="91440" tIns="45720" rIns="91440" bIns="45720" rtlCol="0" anchor="t">
               <a:noAutofit/>
             </a:bodyPr>
             <a:lstStyle/>
@@ -21431,19 +23157,11 @@
                   <a:solidFill>
                     <a:schemeClr val="bg1"/>
                   </a:solidFill>
+                  <a:latin typeface="Calibri"/>
+                  <a:ea typeface="ＭＳ Ｐゴシック"/>
+                  <a:cs typeface="Calibri"/>
                 </a:rPr>
                 <a:t>RAM</a:t>
-              </a:r>
-            </a:p>
-            <a:p>
-              <a:pPr algn="ctr"/>
-              <a:r>
-                <a:rPr lang="en-US" dirty="0">
-                  <a:solidFill>
-                    <a:schemeClr val="bg1"/>
-                  </a:solidFill>
-                </a:rPr>
-                <a:t>Memory</a:t>
               </a:r>
             </a:p>
             <a:p>
@@ -22103,97 +23821,90 @@
             </a:endParaRPr>
           </a:p>
           <a:p>
-            <a:pPr lvl="1"/>
-            <a:r>
-              <a:rPr lang="en-US" dirty="0"/>
-              <a:t>RAM memory 512 </a:t>
-            </a:r>
-            <a:r>
-              <a:rPr lang="en-US" dirty="0" err="1"/>
+            <a:pPr marL="398145" lvl="1" indent="-166370"/>
+            <a:r>
+              <a:rPr lang="en-US" dirty="0">
+                <a:ea typeface="ＭＳ Ｐゴシック"/>
+              </a:rPr>
+              <a:t>RAM 512 </a:t>
+            </a:r>
+            <a:r>
+              <a:rPr lang="en-US" dirty="0" err="1">
+                <a:ea typeface="ＭＳ Ｐゴシック"/>
+              </a:rPr>
               <a:t>kbytes</a:t>
             </a:r>
             <a:r>
-              <a:rPr lang="en-US" dirty="0"/>
+              <a:rPr lang="en-US" dirty="0">
+                <a:ea typeface="ＭＳ Ｐゴシック"/>
+              </a:rPr>
               <a:t> (arranged as 128 </a:t>
             </a:r>
             <a:r>
-              <a:rPr lang="en-US" dirty="0" err="1"/>
+              <a:rPr lang="en-US" dirty="0" err="1">
+                <a:ea typeface="ＭＳ Ｐゴシック"/>
+              </a:rPr>
               <a:t>kwords</a:t>
             </a:r>
             <a:r>
-              <a:rPr lang="en-US" dirty="0"/>
-              <a:t>, each 32 bytes long), from </a:t>
-            </a:r>
-            <a:r>
-              <a:rPr lang="en-US" dirty="0" err="1"/>
-              <a:t>0x0002_0000</a:t>
-            </a:r>
-            <a:r>
-              <a:rPr lang="en-US" dirty="0"/>
-              <a:t> to </a:t>
-            </a:r>
-            <a:r>
-              <a:rPr lang="en-US" dirty="0" err="1"/>
-              <a:t>0x0003_FFFF</a:t>
-            </a:r>
-            <a:endParaRPr lang="en-US" dirty="0"/>
-          </a:p>
-          <a:p>
-            <a:pPr lvl="1"/>
-            <a:r>
-              <a:rPr lang="en-US" dirty="0"/>
+              <a:rPr lang="en-US" dirty="0">
+                <a:ea typeface="ＭＳ Ｐゴシック"/>
+              </a:rPr>
+              <a:t>, each 32 bits long), from 0x0002_0000 to 0x0003_FFFF</a:t>
+            </a:r>
+            <a:endParaRPr lang="en-US" dirty="0">
+              <a:ea typeface="ＭＳ Ｐゴシック"/>
+              <a:cs typeface="Calibri"/>
+            </a:endParaRPr>
+          </a:p>
+          <a:p>
+            <a:pPr marL="398145" lvl="1" indent="-166370"/>
+            <a:r>
+              <a:rPr lang="en-US" dirty="0">
+                <a:ea typeface="ＭＳ Ｐゴシック"/>
+              </a:rPr>
               <a:t>Mass memory flash 256 </a:t>
             </a:r>
             <a:r>
-              <a:rPr lang="en-US" dirty="0" err="1"/>
+              <a:rPr lang="en-US" dirty="0" err="1">
+                <a:ea typeface="ＭＳ Ｐゴシック"/>
+              </a:rPr>
               <a:t>kbytes</a:t>
             </a:r>
             <a:r>
-              <a:rPr lang="en-US" dirty="0"/>
-              <a:t> (same organization as before), from </a:t>
-            </a:r>
-            <a:r>
-              <a:rPr lang="en-US" dirty="0" err="1"/>
-              <a:t>0x0001_0000</a:t>
-            </a:r>
-            <a:r>
-              <a:rPr lang="en-US" dirty="0"/>
-              <a:t> to </a:t>
-            </a:r>
-            <a:r>
-              <a:rPr lang="en-US" dirty="0" err="1"/>
-              <a:t>0x0001_FFFF</a:t>
-            </a:r>
-            <a:endParaRPr lang="en-US" dirty="0"/>
-          </a:p>
-          <a:p>
-            <a:pPr lvl="1"/>
-            <a:r>
-              <a:rPr lang="en-US" dirty="0"/>
+              <a:rPr lang="en-US" dirty="0">
+                <a:ea typeface="ＭＳ Ｐゴシック"/>
+              </a:rPr>
+              <a:t> (same organization as before), from 0x0001_0000 to 0x0001_FFFF</a:t>
+            </a:r>
+            <a:endParaRPr lang="en-US" dirty="0">
+              <a:ea typeface="ＭＳ Ｐゴシック"/>
+              <a:cs typeface="Calibri"/>
+            </a:endParaRPr>
+          </a:p>
+          <a:p>
+            <a:pPr marL="398145" lvl="1" indent="-166370"/>
+            <a:r>
+              <a:rPr lang="en-US" dirty="0">
+                <a:ea typeface="ＭＳ Ｐゴシック"/>
+              </a:rPr>
               <a:t>Boot flash 256 </a:t>
             </a:r>
             <a:r>
-              <a:rPr lang="en-US" dirty="0" err="1"/>
+              <a:rPr lang="en-US" dirty="0" err="1">
+                <a:ea typeface="ＭＳ Ｐゴシック"/>
+              </a:rPr>
               <a:t>kbytes</a:t>
             </a:r>
             <a:r>
-              <a:rPr lang="en-US" dirty="0"/>
-              <a:t> (same organization as before), from </a:t>
-            </a:r>
-            <a:r>
-              <a:rPr lang="en-US" dirty="0" err="1"/>
-              <a:t>0x000_0000</a:t>
-            </a:r>
-            <a:r>
-              <a:rPr lang="en-US" dirty="0"/>
-              <a:t> to </a:t>
-            </a:r>
-            <a:r>
-              <a:rPr lang="en-US" dirty="0" err="1"/>
-              <a:t>0x0000_FFFF</a:t>
+              <a:rPr lang="en-US" dirty="0">
+                <a:ea typeface="ＭＳ Ｐゴシック"/>
+              </a:rPr>
+              <a:t> (same organization as before), from 0x000_0000 to 0x0000_FFFF</a:t>
             </a:r>
             <a:endParaRPr lang="en-US" altLang="en-US" dirty="0">
-              <a:ea typeface="ＭＳ Ｐゴシック" panose="020B0600070205080204" pitchFamily="34" charset="-128"/>
+              <a:ea typeface="ＭＳ Ｐゴシック"/>
+              <a:cs typeface="Calibri"/>
             </a:endParaRPr>
           </a:p>
         </p:txBody>
@@ -22371,7 +24082,7 @@
             <a:effectLst/>
           </p:spPr>
           <p:txBody>
-            <a:bodyPr wrap="square" rtlCol="0" anchor="t">
+            <a:bodyPr wrap="square" lIns="91440" tIns="45720" rIns="91440" bIns="45720" rtlCol="0" anchor="t">
               <a:noAutofit/>
             </a:bodyPr>
             <a:lstStyle/>
@@ -22382,27 +24093,20 @@
                   <a:solidFill>
                     <a:schemeClr val="bg1"/>
                   </a:solidFill>
+                  <a:latin typeface="Calibri"/>
+                  <a:ea typeface="ＭＳ Ｐゴシック"/>
+                  <a:cs typeface="Calibri"/>
                 </a:rPr>
                 <a:t>RAM</a:t>
               </a:r>
             </a:p>
             <a:p>
               <a:pPr algn="ctr"/>
-              <a:r>
-                <a:rPr lang="en-US" sz="2000" dirty="0">
-                  <a:solidFill>
-                    <a:schemeClr val="bg1"/>
-                  </a:solidFill>
-                </a:rPr>
-                <a:t>Memory</a:t>
-              </a:r>
-            </a:p>
-            <a:p>
-              <a:pPr algn="ctr"/>
               <a:endParaRPr lang="en-US" sz="2000" dirty="0">
                 <a:solidFill>
                   <a:schemeClr val="bg1"/>
                 </a:solidFill>
+                <a:cs typeface="Calibri" panose="020F0502020204030204" pitchFamily="34" charset="0"/>
               </a:endParaRPr>
             </a:p>
           </p:txBody>
@@ -22937,7 +24641,7 @@
             <a:effectLst/>
           </p:spPr>
           <p:txBody>
-            <a:bodyPr wrap="square" rtlCol="0" anchor="t">
+            <a:bodyPr wrap="square" lIns="91440" tIns="45720" rIns="91440" bIns="45720" rtlCol="0" anchor="t">
               <a:noAutofit/>
             </a:bodyPr>
             <a:lstStyle/>
@@ -22948,27 +24652,20 @@
                   <a:solidFill>
                     <a:schemeClr val="bg1"/>
                   </a:solidFill>
+                  <a:latin typeface="Calibri"/>
+                  <a:ea typeface="ＭＳ Ｐゴシック"/>
+                  <a:cs typeface="Calibri"/>
                 </a:rPr>
                 <a:t>RAM</a:t>
               </a:r>
             </a:p>
             <a:p>
               <a:pPr algn="ctr"/>
-              <a:r>
-                <a:rPr lang="en-US" sz="2000" dirty="0">
-                  <a:solidFill>
-                    <a:schemeClr val="bg1"/>
-                  </a:solidFill>
-                </a:rPr>
-                <a:t>Memory</a:t>
-              </a:r>
-            </a:p>
-            <a:p>
-              <a:pPr algn="ctr"/>
               <a:endParaRPr lang="en-US" sz="2000" dirty="0">
                 <a:solidFill>
                   <a:schemeClr val="bg1"/>
                 </a:solidFill>
+                <a:cs typeface="Calibri" panose="020F0502020204030204" pitchFamily="34" charset="0"/>
               </a:endParaRPr>
             </a:p>
           </p:txBody>
@@ -23637,7 +25334,15 @@
             <a:pPr lvl="1"/>
             <a:r>
               <a:rPr lang="en-US" dirty="0"/>
-              <a:t>It runs the bootloader software from booth flash memory.</a:t>
+              <a:t>It runs the bootloader software </a:t>
+            </a:r>
+            <a:r>
+              <a:rPr lang="en-US"/>
+              <a:t>from boot </a:t>
+            </a:r>
+            <a:r>
+              <a:rPr lang="en-US" dirty="0"/>
+              <a:t>flash memory.</a:t>
             </a:r>
             <a:endParaRPr lang="en-US" altLang="en-US" dirty="0">
               <a:ea typeface="ＭＳ Ｐゴシック" panose="020B0600070205080204" pitchFamily="34" charset="-128"/>
@@ -23818,7 +25523,7 @@
             <a:effectLst/>
           </p:spPr>
           <p:txBody>
-            <a:bodyPr wrap="square" rtlCol="0" anchor="t">
+            <a:bodyPr wrap="square" lIns="91440" tIns="45720" rIns="91440" bIns="45720" rtlCol="0" anchor="t">
               <a:noAutofit/>
             </a:bodyPr>
             <a:lstStyle/>
@@ -23829,19 +25534,11 @@
                   <a:solidFill>
                     <a:schemeClr val="bg1"/>
                   </a:solidFill>
+                  <a:latin typeface="Calibri"/>
+                  <a:ea typeface="ＭＳ Ｐゴシック"/>
+                  <a:cs typeface="Calibri"/>
                 </a:rPr>
                 <a:t>RAM</a:t>
-              </a:r>
-            </a:p>
-            <a:p>
-              <a:pPr algn="ctr"/>
-              <a:r>
-                <a:rPr lang="en-US" sz="2000" dirty="0">
-                  <a:solidFill>
-                    <a:schemeClr val="bg1"/>
-                  </a:solidFill>
-                </a:rPr>
-                <a:t>Memory</a:t>
               </a:r>
             </a:p>
             <a:p>
@@ -24496,27 +26193,42 @@
             </a:endParaRPr>
           </a:p>
           <a:p>
-            <a:pPr lvl="1"/>
-            <a:r>
-              <a:rPr lang="en-US" dirty="0"/>
-              <a:t>Initializes the CPU RAM memory controller</a:t>
-            </a:r>
-          </a:p>
-          <a:p>
-            <a:pPr lvl="1"/>
-            <a:r>
-              <a:rPr lang="en-US" dirty="0"/>
-              <a:t>Sets up the CPU registers for mapping stack and heap to RAM memory</a:t>
-            </a:r>
-          </a:p>
-          <a:p>
-            <a:pPr lvl="1"/>
-            <a:r>
-              <a:rPr lang="en-US" dirty="0"/>
-              <a:t>Copies device tree, operating system, system programs, and applications to RAM memory</a:t>
+            <a:pPr marL="398145" lvl="1" indent="-166370"/>
+            <a:r>
+              <a:rPr lang="en-US" dirty="0">
+                <a:ea typeface="ＭＳ Ｐゴシック"/>
+              </a:rPr>
+              <a:t>Initializes the CPU RAM controller</a:t>
+            </a:r>
+            <a:endParaRPr lang="en-US" dirty="0">
+              <a:ea typeface="ＭＳ Ｐゴシック"/>
+              <a:cs typeface="Calibri"/>
+            </a:endParaRPr>
+          </a:p>
+          <a:p>
+            <a:pPr marL="398145" lvl="1" indent="-166370"/>
+            <a:r>
+              <a:rPr lang="en-US" dirty="0">
+                <a:ea typeface="ＭＳ Ｐゴシック"/>
+              </a:rPr>
+              <a:t>Sets up the CPU registers for mapping stack and heap to RAM </a:t>
+            </a:r>
+            <a:endParaRPr lang="en-US" dirty="0">
+              <a:ea typeface="ＭＳ Ｐゴシック"/>
+              <a:cs typeface="Calibri"/>
+            </a:endParaRPr>
+          </a:p>
+          <a:p>
+            <a:pPr marL="398145" lvl="1" indent="-166370"/>
+            <a:r>
+              <a:rPr lang="en-US" dirty="0">
+                <a:ea typeface="ＭＳ Ｐゴシック"/>
+              </a:rPr>
+              <a:t>Copies device tree, operating system, system programs, and applications to RAM </a:t>
             </a:r>
             <a:endParaRPr lang="en-US" altLang="en-US" dirty="0">
-              <a:ea typeface="ＭＳ Ｐゴシック" panose="020B0600070205080204" pitchFamily="34" charset="-128"/>
+              <a:ea typeface="ＭＳ Ｐゴシック"/>
+              <a:cs typeface="Calibri"/>
             </a:endParaRPr>
           </a:p>
         </p:txBody>
@@ -24694,7 +26406,7 @@
             <a:effectLst/>
           </p:spPr>
           <p:txBody>
-            <a:bodyPr wrap="square" rtlCol="0" anchor="t">
+            <a:bodyPr wrap="square" lIns="91440" tIns="45720" rIns="91440" bIns="45720" rtlCol="0" anchor="t">
               <a:noAutofit/>
             </a:bodyPr>
             <a:lstStyle/>
@@ -24705,27 +26417,20 @@
                   <a:solidFill>
                     <a:schemeClr val="bg1"/>
                   </a:solidFill>
+                  <a:latin typeface="Calibri"/>
+                  <a:ea typeface="ＭＳ Ｐゴシック"/>
+                  <a:cs typeface="Calibri"/>
                 </a:rPr>
                 <a:t>RAM</a:t>
               </a:r>
             </a:p>
             <a:p>
               <a:pPr algn="ctr"/>
-              <a:r>
-                <a:rPr lang="en-US" sz="2000" dirty="0">
-                  <a:solidFill>
-                    <a:schemeClr val="bg1"/>
-                  </a:solidFill>
-                </a:rPr>
-                <a:t>Memory</a:t>
-              </a:r>
-            </a:p>
-            <a:p>
-              <a:pPr algn="ctr"/>
               <a:endParaRPr lang="en-US" sz="2000" dirty="0">
                 <a:solidFill>
                   <a:schemeClr val="bg1"/>
                 </a:solidFill>
+                <a:cs typeface="Calibri" panose="020F0502020204030204" pitchFamily="34" charset="0"/>
               </a:endParaRPr>
             </a:p>
           </p:txBody>
@@ -25381,7 +27086,7 @@
             <a:pPr lvl="1"/>
             <a:r>
               <a:rPr lang="en-US" dirty="0"/>
-              <a:t>Setting-up the execution environment for the application</a:t>
+              <a:t>Setting up the execution environment for the application</a:t>
             </a:r>
           </a:p>
           <a:p>
@@ -25569,7 +27274,7 @@
             <a:effectLst/>
           </p:spPr>
           <p:txBody>
-            <a:bodyPr wrap="square" rtlCol="0" anchor="t">
+            <a:bodyPr wrap="square" lIns="91440" tIns="45720" rIns="91440" bIns="45720" rtlCol="0" anchor="t">
               <a:noAutofit/>
             </a:bodyPr>
             <a:lstStyle/>
@@ -25586,14 +27291,12 @@
             </a:p>
             <a:p>
               <a:pPr algn="ctr"/>
-              <a:r>
-                <a:rPr lang="en-US" sz="2000" dirty="0">
-                  <a:solidFill>
-                    <a:schemeClr val="bg1"/>
-                  </a:solidFill>
-                </a:rPr>
-                <a:t>Memory</a:t>
-              </a:r>
+              <a:endParaRPr lang="en-US" sz="2000" dirty="0">
+                <a:solidFill>
+                  <a:schemeClr val="bg1"/>
+                </a:solidFill>
+                <a:cs typeface="Calibri"/>
+              </a:endParaRPr>
             </a:p>
             <a:p>
               <a:pPr algn="ctr"/>
@@ -26617,8 +28320,10 @@
           </a:p>
           <a:p>
             <a:r>
-              <a:rPr lang="en-US" dirty="0"/>
-              <a:t>Device tree</a:t>
+              <a:rPr lang="en-US" dirty="0">
+                <a:ea typeface="ＭＳ Ｐゴシック"/>
+              </a:rPr>
+              <a:t>Device Tree</a:t>
             </a:r>
             <a:endParaRPr lang="en-US" dirty="0">
               <a:solidFill>
@@ -26628,9 +28333,12 @@
           </a:p>
           <a:p>
             <a:r>
-              <a:rPr lang="en-US" dirty="0"/>
-              <a:t>System programs</a:t>
-            </a:r>
+              <a:rPr lang="en-US" dirty="0">
+                <a:ea typeface="ＭＳ Ｐゴシック"/>
+              </a:rPr>
+              <a:t>System Programs</a:t>
+            </a:r>
+            <a:endParaRPr lang="en-US"/>
           </a:p>
           <a:p>
             <a:r>
@@ -26640,8 +28348,10 @@
           </a:p>
           <a:p>
             <a:r>
-              <a:rPr lang="en-US" dirty="0"/>
-              <a:t>Root filesystem</a:t>
+              <a:rPr lang="en-US" dirty="0">
+                <a:ea typeface="ＭＳ Ｐゴシック"/>
+              </a:rPr>
+              <a:t>Root Filesystem</a:t>
             </a:r>
             <a:endParaRPr lang="en-US" altLang="en-US" dirty="0">
               <a:ea typeface="ＭＳ Ｐゴシック" panose="020B0600070205080204" pitchFamily="34" charset="-128"/>
@@ -27361,7 +29071,7 @@
                   <a:srgbClr val="128CAB"/>
                 </a:solidFill>
               </a:rPr>
-              <a:t>user space</a:t>
+              <a:t>User space</a:t>
             </a:r>
             <a:r>
               <a:rPr lang="en-US" dirty="0"/>
@@ -27395,8 +29105,16 @@
               <a:t>different </a:t>
             </a:r>
             <a:r>
+              <a:rPr lang="en-US" dirty="0">
+                <a:solidFill>
+                  <a:schemeClr val="tx1"/>
+                </a:solidFill>
+              </a:rPr>
+              <a:t>regions of the memory </a:t>
+            </a:r>
+            <a:r>
               <a:rPr lang="en-US" dirty="0"/>
-              <a:t>address spaces.</a:t>
+              <a:t>address space.</a:t>
             </a:r>
           </a:p>
           <a:p>
@@ -29146,11 +30864,14 @@
             </a:endParaRPr>
           </a:p>
           <a:p>
-            <a:pPr lvl="1"/>
+            <a:pPr marL="398145" lvl="1" indent="-166370"/>
             <a:r>
               <a:rPr lang="en-US" dirty="0"/>
               <a:t>Good separation between application/system programs and kernel. Bugs in the user space do not corrupt the kernel.</a:t>
             </a:r>
+            <a:endParaRPr lang="en-US" dirty="0">
+              <a:cs typeface="Calibri"/>
+            </a:endParaRPr>
           </a:p>
           <a:p>
             <a:r>
@@ -29162,19 +30883,29 @@
             </a:endParaRPr>
           </a:p>
           <a:p>
-            <a:pPr lvl="1"/>
-            <a:r>
-              <a:rPr lang="en-US" dirty="0"/>
-              <a:t>Bugs in one Kernel component (e.g. a new device driver) can crash the whole system.</a:t>
-            </a:r>
+            <a:pPr marL="398145" lvl="1" indent="-166370"/>
+            <a:r>
+              <a:rPr lang="en-US" dirty="0">
+                <a:ea typeface="ＭＳ Ｐゴシック"/>
+              </a:rPr>
+              <a:t>Bugs in one kernel component (for example, a new device driver) can crash the whole system, generally with a </a:t>
+            </a:r>
+            <a:r>
+              <a:rPr lang="en-US" i="1" dirty="0">
+                <a:ea typeface="ＭＳ Ｐゴシック"/>
+              </a:rPr>
+              <a:t>kernel panic</a:t>
+            </a:r>
+            <a:endParaRPr lang="en-US" altLang="en-US" dirty="0">
+              <a:ea typeface="ＭＳ Ｐゴシック"/>
+              <a:cs typeface="Calibri"/>
+            </a:endParaRPr>
+          </a:p>
+          <a:p>
+            <a:pPr marL="398145" lvl="1" indent="-166370"/>
             <a:endParaRPr lang="en-US" altLang="en-US" dirty="0">
               <a:ea typeface="ＭＳ Ｐゴシック" panose="020B0600070205080204" pitchFamily="34" charset="-128"/>
-            </a:endParaRPr>
-          </a:p>
-          <a:p>
-            <a:pPr lvl="1"/>
-            <a:endParaRPr lang="en-US" altLang="en-US" dirty="0">
-              <a:ea typeface="ＭＳ Ｐゴシック" panose="020B0600070205080204" pitchFamily="34" charset="-128"/>
+              <a:cs typeface="Calibri"/>
             </a:endParaRPr>
           </a:p>
         </p:txBody>
@@ -29787,16 +31518,20 @@
                 <a:solidFill>
                   <a:srgbClr val="128CAB"/>
                 </a:solidFill>
-              </a:rPr>
-              <a:t>Device tree</a:t>
+                <a:ea typeface="ＭＳ Ｐゴシック"/>
+              </a:rPr>
+              <a:t>Device Tree</a:t>
             </a:r>
             <a:endParaRPr lang="en-US" dirty="0"/>
           </a:p>
           <a:p>
             <a:r>
-              <a:rPr lang="en-US" dirty="0"/>
-              <a:t>System programs</a:t>
-            </a:r>
+              <a:rPr lang="en-US">
+                <a:ea typeface="ＭＳ Ｐゴシック"/>
+              </a:rPr>
+              <a:t>System Programs</a:t>
+            </a:r>
+            <a:endParaRPr lang="en-US"/>
           </a:p>
           <a:p>
             <a:r>
@@ -29806,8 +31541,10 @@
           </a:p>
           <a:p>
             <a:r>
-              <a:rPr lang="en-US" dirty="0"/>
-              <a:t>Root filesystem</a:t>
+              <a:rPr lang="en-US" dirty="0">
+                <a:ea typeface="ＭＳ Ｐゴシック"/>
+              </a:rPr>
+              <a:t>Root Filesystem</a:t>
             </a:r>
             <a:endParaRPr lang="en-US" altLang="en-US" dirty="0">
               <a:ea typeface="ＭＳ Ｐゴシック" panose="020B0600070205080204" pitchFamily="34" charset="-128"/>
@@ -29907,30 +31644,29 @@
           <a:lstStyle/>
           <a:p>
             <a:r>
-              <a:rPr lang="en-US" dirty="0"/>
-              <a:t>To manage hardware resources, the Kernel must know which resources are available in the embedded system (i.e. the </a:t>
-            </a:r>
-            <a:r>
               <a:rPr lang="en-US" dirty="0">
+                <a:ea typeface="ＭＳ Ｐゴシック"/>
+              </a:rPr>
+              <a:t>To manage hardware resources, the Kernel must know which resources are available in the embedded system (i.e., the </a:t>
+            </a:r>
+            <a:r>
+              <a:rPr lang="en-US" dirty="0">
                 <a:solidFill>
                   <a:srgbClr val="128CAB"/>
                 </a:solidFill>
+                <a:ea typeface="ＭＳ Ｐゴシック"/>
               </a:rPr>
               <a:t>hardware description</a:t>
             </a:r>
             <a:r>
-              <a:rPr lang="en-US" dirty="0"/>
-              <a:t>: I/O devices, memory, </a:t>
-            </a:r>
-            <a:r>
-              <a:rPr lang="en-US" dirty="0" err="1"/>
-              <a:t>etc</a:t>
-            </a:r>
-            <a:r>
-              <a:rPr lang="en-US" dirty="0"/>
-              <a:t>).</a:t>
-            </a:r>
-            <a:endParaRPr lang="is-IS" dirty="0"/>
+              <a:rPr lang="en-US" dirty="0">
+                <a:ea typeface="ＭＳ Ｐゴシック"/>
+              </a:rPr>
+              <a:t>: I/O devices, memory, etc.).</a:t>
+            </a:r>
+            <a:endParaRPr lang="is-IS" dirty="0">
+              <a:ea typeface="ＭＳ Ｐゴシック"/>
+            </a:endParaRPr>
           </a:p>
           <a:p>
             <a:r>
@@ -29942,7 +31678,7 @@
             </a:endParaRPr>
           </a:p>
           <a:p>
-            <a:pPr lvl="1"/>
+            <a:pPr marL="398145" lvl="1" indent="-166370"/>
             <a:r>
               <a:rPr lang="en-US" dirty="0">
                 <a:solidFill>
@@ -29955,9 +31691,12 @@
               <a:rPr lang="en-US" dirty="0"/>
               <a:t>it into the Kernel binary code. Each modification to the hardware definition requires recompiling the source code.</a:t>
             </a:r>
-          </a:p>
-          <a:p>
-            <a:pPr lvl="1"/>
+            <a:endParaRPr lang="en-US" dirty="0">
+              <a:cs typeface="Calibri"/>
+            </a:endParaRPr>
+          </a:p>
+          <a:p>
+            <a:pPr marL="398145" lvl="1" indent="-166370"/>
             <a:r>
               <a:rPr lang="en-US" dirty="0"/>
               <a:t>Provide it to the Kernel when the bootloader uses a binary file, the </a:t>
@@ -29972,52 +31711,55 @@
             </a:r>
             <a:endParaRPr lang="en-US" altLang="en-US" dirty="0">
               <a:ea typeface="ＭＳ Ｐゴシック" panose="020B0600070205080204" pitchFamily="34" charset="-128"/>
+              <a:cs typeface="Calibri"/>
             </a:endParaRPr>
           </a:p>
           <a:p>
             <a:r>
+              <a:rPr lang="en-US" dirty="0">
+                <a:ea typeface="ＭＳ Ｐゴシック"/>
+              </a:rPr>
+              <a:t>A device tree blob (DTB) file is produced from a device tree source (DTS).</a:t>
+            </a:r>
+            <a:endParaRPr lang="en-US" altLang="en-US" dirty="0">
+              <a:ea typeface="ＭＳ Ｐゴシック"/>
+            </a:endParaRPr>
+          </a:p>
+          <a:p>
+            <a:pPr marL="398145" lvl="1" indent="-166370"/>
+            <a:r>
               <a:rPr lang="en-US" dirty="0"/>
-              <a:t>A device tree blob (</a:t>
-            </a:r>
-            <a:r>
-              <a:rPr lang="en-US" dirty="0" err="1"/>
-              <a:t>DTB</a:t>
-            </a:r>
-            <a:r>
-              <a:rPr lang="en-US" dirty="0"/>
-              <a:t>) file is produced from a device tree source (DTS).</a:t>
-            </a:r>
+              <a:t>A hardware definition can be changed more easily as only DTS recompilation is needed.</a:t>
+            </a:r>
+            <a:endParaRPr lang="en-US" dirty="0">
+              <a:cs typeface="Calibri"/>
+            </a:endParaRPr>
+          </a:p>
+          <a:p>
+            <a:pPr marL="398145" lvl="1" indent="-166370"/>
+            <a:r>
+              <a:rPr lang="en-US" dirty="0">
+                <a:ea typeface="ＭＳ Ｐゴシック"/>
+              </a:rPr>
+              <a:t>Kernel recompilation is not needed upon changes to the hardware definition. This is a </a:t>
+            </a:r>
+            <a:r>
+              <a:rPr lang="en-US" dirty="0">
+                <a:ea typeface="ＭＳ Ｐゴシック"/>
+                <a:sym typeface="Wingdings"/>
+              </a:rPr>
+              <a:t>big time saver.</a:t>
+            </a:r>
+            <a:endParaRPr lang="en-US" altLang="en-US" dirty="0">
+              <a:ea typeface="ＭＳ Ｐゴシック"/>
+              <a:cs typeface="Calibri"/>
+            </a:endParaRPr>
+          </a:p>
+          <a:p>
+            <a:pPr marL="855345" lvl="2" indent="-166370"/>
             <a:endParaRPr lang="en-US" altLang="en-US" dirty="0">
               <a:ea typeface="ＭＳ Ｐゴシック" panose="020B0600070205080204" pitchFamily="34" charset="-128"/>
-            </a:endParaRPr>
-          </a:p>
-          <a:p>
-            <a:pPr lvl="1"/>
-            <a:r>
-              <a:rPr lang="en-US" dirty="0"/>
-              <a:t>A hardware definition can be changed more easily as only DTS recompilation is needed.</a:t>
-            </a:r>
-          </a:p>
-          <a:p>
-            <a:pPr lvl="1"/>
-            <a:r>
-              <a:rPr lang="en-US" dirty="0"/>
-              <a:t>Kernel recompilation is not needed upon changes to the hardware definition. This is a </a:t>
-            </a:r>
-            <a:r>
-              <a:rPr lang="en-US" dirty="0">
-                <a:sym typeface="Wingdings"/>
-              </a:rPr>
-              <a:t>big time saver.</a:t>
-            </a:r>
-            <a:endParaRPr lang="en-US" altLang="en-US" dirty="0">
-              <a:ea typeface="ＭＳ Ｐゴシック" panose="020B0600070205080204" pitchFamily="34" charset="-128"/>
-            </a:endParaRPr>
-          </a:p>
-          <a:p>
-            <a:pPr lvl="2"/>
-            <a:endParaRPr lang="en-US" altLang="en-US" dirty="0">
-              <a:ea typeface="ＭＳ Ｐゴシック" panose="020B0600070205080204" pitchFamily="34" charset="-128"/>
+              <a:cs typeface="Calibri"/>
             </a:endParaRPr>
           </a:p>
         </p:txBody>
@@ -30126,9 +31868,12 @@
           </a:p>
           <a:p>
             <a:r>
-              <a:rPr lang="en-US" dirty="0"/>
-              <a:t>Device tree</a:t>
-            </a:r>
+              <a:rPr lang="en-US" dirty="0">
+                <a:ea typeface="ＭＳ Ｐゴシック"/>
+              </a:rPr>
+              <a:t>Device Tree</a:t>
+            </a:r>
+            <a:endParaRPr lang="en-US"/>
           </a:p>
           <a:p>
             <a:r>
@@ -30142,9 +31887,15 @@
                 <a:solidFill>
                   <a:srgbClr val="128CAB"/>
                 </a:solidFill>
-              </a:rPr>
-              <a:t>System programs</a:t>
-            </a:r>
+                <a:ea typeface="ＭＳ Ｐゴシック"/>
+              </a:rPr>
+              <a:t>System Programs</a:t>
+            </a:r>
+            <a:endParaRPr lang="en-US">
+              <a:solidFill>
+                <a:srgbClr val="128CAB"/>
+              </a:solidFill>
+            </a:endParaRPr>
           </a:p>
           <a:p>
             <a:r>
@@ -30154,8 +31905,10 @@
           </a:p>
           <a:p>
             <a:r>
-              <a:rPr lang="en-US" dirty="0"/>
-              <a:t>Root filesystem</a:t>
+              <a:rPr lang="en-US" dirty="0">
+                <a:ea typeface="ＭＳ Ｐゴシック"/>
+              </a:rPr>
+              <a:t>Root Filesystem</a:t>
             </a:r>
             <a:endParaRPr lang="en-US" altLang="en-US" dirty="0">
               <a:ea typeface="ＭＳ Ｐゴシック" panose="020B0600070205080204" pitchFamily="34" charset="-128"/>
@@ -30281,48 +32034,201 @@
             </a:endParaRPr>
           </a:p>
           <a:p>
-            <a:pPr lvl="1"/>
-            <a:r>
-              <a:rPr lang="en-US" dirty="0"/>
-              <a:t>Status information</a:t>
-            </a:r>
-          </a:p>
-          <a:p>
-            <a:pPr lvl="1"/>
-            <a:r>
-              <a:rPr lang="en-US" dirty="0"/>
-              <a:t>File modification</a:t>
-            </a:r>
-          </a:p>
-          <a:p>
-            <a:pPr lvl="1"/>
-            <a:r>
-              <a:rPr lang="en-US" dirty="0"/>
-              <a:t>Programming language support</a:t>
-            </a:r>
-          </a:p>
-          <a:p>
-            <a:pPr lvl="1"/>
-            <a:r>
-              <a:rPr lang="en-US" dirty="0"/>
-              <a:t>Program loading and execution</a:t>
-            </a:r>
-          </a:p>
-          <a:p>
-            <a:pPr lvl="1"/>
-            <a:r>
-              <a:rPr lang="en-US" dirty="0"/>
-              <a:t>Communications</a:t>
-            </a:r>
-          </a:p>
-          <a:p>
-            <a:pPr lvl="1"/>
-            <a:r>
-              <a:rPr lang="en-US" dirty="0"/>
-              <a:t>Application programs</a:t>
+            <a:pPr marL="398145" lvl="1" indent="-166370"/>
+            <a:r>
+              <a:rPr lang="en-US" dirty="0">
+                <a:ea typeface="ＭＳ Ｐゴシック"/>
+              </a:rPr>
+              <a:t>Status information (e.g., </a:t>
+            </a:r>
+            <a:r>
+              <a:rPr lang="en-US" dirty="0">
+                <a:latin typeface="Courier New"/>
+                <a:ea typeface="ＭＳ Ｐゴシック"/>
+                <a:cs typeface="Courier New"/>
+              </a:rPr>
+              <a:t>uptime</a:t>
+            </a:r>
+            <a:r>
+              <a:rPr lang="en-US" dirty="0">
+                <a:ea typeface="ＭＳ Ｐゴシック"/>
+              </a:rPr>
+              <a:t>)</a:t>
+            </a:r>
+            <a:endParaRPr lang="en-US" dirty="0">
+              <a:ea typeface="ＭＳ Ｐゴシック"/>
+              <a:cs typeface="Calibri"/>
+            </a:endParaRPr>
+          </a:p>
+          <a:p>
+            <a:pPr marL="398145" lvl="1" indent="-166370"/>
+            <a:r>
+              <a:rPr lang="en-US" dirty="0">
+                <a:ea typeface="ＭＳ Ｐゴシック"/>
+              </a:rPr>
+              <a:t>File modification (</a:t>
+            </a:r>
+            <a:r>
+              <a:rPr lang="en-US">
+                <a:ea typeface="ＭＳ Ｐゴシック"/>
+              </a:rPr>
+              <a:t>e.g.,</a:t>
+            </a:r>
+            <a:r>
+              <a:rPr lang="en-US" dirty="0">
+                <a:ea typeface="ＭＳ Ｐゴシック"/>
+              </a:rPr>
+              <a:t> </a:t>
+            </a:r>
+            <a:r>
+              <a:rPr lang="en-US" dirty="0">
+                <a:latin typeface="Courier New"/>
+                <a:ea typeface="ＭＳ Ｐゴシック"/>
+                <a:cs typeface="Courier New"/>
+              </a:rPr>
+              <a:t>mv</a:t>
+            </a:r>
+            <a:r>
+              <a:rPr lang="en-US" dirty="0">
+                <a:ea typeface="ＭＳ Ｐゴシック"/>
+              </a:rPr>
+              <a:t>)</a:t>
+            </a:r>
+            <a:endParaRPr lang="en-US" dirty="0">
+              <a:ea typeface="ＭＳ Ｐゴシック"/>
+              <a:cs typeface="Calibri"/>
+            </a:endParaRPr>
+          </a:p>
+          <a:p>
+            <a:pPr marL="398145" lvl="1" indent="-166370"/>
+            <a:r>
+              <a:rPr lang="en-US" dirty="0">
+                <a:ea typeface="ＭＳ Ｐゴシック"/>
+              </a:rPr>
+              <a:t>Programming language support (e.g., </a:t>
+            </a:r>
+            <a:r>
+              <a:rPr lang="en-US" dirty="0" err="1">
+                <a:latin typeface="Courier New"/>
+                <a:ea typeface="ＭＳ Ｐゴシック"/>
+                <a:cs typeface="Courier New"/>
+              </a:rPr>
+              <a:t>gcc</a:t>
+            </a:r>
+            <a:r>
+              <a:rPr lang="en-US" dirty="0">
+                <a:ea typeface="ＭＳ Ｐゴシック"/>
+              </a:rPr>
+              <a:t>)</a:t>
+            </a:r>
+            <a:endParaRPr lang="en-US" dirty="0">
+              <a:ea typeface="ＭＳ Ｐゴシック"/>
+              <a:cs typeface="Calibri"/>
+            </a:endParaRPr>
+          </a:p>
+          <a:p>
+            <a:pPr marL="398145" lvl="1" indent="-166370"/>
+            <a:r>
+              <a:rPr lang="en-US" dirty="0">
+                <a:ea typeface="ＭＳ Ｐゴシック"/>
+              </a:rPr>
+              <a:t>Program loading and execution (</a:t>
+            </a:r>
+            <a:r>
+              <a:rPr lang="en-US">
+                <a:ea typeface="ＭＳ Ｐゴシック"/>
+              </a:rPr>
+              <a:t>e.g.,</a:t>
+            </a:r>
+            <a:r>
+              <a:rPr lang="en-US" dirty="0">
+                <a:ea typeface="ＭＳ Ｐゴシック"/>
+              </a:rPr>
+              <a:t> </a:t>
+            </a:r>
+            <a:r>
+              <a:rPr lang="en-US" err="1">
+                <a:latin typeface="Courier New"/>
+                <a:ea typeface="ＭＳ Ｐゴシック"/>
+                <a:cs typeface="Courier New"/>
+              </a:rPr>
+              <a:t>ld</a:t>
+            </a:r>
+            <a:r>
+              <a:rPr lang="en-US" dirty="0">
+                <a:ea typeface="ＭＳ Ｐゴシック"/>
+              </a:rPr>
+              <a:t>)</a:t>
+            </a:r>
+            <a:endParaRPr lang="en-US" dirty="0">
+              <a:ea typeface="ＭＳ Ｐゴシック"/>
+              <a:cs typeface="Calibri"/>
+            </a:endParaRPr>
+          </a:p>
+          <a:p>
+            <a:pPr marL="398145" lvl="1" indent="-166370"/>
+            <a:r>
+              <a:rPr lang="en-US" dirty="0">
+                <a:ea typeface="ＭＳ Ｐゴシック"/>
+              </a:rPr>
+              <a:t>Communications (e.g., </a:t>
+            </a:r>
+            <a:r>
+              <a:rPr lang="en-US" dirty="0">
+                <a:latin typeface="Courier New"/>
+                <a:ea typeface="ＭＳ Ｐゴシック"/>
+                <a:cs typeface="Courier New"/>
+              </a:rPr>
+              <a:t>ping</a:t>
+            </a:r>
+            <a:r>
+              <a:rPr lang="en-US" dirty="0">
+                <a:ea typeface="ＭＳ Ｐゴシック"/>
+              </a:rPr>
+              <a:t>)</a:t>
+            </a:r>
+            <a:endParaRPr lang="en-US" dirty="0">
+              <a:ea typeface="ＭＳ Ｐゴシック"/>
+              <a:cs typeface="Calibri"/>
+            </a:endParaRPr>
+          </a:p>
+          <a:p>
+            <a:pPr marL="398145" lvl="1" indent="-166370"/>
+            <a:r>
+              <a:rPr lang="en-US" dirty="0">
+                <a:ea typeface="ＭＳ Ｐゴシック"/>
+              </a:rPr>
+              <a:t>Application programs (</a:t>
+            </a:r>
+            <a:r>
+              <a:rPr lang="en-US">
+                <a:ea typeface="ＭＳ Ｐゴシック"/>
+              </a:rPr>
+              <a:t>e.g.,</a:t>
+            </a:r>
+            <a:r>
+              <a:rPr lang="en-US" dirty="0">
+                <a:ea typeface="ＭＳ Ｐゴシック"/>
+              </a:rPr>
+              <a:t> </a:t>
+            </a:r>
+            <a:r>
+              <a:rPr lang="en-US" err="1">
+                <a:latin typeface="Courier New"/>
+                <a:ea typeface="ＭＳ Ｐゴシック"/>
+                <a:cs typeface="Courier New"/>
+              </a:rPr>
+              <a:t>firefox</a:t>
+            </a:r>
+            <a:r>
+              <a:rPr lang="en-US" dirty="0">
+                <a:ea typeface="ＭＳ Ｐゴシック"/>
+              </a:rPr>
+              <a:t>)</a:t>
             </a:r>
             <a:endParaRPr lang="en-US" altLang="en-US" dirty="0">
-              <a:ea typeface="ＭＳ Ｐゴシック" panose="020B0600070205080204" pitchFamily="34" charset="-128"/>
+              <a:ea typeface="ＭＳ Ｐゴシック"/>
+              <a:cs typeface="Calibri"/>
             </a:endParaRPr>
           </a:p>
         </p:txBody>
@@ -30431,9 +32337,12 @@
           </a:p>
           <a:p>
             <a:r>
-              <a:rPr lang="en-US" dirty="0"/>
-              <a:t>Device tree</a:t>
-            </a:r>
+              <a:rPr lang="en-US" dirty="0">
+                <a:ea typeface="ＭＳ Ｐゴシック"/>
+              </a:rPr>
+              <a:t>Device Tree</a:t>
+            </a:r>
+            <a:endParaRPr lang="en-US"/>
           </a:p>
           <a:p>
             <a:r>
@@ -30443,13 +32352,16 @@
           </a:p>
           <a:p>
             <a:r>
-              <a:rPr lang="en-US" dirty="0"/>
-              <a:t>System programs</a:t>
-            </a:r>
-          </a:p>
-          <a:p>
-            <a:r>
               <a:rPr lang="en-US" dirty="0">
+                <a:ea typeface="ＭＳ Ｐゴシック"/>
+              </a:rPr>
+              <a:t>System Programs</a:t>
+            </a:r>
+            <a:endParaRPr lang="en-US"/>
+          </a:p>
+          <a:p>
+            <a:r>
+              <a:rPr lang="en-US" dirty="0">
                 <a:solidFill>
                   <a:srgbClr val="128CAB"/>
                 </a:solidFill>
@@ -30459,8 +32371,10 @@
           </a:p>
           <a:p>
             <a:r>
-              <a:rPr lang="en-US" dirty="0"/>
-              <a:t>Root filesystem</a:t>
+              <a:rPr lang="en-US" dirty="0">
+                <a:ea typeface="ＭＳ Ｐゴシック"/>
+              </a:rPr>
+              <a:t>Root Filesystem</a:t>
             </a:r>
             <a:endParaRPr lang="en-US" altLang="en-US" dirty="0">
               <a:ea typeface="ＭＳ Ｐゴシック" panose="020B0600070205080204" pitchFamily="34" charset="-128"/>
@@ -30561,7 +32475,7 @@
           <a:p>
             <a:r>
               <a:rPr lang="en-US" dirty="0"/>
-              <a:t>The application is the software required to provide the end user service for which the embedded system was conceived.</a:t>
+              <a:t>The application is the software required to provide the end user with service for which the embedded system was conceived.</a:t>
             </a:r>
           </a:p>
           <a:p>
@@ -30723,15 +32637,21 @@
           </a:p>
           <a:p>
             <a:r>
-              <a:rPr lang="en-US" dirty="0"/>
-              <a:t>Device tree</a:t>
-            </a:r>
-          </a:p>
-          <a:p>
-            <a:r>
-              <a:rPr lang="en-US" dirty="0"/>
-              <a:t>System programs</a:t>
-            </a:r>
+              <a:rPr lang="en-US" dirty="0">
+                <a:ea typeface="ＭＳ Ｐゴシック"/>
+              </a:rPr>
+              <a:t>Device Tree</a:t>
+            </a:r>
+            <a:endParaRPr lang="en-US"/>
+          </a:p>
+          <a:p>
+            <a:r>
+              <a:rPr lang="en-US" dirty="0">
+                <a:ea typeface="ＭＳ Ｐゴシック"/>
+              </a:rPr>
+              <a:t>System Programs</a:t>
+            </a:r>
+            <a:endParaRPr lang="en-US"/>
           </a:p>
           <a:p>
             <a:r>
@@ -30741,9 +32661,12 @@
           </a:p>
           <a:p>
             <a:r>
-              <a:rPr lang="en-US" dirty="0"/>
-              <a:t>Root filesystem</a:t>
-            </a:r>
+              <a:rPr lang="en-US" dirty="0">
+                <a:ea typeface="ＭＳ Ｐゴシック"/>
+              </a:rPr>
+              <a:t>Root Filesystem</a:t>
+            </a:r>
+            <a:endParaRPr lang="en-US" dirty="0"/>
           </a:p>
         </p:txBody>
       </p:sp>
@@ -30851,9 +32774,12 @@
           </a:p>
           <a:p>
             <a:r>
-              <a:rPr lang="en-US" dirty="0"/>
-              <a:t>Device tree</a:t>
-            </a:r>
+              <a:rPr lang="en-US" dirty="0">
+                <a:ea typeface="ＭＳ Ｐゴシック"/>
+              </a:rPr>
+              <a:t>Device Tree</a:t>
+            </a:r>
+            <a:endParaRPr lang="en-US" dirty="0"/>
           </a:p>
           <a:p>
             <a:r>
@@ -30863,9 +32789,12 @@
           </a:p>
           <a:p>
             <a:r>
-              <a:rPr lang="en-US" dirty="0"/>
-              <a:t>System programs</a:t>
-            </a:r>
+              <a:rPr lang="en-US" dirty="0">
+                <a:ea typeface="ＭＳ Ｐゴシック"/>
+              </a:rPr>
+              <a:t>System Programs</a:t>
+            </a:r>
+            <a:endParaRPr lang="en-US" dirty="0"/>
           </a:p>
           <a:p>
             <a:r>
@@ -30879,8 +32808,9 @@
                 <a:solidFill>
                   <a:srgbClr val="128CAB"/>
                 </a:solidFill>
-              </a:rPr>
-              <a:t>Root filesystem</a:t>
+                <a:ea typeface="ＭＳ Ｐゴシック"/>
+              </a:rPr>
+              <a:t>Root Filesystem</a:t>
             </a:r>
             <a:endParaRPr lang="en-US" altLang="en-US" dirty="0">
               <a:ea typeface="ＭＳ Ｐゴシック" panose="020B0600070205080204" pitchFamily="34" charset="-128"/>
@@ -30980,155 +32910,202 @@
           <a:lstStyle/>
           <a:p>
             <a:r>
+              <a:rPr lang="en-US" dirty="0">
+                <a:ea typeface="ＭＳ Ｐゴシック"/>
+              </a:rPr>
+              <a:t>The Linux Kernel needs a file system, called a </a:t>
+            </a:r>
+            <a:r>
+              <a:rPr lang="en-US" dirty="0">
+                <a:solidFill>
+                  <a:srgbClr val="128CAB"/>
+                </a:solidFill>
+                <a:ea typeface="ＭＳ Ｐゴシック"/>
+              </a:rPr>
+              <a:t>root filesystem</a:t>
+            </a:r>
+            <a:r>
+              <a:rPr lang="en-US" dirty="0">
+                <a:ea typeface="ＭＳ Ｐゴシック"/>
+              </a:rPr>
+              <a:t>, at startup.</a:t>
+            </a:r>
+            <a:endParaRPr lang="en-US" altLang="en-US" dirty="0">
+              <a:ea typeface="ＭＳ Ｐゴシック"/>
+            </a:endParaRPr>
+          </a:p>
+          <a:p>
+            <a:pPr marL="398145" lvl="1" indent="-166370"/>
+            <a:r>
+              <a:rPr lang="en-US" dirty="0">
+                <a:ea typeface="ＭＳ Ｐゴシック"/>
+              </a:rPr>
+              <a:t>It contains the configuration files needed to prepare the execution environment for the application (e.g., setting up the Ethernet address).</a:t>
+            </a:r>
+            <a:endParaRPr lang="en-US" dirty="0">
+              <a:ea typeface="ＭＳ Ｐゴシック"/>
+              <a:cs typeface="Calibri"/>
+            </a:endParaRPr>
+          </a:p>
+          <a:p>
+            <a:pPr marL="398145" lvl="1" indent="-166370"/>
+            <a:r>
               <a:rPr lang="en-US" dirty="0"/>
-              <a:t>The Linux Kernel needs a file system, called a </a:t>
-            </a:r>
-            <a:r>
-              <a:rPr lang="en-US" dirty="0">
-                <a:solidFill>
-                  <a:srgbClr val="128CAB"/>
-                </a:solidFill>
-              </a:rPr>
-              <a:t>root filesystem</a:t>
+              <a:t>It contains the first user-level process (</a:t>
+            </a:r>
+            <a:r>
+              <a:rPr lang="en-US" dirty="0" err="1"/>
+              <a:t>init</a:t>
             </a:r>
             <a:r>
               <a:rPr lang="en-US" dirty="0"/>
-              <a:t>, at startup.</a:t>
+              <a:t>).</a:t>
             </a:r>
             <a:endParaRPr lang="en-US" altLang="en-US" dirty="0">
               <a:ea typeface="ＭＳ Ｐゴシック" panose="020B0600070205080204" pitchFamily="34" charset="-128"/>
+              <a:cs typeface="Calibri"/>
             </a:endParaRPr>
           </a:p>
           <a:p>
-            <a:pPr lvl="1"/>
-            <a:r>
-              <a:rPr lang="en-US" dirty="0"/>
-              <a:t>It contains the configuration file needed to prepare the execution environment for the application (e.g. setting up the Ethernet address).</a:t>
-            </a:r>
-          </a:p>
-          <a:p>
-            <a:pPr lvl="1"/>
-            <a:r>
-              <a:rPr lang="en-US" dirty="0"/>
-              <a:t>It contains the first user-level process (</a:t>
-            </a:r>
-            <a:r>
-              <a:rPr lang="en-US" dirty="0" err="1"/>
-              <a:t>init</a:t>
-            </a:r>
-            <a:r>
-              <a:rPr lang="en-US" dirty="0"/>
-              <a:t>).</a:t>
+            <a:r>
+              <a:rPr lang="en-US" dirty="0">
+                <a:ea typeface="ＭＳ Ｐゴシック"/>
+              </a:rPr>
+              <a:t>The root filesystem can be:</a:t>
+            </a:r>
+            <a:endParaRPr lang="en-US" altLang="en-US" dirty="0">
+              <a:ea typeface="ＭＳ Ｐゴシック"/>
+            </a:endParaRPr>
+          </a:p>
+          <a:p>
+            <a:pPr marL="398145" lvl="1" indent="-166370"/>
+            <a:r>
+              <a:rPr lang="en-US" dirty="0">
+                <a:ea typeface="ＭＳ Ｐゴシック"/>
+              </a:rPr>
+              <a:t>A portion of the RAM treated as a file system known as </a:t>
+            </a:r>
+            <a:r>
+              <a:rPr lang="en-US" dirty="0">
+                <a:solidFill>
+                  <a:srgbClr val="128CAB"/>
+                </a:solidFill>
+                <a:ea typeface="ＭＳ Ｐゴシック"/>
+              </a:rPr>
+              <a:t>Initial RAM Disk </a:t>
+            </a:r>
+            <a:r>
+              <a:rPr lang="en-US" dirty="0">
+                <a:ea typeface="ＭＳ Ｐゴシック"/>
+              </a:rPr>
+              <a:t>(</a:t>
+            </a:r>
+            <a:r>
+              <a:rPr lang="en-US" dirty="0" err="1">
+                <a:ea typeface="ＭＳ Ｐゴシック"/>
+              </a:rPr>
+              <a:t>initrd</a:t>
+            </a:r>
+            <a:r>
+              <a:rPr lang="en-US" dirty="0">
+                <a:ea typeface="ＭＳ Ｐゴシック"/>
+              </a:rPr>
+              <a:t>), if the embedded system does not need to store data persistently during its operations.</a:t>
+            </a:r>
+            <a:endParaRPr lang="en-US" dirty="0">
+              <a:cs typeface="Calibri"/>
+            </a:endParaRPr>
+          </a:p>
+          <a:p>
+            <a:pPr marL="398145" lvl="1" indent="-166370"/>
+            <a:r>
+              <a:rPr lang="en-US" dirty="0">
+                <a:ea typeface="ＭＳ Ｐゴシック"/>
+              </a:rPr>
+              <a:t>A </a:t>
+            </a:r>
+            <a:r>
+              <a:rPr lang="en-US" dirty="0">
+                <a:solidFill>
+                  <a:srgbClr val="128CAB"/>
+                </a:solidFill>
+                <a:ea typeface="ＭＳ Ｐゴシック"/>
+              </a:rPr>
+              <a:t>persistent storage</a:t>
+            </a:r>
+            <a:r>
+              <a:rPr lang="en-US" dirty="0">
+                <a:ea typeface="ＭＳ Ｐゴシック"/>
+              </a:rPr>
+              <a:t> </a:t>
+            </a:r>
+            <a:r>
+              <a:rPr lang="en-US" dirty="0">
+                <a:solidFill>
+                  <a:srgbClr val="128CAB"/>
+                </a:solidFill>
+                <a:ea typeface="ＭＳ Ｐゴシック"/>
+              </a:rPr>
+              <a:t>in the embedded system</a:t>
+            </a:r>
+            <a:r>
+              <a:rPr lang="en-US" dirty="0">
+                <a:ea typeface="ＭＳ Ｐゴシック"/>
+              </a:rPr>
+              <a:t>,</a:t>
+            </a:r>
+            <a:r>
+              <a:rPr lang="en-US" dirty="0">
+                <a:solidFill>
+                  <a:srgbClr val="128CAB"/>
+                </a:solidFill>
+                <a:ea typeface="ＭＳ Ｐゴシック"/>
+              </a:rPr>
+              <a:t> </a:t>
+            </a:r>
+            <a:r>
+              <a:rPr lang="en-US" dirty="0">
+                <a:ea typeface="ＭＳ Ｐゴシック"/>
+              </a:rPr>
+              <a:t>if the embedded system has to store data persistently during its operations.</a:t>
+            </a:r>
+            <a:endParaRPr lang="en-US" dirty="0">
+              <a:cs typeface="Calibri"/>
+            </a:endParaRPr>
+          </a:p>
+          <a:p>
+            <a:pPr marL="398145" lvl="1" indent="-166370"/>
+            <a:r>
+              <a:rPr lang="en-US" dirty="0">
+                <a:ea typeface="ＭＳ Ｐゴシック"/>
+              </a:rPr>
+              <a:t>A </a:t>
+            </a:r>
+            <a:r>
+              <a:rPr lang="en-US" dirty="0">
+                <a:solidFill>
+                  <a:srgbClr val="128CAB"/>
+                </a:solidFill>
+                <a:ea typeface="ＭＳ Ｐゴシック"/>
+              </a:rPr>
+              <a:t>persistent storage accessed over the network</a:t>
+            </a:r>
+            <a:r>
+              <a:rPr lang="en-US" dirty="0">
+                <a:ea typeface="ＭＳ Ｐゴシック"/>
+              </a:rPr>
+              <a:t>, if developing a Linux-based embedded system.</a:t>
             </a:r>
             <a:endParaRPr lang="en-US" altLang="en-US" dirty="0">
               <a:ea typeface="ＭＳ Ｐゴシック" panose="020B0600070205080204" pitchFamily="34" charset="-128"/>
+              <a:cs typeface="Calibri"/>
             </a:endParaRPr>
           </a:p>
           <a:p>
-            <a:r>
-              <a:rPr lang="en-US" dirty="0"/>
-              <a:t>The root filesystem can be:</a:t>
-            </a:r>
+            <a:pPr marL="855345" lvl="2" indent="-166370"/>
             <a:endParaRPr lang="en-US" altLang="en-US" dirty="0">
               <a:ea typeface="ＭＳ Ｐゴシック" panose="020B0600070205080204" pitchFamily="34" charset="-128"/>
-            </a:endParaRPr>
-          </a:p>
-          <a:p>
-            <a:pPr lvl="1"/>
-            <a:r>
-              <a:rPr lang="en-US" dirty="0"/>
-              <a:t>A portion of the RAM treated as a file system known as </a:t>
-            </a:r>
-            <a:r>
-              <a:rPr lang="en-US" dirty="0">
-                <a:solidFill>
-                  <a:srgbClr val="128CAB"/>
-                </a:solidFill>
-              </a:rPr>
-              <a:t>Initial RAM Disk </a:t>
-            </a:r>
-            <a:r>
-              <a:rPr lang="en-US" dirty="0"/>
-              <a:t>(</a:t>
-            </a:r>
-            <a:r>
-              <a:rPr lang="en-US" dirty="0" err="1"/>
-              <a:t>initrd</a:t>
-            </a:r>
-            <a:r>
-              <a:rPr lang="en-US" dirty="0"/>
-              <a:t>), if the embedded system does not need to store data persistently during its operations</a:t>
-            </a:r>
-          </a:p>
-          <a:p>
-            <a:pPr lvl="1"/>
-            <a:r>
-              <a:rPr lang="en-US" dirty="0"/>
-              <a:t>A </a:t>
-            </a:r>
-            <a:r>
-              <a:rPr lang="en-US" dirty="0">
-                <a:solidFill>
-                  <a:srgbClr val="128CAB"/>
-                </a:solidFill>
-              </a:rPr>
-              <a:t>persistent storage</a:t>
-            </a:r>
-            <a:r>
-              <a:rPr lang="en-US" dirty="0"/>
-              <a:t> </a:t>
-            </a:r>
-            <a:r>
-              <a:rPr lang="en-US" dirty="0">
-                <a:solidFill>
-                  <a:srgbClr val="128CAB"/>
-                </a:solidFill>
-              </a:rPr>
-              <a:t>in the embedded system</a:t>
-            </a:r>
-            <a:r>
-              <a:rPr lang="en-US" dirty="0"/>
-              <a:t>,</a:t>
-            </a:r>
-            <a:r>
-              <a:rPr lang="en-US" dirty="0">
-                <a:solidFill>
-                  <a:srgbClr val="128CAB"/>
-                </a:solidFill>
-              </a:rPr>
-              <a:t> </a:t>
-            </a:r>
-            <a:r>
-              <a:rPr lang="en-US" dirty="0"/>
-              <a:t>if the embedded system has to store data persistently during its operations</a:t>
-            </a:r>
-          </a:p>
-          <a:p>
-            <a:pPr lvl="1"/>
-            <a:r>
-              <a:rPr lang="en-US" dirty="0"/>
-              <a:t>A </a:t>
-            </a:r>
-            <a:r>
-              <a:rPr lang="en-US" dirty="0">
-                <a:solidFill>
-                  <a:srgbClr val="128CAB"/>
-                </a:solidFill>
-              </a:rPr>
-              <a:t>persistent storage accessed over the network</a:t>
-            </a:r>
-            <a:r>
-              <a:rPr lang="en-US" dirty="0"/>
-              <a:t>, if developing a Linux-based embedded system</a:t>
-            </a:r>
-            <a:endParaRPr lang="en-US" altLang="en-US" dirty="0">
-              <a:ea typeface="ＭＳ Ｐゴシック" panose="020B0600070205080204" pitchFamily="34" charset="-128"/>
-            </a:endParaRPr>
-          </a:p>
-          <a:p>
-            <a:pPr lvl="2"/>
-            <a:endParaRPr lang="en-US" altLang="en-US" dirty="0">
-              <a:ea typeface="ＭＳ Ｐゴシック" panose="020B0600070205080204" pitchFamily="34" charset="-128"/>
+              <a:cs typeface="Calibri"/>
             </a:endParaRPr>
           </a:p>
         </p:txBody>
@@ -31179,7 +33156,12 @@
             <p:ph type="title"/>
           </p:nvPr>
         </p:nvSpPr>
-        <p:spPr/>
+        <p:spPr>
+          <a:xfrm>
+            <a:off x="80645" y="93689"/>
+            <a:ext cx="11180763" cy="666750"/>
+          </a:xfrm>
+        </p:spPr>
         <p:txBody>
           <a:bodyPr/>
           <a:lstStyle/>
@@ -31196,7 +33178,7 @@
       </p:sp>
       <p:sp>
         <p:nvSpPr>
-          <p:cNvPr id="6" name="TextBox 4">
+          <p:cNvPr id="6" name="TextBox 4" descr="Root filesystem hierarchy example, showing files and folders">
             <a:extLst>
               <a:ext uri="{FF2B5EF4-FFF2-40B4-BE49-F238E27FC236}">
                 <a16:creationId xmlns:a16="http://schemas.microsoft.com/office/drawing/2014/main" id="{F06BEC2D-4F66-4AAA-AAC3-2B693BACC5F7}"/>
@@ -31210,8 +33192,8 @@
         </p:nvSpPr>
         <p:spPr bwMode="auto">
           <a:xfrm>
-            <a:off x="2101853" y="1218564"/>
-            <a:ext cx="8001000" cy="5478423"/>
+            <a:off x="1828800" y="760439"/>
+            <a:ext cx="8274053" cy="6093976"/>
           </a:xfrm>
           <a:prstGeom prst="rect">
             <a:avLst/>
@@ -31229,7 +33211,7 @@
           </a:ln>
         </p:spPr>
         <p:txBody>
-          <a:bodyPr>
+          <a:bodyPr wrap="square">
             <a:spAutoFit/>
           </a:bodyPr>
           <a:lstStyle>
@@ -31340,12 +33322,19 @@
             </a:lvl9pPr>
           </a:lstStyle>
           <a:p>
-            <a:pPr algn="l" eaLnBrk="1" hangingPunct="1"/>
+            <a:pPr algn="l" eaLnBrk="1" hangingPunct="1">
+              <a:spcBef>
+                <a:spcPts val="0"/>
+              </a:spcBef>
+              <a:spcAft>
+                <a:spcPts val="200"/>
+              </a:spcAft>
+            </a:pPr>
             <a:r>
               <a:rPr lang="en-US" altLang="en-US" sz="1400" b="1" dirty="0">
                 <a:latin typeface="Courier New" charset="0"/>
               </a:rPr>
-              <a:t>/</a:t>
+              <a:t>   /</a:t>
             </a:r>
             <a:r>
               <a:rPr lang="en-US" altLang="en-US" sz="1400" dirty="0">
@@ -31355,7 +33344,14 @@
             </a:r>
           </a:p>
           <a:p>
-            <a:pPr algn="l" eaLnBrk="1" hangingPunct="1"/>
+            <a:pPr algn="l" eaLnBrk="1" hangingPunct="1">
+              <a:spcBef>
+                <a:spcPts val="0"/>
+              </a:spcBef>
+              <a:spcAft>
+                <a:spcPts val="200"/>
+              </a:spcAft>
+            </a:pPr>
             <a:r>
               <a:rPr lang="en-US" altLang="en-US" sz="1400" dirty="0">
                 <a:latin typeface="Courier New" charset="0"/>
@@ -31376,7 +33372,14 @@
             </a:r>
           </a:p>
           <a:p>
-            <a:pPr algn="l" eaLnBrk="1" hangingPunct="1"/>
+            <a:pPr algn="l" eaLnBrk="1" hangingPunct="1">
+              <a:spcBef>
+                <a:spcPts val="0"/>
+              </a:spcBef>
+              <a:spcAft>
+                <a:spcPts val="200"/>
+              </a:spcAft>
+            </a:pPr>
             <a:r>
               <a:rPr lang="en-US" altLang="en-US" sz="1400" dirty="0">
                 <a:latin typeface="Courier New" charset="0"/>
@@ -31397,7 +33400,14 @@
             </a:r>
           </a:p>
           <a:p>
-            <a:pPr algn="l" eaLnBrk="1" hangingPunct="1"/>
+            <a:pPr algn="l" eaLnBrk="1" hangingPunct="1">
+              <a:spcBef>
+                <a:spcPts val="0"/>
+              </a:spcBef>
+              <a:spcAft>
+                <a:spcPts val="200"/>
+              </a:spcAft>
+            </a:pPr>
             <a:r>
               <a:rPr lang="en-US" altLang="en-US" sz="1400" dirty="0">
                 <a:latin typeface="Courier New" charset="0"/>
@@ -31424,7 +33434,14 @@
             </a:r>
           </a:p>
           <a:p>
-            <a:pPr algn="l" eaLnBrk="1" hangingPunct="1"/>
+            <a:pPr algn="l" eaLnBrk="1" hangingPunct="1">
+              <a:spcBef>
+                <a:spcPts val="0"/>
+              </a:spcBef>
+              <a:spcAft>
+                <a:spcPts val="200"/>
+              </a:spcAft>
+            </a:pPr>
             <a:r>
               <a:rPr lang="en-US" altLang="en-US" sz="1400" dirty="0">
                 <a:latin typeface="Courier New" charset="0"/>
@@ -31445,7 +33462,14 @@
             </a:r>
           </a:p>
           <a:p>
-            <a:pPr algn="l" eaLnBrk="1" hangingPunct="1"/>
+            <a:pPr algn="l" eaLnBrk="1" hangingPunct="1">
+              <a:spcBef>
+                <a:spcPts val="0"/>
+              </a:spcBef>
+              <a:spcAft>
+                <a:spcPts val="200"/>
+              </a:spcAft>
+            </a:pPr>
             <a:r>
               <a:rPr lang="en-US" altLang="en-US" sz="1400" dirty="0">
                 <a:latin typeface="Courier New" charset="0"/>
@@ -31466,7 +33490,14 @@
             </a:r>
           </a:p>
           <a:p>
-            <a:pPr algn="l" eaLnBrk="1" hangingPunct="1"/>
+            <a:pPr algn="l" eaLnBrk="1" hangingPunct="1">
+              <a:spcBef>
+                <a:spcPts val="0"/>
+              </a:spcBef>
+              <a:spcAft>
+                <a:spcPts val="200"/>
+              </a:spcAft>
+            </a:pPr>
             <a:r>
               <a:rPr lang="en-US" altLang="en-US" sz="1400" dirty="0">
                 <a:latin typeface="Courier New" charset="0"/>
@@ -31511,7 +33542,14 @@
             </a:r>
           </a:p>
           <a:p>
-            <a:pPr algn="l" eaLnBrk="1" hangingPunct="1"/>
+            <a:pPr algn="l" eaLnBrk="1" hangingPunct="1">
+              <a:spcBef>
+                <a:spcPts val="0"/>
+              </a:spcBef>
+              <a:spcAft>
+                <a:spcPts val="200"/>
+              </a:spcAft>
+            </a:pPr>
             <a:r>
               <a:rPr lang="it-IT" altLang="en-US" sz="1400" dirty="0">
                 <a:latin typeface="Courier New" charset="0"/>
@@ -31550,7 +33588,14 @@
             </a:r>
           </a:p>
           <a:p>
-            <a:pPr algn="l" eaLnBrk="1" hangingPunct="1"/>
+            <a:pPr algn="l" eaLnBrk="1" hangingPunct="1">
+              <a:spcBef>
+                <a:spcPts val="0"/>
+              </a:spcBef>
+              <a:spcAft>
+                <a:spcPts val="200"/>
+              </a:spcAft>
+            </a:pPr>
             <a:r>
               <a:rPr lang="it-IT" altLang="en-US" sz="1400" dirty="0">
                 <a:latin typeface="Courier New" charset="0"/>
@@ -31583,7 +33628,14 @@
             </a:r>
           </a:p>
           <a:p>
-            <a:pPr algn="l" eaLnBrk="1" hangingPunct="1"/>
+            <a:pPr algn="l" eaLnBrk="1" hangingPunct="1">
+              <a:spcBef>
+                <a:spcPts val="0"/>
+              </a:spcBef>
+              <a:spcAft>
+                <a:spcPts val="200"/>
+              </a:spcAft>
+            </a:pPr>
             <a:r>
               <a:rPr lang="it-IT" altLang="en-US" sz="1400" dirty="0">
                 <a:latin typeface="Courier New" charset="0"/>
@@ -31604,7 +33656,14 @@
             </a:r>
           </a:p>
           <a:p>
-            <a:pPr algn="l" eaLnBrk="1" hangingPunct="1"/>
+            <a:pPr algn="l" eaLnBrk="1" hangingPunct="1">
+              <a:spcBef>
+                <a:spcPts val="0"/>
+              </a:spcBef>
+              <a:spcAft>
+                <a:spcPts val="200"/>
+              </a:spcAft>
+            </a:pPr>
             <a:r>
               <a:rPr lang="it-IT" altLang="en-US" sz="1400" dirty="0">
                 <a:latin typeface="Courier New" charset="0"/>
@@ -31625,7 +33684,14 @@
             </a:r>
           </a:p>
           <a:p>
-            <a:pPr algn="l" eaLnBrk="1" hangingPunct="1"/>
+            <a:pPr algn="l" eaLnBrk="1" hangingPunct="1">
+              <a:spcBef>
+                <a:spcPts val="0"/>
+              </a:spcBef>
+              <a:spcAft>
+                <a:spcPts val="200"/>
+              </a:spcAft>
+            </a:pPr>
             <a:r>
               <a:rPr lang="it-IT" altLang="en-US" sz="1400" dirty="0">
                 <a:latin typeface="Courier New" charset="0"/>
@@ -31646,7 +33712,14 @@
             </a:r>
           </a:p>
           <a:p>
-            <a:pPr algn="l" eaLnBrk="1" hangingPunct="1"/>
+            <a:pPr algn="l" eaLnBrk="1" hangingPunct="1">
+              <a:spcBef>
+                <a:spcPts val="0"/>
+              </a:spcBef>
+              <a:spcAft>
+                <a:spcPts val="200"/>
+              </a:spcAft>
+            </a:pPr>
             <a:r>
               <a:rPr lang="it-IT" altLang="en-US" sz="1400" dirty="0">
                 <a:latin typeface="Courier New" charset="0"/>
@@ -31667,7 +33740,14 @@
             </a:r>
           </a:p>
           <a:p>
-            <a:pPr algn="l" eaLnBrk="1" hangingPunct="1"/>
+            <a:pPr algn="l" eaLnBrk="1" hangingPunct="1">
+              <a:spcBef>
+                <a:spcPts val="0"/>
+              </a:spcBef>
+              <a:spcAft>
+                <a:spcPts val="200"/>
+              </a:spcAft>
+            </a:pPr>
             <a:r>
               <a:rPr lang="it-IT" altLang="en-US" sz="1400" dirty="0">
                 <a:latin typeface="Courier New" charset="0"/>
@@ -31691,7 +33771,14 @@
             </a:endParaRPr>
           </a:p>
           <a:p>
-            <a:pPr algn="l" eaLnBrk="1" hangingPunct="1"/>
+            <a:pPr algn="l" eaLnBrk="1" hangingPunct="1">
+              <a:spcBef>
+                <a:spcPts val="0"/>
+              </a:spcBef>
+              <a:spcAft>
+                <a:spcPts val="200"/>
+              </a:spcAft>
+            </a:pPr>
             <a:r>
               <a:rPr lang="en-US" altLang="en-US" sz="1400" dirty="0">
                 <a:latin typeface="Courier New" charset="0"/>
@@ -31730,7 +33817,14 @@
             </a:r>
           </a:p>
           <a:p>
-            <a:pPr algn="l" eaLnBrk="1" hangingPunct="1"/>
+            <a:pPr algn="l" eaLnBrk="1" hangingPunct="1">
+              <a:spcBef>
+                <a:spcPts val="0"/>
+              </a:spcBef>
+              <a:spcAft>
+                <a:spcPts val="200"/>
+              </a:spcAft>
+            </a:pPr>
             <a:r>
               <a:rPr lang="en-US" altLang="en-US" sz="1400" dirty="0">
                 <a:latin typeface="Courier New" charset="0"/>
@@ -31760,7 +33854,14 @@
             </a:endParaRPr>
           </a:p>
           <a:p>
-            <a:pPr algn="l" eaLnBrk="1" hangingPunct="1"/>
+            <a:pPr algn="l" eaLnBrk="1" hangingPunct="1">
+              <a:spcBef>
+                <a:spcPts val="0"/>
+              </a:spcBef>
+              <a:spcAft>
+                <a:spcPts val="200"/>
+              </a:spcAft>
+            </a:pPr>
             <a:r>
               <a:rPr lang="en-US" altLang="en-US" sz="1400" dirty="0">
                 <a:latin typeface="Courier New" charset="0"/>
@@ -31811,7 +33912,14 @@
             </a:r>
           </a:p>
           <a:p>
-            <a:pPr algn="l" eaLnBrk="1" hangingPunct="1"/>
+            <a:pPr algn="l" eaLnBrk="1" hangingPunct="1">
+              <a:spcBef>
+                <a:spcPts val="0"/>
+              </a:spcBef>
+              <a:spcAft>
+                <a:spcPts val="200"/>
+              </a:spcAft>
+            </a:pPr>
             <a:r>
               <a:rPr lang="en-US" altLang="en-US" sz="1400" dirty="0">
                 <a:latin typeface="Courier New" charset="0"/>
@@ -31841,7 +33949,14 @@
             </a:endParaRPr>
           </a:p>
           <a:p>
-            <a:pPr algn="l" eaLnBrk="1" hangingPunct="1"/>
+            <a:pPr algn="l" eaLnBrk="1" hangingPunct="1">
+              <a:spcBef>
+                <a:spcPts val="0"/>
+              </a:spcBef>
+              <a:spcAft>
+                <a:spcPts val="200"/>
+              </a:spcAft>
+            </a:pPr>
             <a:r>
               <a:rPr lang="en-US" altLang="en-US" sz="1400" dirty="0">
                 <a:latin typeface="Courier New" charset="0"/>
@@ -31862,7 +33977,14 @@
             </a:r>
           </a:p>
           <a:p>
-            <a:pPr algn="l" eaLnBrk="1" hangingPunct="1"/>
+            <a:pPr algn="l" eaLnBrk="1" hangingPunct="1">
+              <a:spcBef>
+                <a:spcPts val="0"/>
+              </a:spcBef>
+              <a:spcAft>
+                <a:spcPts val="200"/>
+              </a:spcAft>
+            </a:pPr>
             <a:r>
               <a:rPr lang="en-US" altLang="en-US" sz="1400" dirty="0">
                 <a:latin typeface="Courier New" charset="0"/>
@@ -31889,7 +34011,14 @@
             </a:r>
           </a:p>
           <a:p>
-            <a:pPr algn="l" eaLnBrk="1" hangingPunct="1"/>
+            <a:pPr algn="l" eaLnBrk="1" hangingPunct="1">
+              <a:spcBef>
+                <a:spcPts val="0"/>
+              </a:spcBef>
+              <a:spcAft>
+                <a:spcPts val="200"/>
+              </a:spcAft>
+            </a:pPr>
             <a:r>
               <a:rPr lang="en-US" altLang="en-US" sz="1400" dirty="0">
                 <a:latin typeface="Courier New" charset="0"/>
@@ -31916,7 +34045,14 @@
             </a:r>
           </a:p>
           <a:p>
-            <a:pPr algn="l" eaLnBrk="1" hangingPunct="1"/>
+            <a:pPr algn="l" eaLnBrk="1" hangingPunct="1">
+              <a:spcBef>
+                <a:spcPts val="0"/>
+              </a:spcBef>
+              <a:spcAft>
+                <a:spcPts val="200"/>
+              </a:spcAft>
+            </a:pPr>
             <a:r>
               <a:rPr lang="en-US" altLang="en-US" sz="1400" dirty="0">
                 <a:latin typeface="Courier New" charset="0"/>
@@ -31955,7 +34091,14 @@
             </a:r>
           </a:p>
           <a:p>
-            <a:pPr algn="l" eaLnBrk="1" hangingPunct="1"/>
+            <a:pPr algn="l" eaLnBrk="1" hangingPunct="1">
+              <a:spcBef>
+                <a:spcPts val="0"/>
+              </a:spcBef>
+              <a:spcAft>
+                <a:spcPts val="200"/>
+              </a:spcAft>
+            </a:pPr>
             <a:r>
               <a:rPr lang="en-US" altLang="en-US" sz="1400" dirty="0">
                 <a:latin typeface="Courier New" charset="0"/>
@@ -31982,7 +34125,14 @@
             </a:r>
           </a:p>
           <a:p>
-            <a:pPr algn="l" eaLnBrk="1" hangingPunct="1"/>
+            <a:pPr algn="l" eaLnBrk="1" hangingPunct="1">
+              <a:spcBef>
+                <a:spcPts val="0"/>
+              </a:spcBef>
+              <a:spcAft>
+                <a:spcPts val="200"/>
+              </a:spcAft>
+            </a:pPr>
             <a:r>
               <a:rPr lang="en-US" altLang="en-US" sz="1400" dirty="0">
                 <a:latin typeface="Courier New" charset="0"/>
@@ -32003,7 +34153,14 @@
             </a:r>
           </a:p>
           <a:p>
-            <a:pPr algn="l" eaLnBrk="1" hangingPunct="1"/>
+            <a:pPr algn="l" eaLnBrk="1" hangingPunct="1">
+              <a:spcBef>
+                <a:spcPts val="0"/>
+              </a:spcBef>
+              <a:spcAft>
+                <a:spcPts val="200"/>
+              </a:spcAft>
+            </a:pPr>
             <a:r>
               <a:rPr lang="en-US" altLang="en-US" sz="1400" dirty="0">
                 <a:latin typeface="Courier New" charset="0"/>
@@ -32025,6 +34182,853 @@
           </a:p>
         </p:txBody>
       </p:sp>
+      <p:sp>
+        <p:nvSpPr>
+          <p:cNvPr id="2" name="TextBox 1">
+            <a:extLst>
+              <a:ext uri="{FF2B5EF4-FFF2-40B4-BE49-F238E27FC236}">
+                <a16:creationId xmlns:a16="http://schemas.microsoft.com/office/drawing/2014/main" id="{4434FDA7-F707-2B1B-B9A1-BC0A2E3A6008}"/>
+              </a:ext>
+            </a:extLst>
+          </p:cNvPr>
+          <p:cNvSpPr txBox="1"/>
+          <p:nvPr/>
+        </p:nvSpPr>
+        <p:spPr>
+          <a:xfrm>
+            <a:off x="10254030" y="6018114"/>
+            <a:ext cx="1782293" cy="193899"/>
+          </a:xfrm>
+          <a:prstGeom prst="rect">
+            <a:avLst/>
+          </a:prstGeom>
+          <a:noFill/>
+        </p:spPr>
+        <p:txBody>
+          <a:bodyPr wrap="square" lIns="0" tIns="0" rIns="0" bIns="0" rtlCol="0">
+            <a:spAutoFit/>
+          </a:bodyPr>
+          <a:lstStyle/>
+          <a:p>
+            <a:pPr marL="0" indent="0" algn="l" defTabSz="914400" rtl="0" eaLnBrk="1" latinLnBrk="0" hangingPunct="1">
+              <a:lnSpc>
+                <a:spcPct val="90000"/>
+              </a:lnSpc>
+              <a:spcBef>
+                <a:spcPts val="0"/>
+              </a:spcBef>
+              <a:spcAft>
+                <a:spcPts val="600"/>
+              </a:spcAft>
+              <a:buFont typeface="Arial" panose="020B0604020202020204" pitchFamily="34" charset="0"/>
+              <a:buNone/>
+            </a:pPr>
+            <a:r>
+              <a:rPr lang="en-US" sz="1400" kern="1200" dirty="0">
+                <a:solidFill>
+                  <a:schemeClr val="tx2"/>
+                </a:solidFill>
+                <a:latin typeface="+mn-lt"/>
+                <a:ea typeface="+mn-ea"/>
+                <a:cs typeface="+mn-cs"/>
+              </a:rPr>
+              <a:t>Folder icons by Icons8</a:t>
+            </a:r>
+          </a:p>
+        </p:txBody>
+      </p:sp>
+      <p:pic>
+        <p:nvPicPr>
+          <p:cNvPr id="5" name="Picture 4" descr="folder icon">
+            <a:extLst>
+              <a:ext uri="{FF2B5EF4-FFF2-40B4-BE49-F238E27FC236}">
+                <a16:creationId xmlns:a16="http://schemas.microsoft.com/office/drawing/2014/main" id="{99EB126A-9021-489A-1C12-A4F35081025D}"/>
+              </a:ext>
+            </a:extLst>
+          </p:cNvPr>
+          <p:cNvPicPr>
+            <a:picLocks noChangeAspect="1"/>
+          </p:cNvPicPr>
+          <p:nvPr/>
+        </p:nvPicPr>
+        <p:blipFill>
+          <a:blip r:embed="rId3"/>
+          <a:stretch>
+            <a:fillRect/>
+          </a:stretch>
+        </p:blipFill>
+        <p:spPr>
+          <a:xfrm>
+            <a:off x="1828800" y="731594"/>
+            <a:ext cx="371473" cy="371473"/>
+          </a:xfrm>
+          <a:prstGeom prst="rect">
+            <a:avLst/>
+          </a:prstGeom>
+        </p:spPr>
+      </p:pic>
+      <p:pic>
+        <p:nvPicPr>
+          <p:cNvPr id="8" name="Picture 7" descr="file icon">
+            <a:extLst>
+              <a:ext uri="{FF2B5EF4-FFF2-40B4-BE49-F238E27FC236}">
+                <a16:creationId xmlns:a16="http://schemas.microsoft.com/office/drawing/2014/main" id="{21D5CB8D-05C4-B907-0429-55321151DE32}"/>
+              </a:ext>
+            </a:extLst>
+          </p:cNvPr>
+          <p:cNvPicPr>
+            <a:picLocks noChangeAspect="1"/>
+          </p:cNvPicPr>
+          <p:nvPr/>
+        </p:nvPicPr>
+        <p:blipFill>
+          <a:blip r:embed="rId4"/>
+          <a:stretch>
+            <a:fillRect/>
+          </a:stretch>
+        </p:blipFill>
+        <p:spPr>
+          <a:xfrm>
+            <a:off x="4364664" y="4832738"/>
+            <a:ext cx="309093" cy="309093"/>
+          </a:xfrm>
+          <a:prstGeom prst="rect">
+            <a:avLst/>
+          </a:prstGeom>
+        </p:spPr>
+      </p:pic>
+      <p:pic>
+        <p:nvPicPr>
+          <p:cNvPr id="3" name="Picture 2" descr="folder icon">
+            <a:extLst>
+              <a:ext uri="{FF2B5EF4-FFF2-40B4-BE49-F238E27FC236}">
+                <a16:creationId xmlns:a16="http://schemas.microsoft.com/office/drawing/2014/main" id="{D22F6CDA-15AC-F36E-9C07-C914BEB867EF}"/>
+              </a:ext>
+            </a:extLst>
+          </p:cNvPr>
+          <p:cNvPicPr>
+            <a:picLocks noChangeAspect="1"/>
+          </p:cNvPicPr>
+          <p:nvPr/>
+        </p:nvPicPr>
+        <p:blipFill>
+          <a:blip r:embed="rId3"/>
+          <a:stretch>
+            <a:fillRect/>
+          </a:stretch>
+        </p:blipFill>
+        <p:spPr>
+          <a:xfrm>
+            <a:off x="2460607" y="862802"/>
+            <a:ext cx="371473" cy="371473"/>
+          </a:xfrm>
+          <a:prstGeom prst="rect">
+            <a:avLst/>
+          </a:prstGeom>
+        </p:spPr>
+      </p:pic>
+      <p:pic>
+        <p:nvPicPr>
+          <p:cNvPr id="7" name="Picture 6" descr="folder icon">
+            <a:extLst>
+              <a:ext uri="{FF2B5EF4-FFF2-40B4-BE49-F238E27FC236}">
+                <a16:creationId xmlns:a16="http://schemas.microsoft.com/office/drawing/2014/main" id="{7E296280-0CCB-E1A8-061B-FECA91D66602}"/>
+              </a:ext>
+            </a:extLst>
+          </p:cNvPr>
+          <p:cNvPicPr>
+            <a:picLocks noChangeAspect="1"/>
+          </p:cNvPicPr>
+          <p:nvPr/>
+        </p:nvPicPr>
+        <p:blipFill>
+          <a:blip r:embed="rId3"/>
+          <a:stretch>
+            <a:fillRect/>
+          </a:stretch>
+        </p:blipFill>
+        <p:spPr>
+          <a:xfrm>
+            <a:off x="2451463" y="1149976"/>
+            <a:ext cx="371473" cy="371473"/>
+          </a:xfrm>
+          <a:prstGeom prst="rect">
+            <a:avLst/>
+          </a:prstGeom>
+        </p:spPr>
+      </p:pic>
+      <p:pic>
+        <p:nvPicPr>
+          <p:cNvPr id="9" name="Picture 8" descr="folder icon">
+            <a:extLst>
+              <a:ext uri="{FF2B5EF4-FFF2-40B4-BE49-F238E27FC236}">
+                <a16:creationId xmlns:a16="http://schemas.microsoft.com/office/drawing/2014/main" id="{E78123B7-8D63-791E-B1E6-C228D104B1DD}"/>
+              </a:ext>
+            </a:extLst>
+          </p:cNvPr>
+          <p:cNvPicPr>
+            <a:picLocks noChangeAspect="1"/>
+          </p:cNvPicPr>
+          <p:nvPr/>
+        </p:nvPicPr>
+        <p:blipFill>
+          <a:blip r:embed="rId3"/>
+          <a:stretch>
+            <a:fillRect/>
+          </a:stretch>
+        </p:blipFill>
+        <p:spPr>
+          <a:xfrm>
+            <a:off x="2465014" y="1445275"/>
+            <a:ext cx="371473" cy="371473"/>
+          </a:xfrm>
+          <a:prstGeom prst="rect">
+            <a:avLst/>
+          </a:prstGeom>
+        </p:spPr>
+      </p:pic>
+      <p:pic>
+        <p:nvPicPr>
+          <p:cNvPr id="11" name="Picture 10" descr="folder icon">
+            <a:extLst>
+              <a:ext uri="{FF2B5EF4-FFF2-40B4-BE49-F238E27FC236}">
+                <a16:creationId xmlns:a16="http://schemas.microsoft.com/office/drawing/2014/main" id="{521AABA1-02DB-62DC-1A99-48FD7896A148}"/>
+              </a:ext>
+            </a:extLst>
+          </p:cNvPr>
+          <p:cNvPicPr>
+            <a:picLocks noChangeAspect="1"/>
+          </p:cNvPicPr>
+          <p:nvPr/>
+        </p:nvPicPr>
+        <p:blipFill>
+          <a:blip r:embed="rId3"/>
+          <a:stretch>
+            <a:fillRect/>
+          </a:stretch>
+        </p:blipFill>
+        <p:spPr>
+          <a:xfrm>
+            <a:off x="2469750" y="4049303"/>
+            <a:ext cx="371473" cy="371473"/>
+          </a:xfrm>
+          <a:prstGeom prst="rect">
+            <a:avLst/>
+          </a:prstGeom>
+        </p:spPr>
+      </p:pic>
+      <p:pic>
+        <p:nvPicPr>
+          <p:cNvPr id="12" name="Picture 11" descr="folder icon">
+            <a:extLst>
+              <a:ext uri="{FF2B5EF4-FFF2-40B4-BE49-F238E27FC236}">
+                <a16:creationId xmlns:a16="http://schemas.microsoft.com/office/drawing/2014/main" id="{36FF10C0-4D99-DEC9-19D2-DFACDBE66F6C}"/>
+              </a:ext>
+            </a:extLst>
+          </p:cNvPr>
+          <p:cNvPicPr>
+            <a:picLocks noChangeAspect="1"/>
+          </p:cNvPicPr>
+          <p:nvPr/>
+        </p:nvPicPr>
+        <p:blipFill>
+          <a:blip r:embed="rId3"/>
+          <a:stretch>
+            <a:fillRect/>
+          </a:stretch>
+        </p:blipFill>
+        <p:spPr>
+          <a:xfrm>
+            <a:off x="2460605" y="4937238"/>
+            <a:ext cx="371473" cy="371473"/>
+          </a:xfrm>
+          <a:prstGeom prst="rect">
+            <a:avLst/>
+          </a:prstGeom>
+        </p:spPr>
+      </p:pic>
+      <p:pic>
+        <p:nvPicPr>
+          <p:cNvPr id="13" name="Picture 12" descr="folder icon">
+            <a:extLst>
+              <a:ext uri="{FF2B5EF4-FFF2-40B4-BE49-F238E27FC236}">
+                <a16:creationId xmlns:a16="http://schemas.microsoft.com/office/drawing/2014/main" id="{0524ECD8-B7BC-E0A7-DC48-C63C18AD0709}"/>
+              </a:ext>
+            </a:extLst>
+          </p:cNvPr>
+          <p:cNvPicPr>
+            <a:picLocks noChangeAspect="1"/>
+          </p:cNvPicPr>
+          <p:nvPr/>
+        </p:nvPicPr>
+        <p:blipFill>
+          <a:blip r:embed="rId3"/>
+          <a:stretch>
+            <a:fillRect/>
+          </a:stretch>
+        </p:blipFill>
+        <p:spPr>
+          <a:xfrm>
+            <a:off x="2469748" y="5198968"/>
+            <a:ext cx="371473" cy="371473"/>
+          </a:xfrm>
+          <a:prstGeom prst="rect">
+            <a:avLst/>
+          </a:prstGeom>
+        </p:spPr>
+      </p:pic>
+      <p:pic>
+        <p:nvPicPr>
+          <p:cNvPr id="14" name="Picture 13" descr="folder icon">
+            <a:extLst>
+              <a:ext uri="{FF2B5EF4-FFF2-40B4-BE49-F238E27FC236}">
+                <a16:creationId xmlns:a16="http://schemas.microsoft.com/office/drawing/2014/main" id="{A53371B4-9725-4ADF-6C3F-26BD2A311A69}"/>
+              </a:ext>
+            </a:extLst>
+          </p:cNvPr>
+          <p:cNvPicPr>
+            <a:picLocks noChangeAspect="1"/>
+          </p:cNvPicPr>
+          <p:nvPr/>
+        </p:nvPicPr>
+        <p:blipFill>
+          <a:blip r:embed="rId3"/>
+          <a:stretch>
+            <a:fillRect/>
+          </a:stretch>
+        </p:blipFill>
+        <p:spPr>
+          <a:xfrm>
+            <a:off x="2469747" y="5473078"/>
+            <a:ext cx="371473" cy="371473"/>
+          </a:xfrm>
+          <a:prstGeom prst="rect">
+            <a:avLst/>
+          </a:prstGeom>
+        </p:spPr>
+      </p:pic>
+      <p:pic>
+        <p:nvPicPr>
+          <p:cNvPr id="15" name="Picture 14" descr="folder icon">
+            <a:extLst>
+              <a:ext uri="{FF2B5EF4-FFF2-40B4-BE49-F238E27FC236}">
+                <a16:creationId xmlns:a16="http://schemas.microsoft.com/office/drawing/2014/main" id="{0E4800B1-AC13-C124-EFEB-C9A8CDC1E0E9}"/>
+              </a:ext>
+            </a:extLst>
+          </p:cNvPr>
+          <p:cNvPicPr>
+            <a:picLocks noChangeAspect="1"/>
+          </p:cNvPicPr>
+          <p:nvPr/>
+        </p:nvPicPr>
+        <p:blipFill>
+          <a:blip r:embed="rId3"/>
+          <a:stretch>
+            <a:fillRect/>
+          </a:stretch>
+        </p:blipFill>
+        <p:spPr>
+          <a:xfrm>
+            <a:off x="2469746" y="5738044"/>
+            <a:ext cx="371473" cy="371473"/>
+          </a:xfrm>
+          <a:prstGeom prst="rect">
+            <a:avLst/>
+          </a:prstGeom>
+        </p:spPr>
+      </p:pic>
+      <p:pic>
+        <p:nvPicPr>
+          <p:cNvPr id="16" name="Picture 15" descr="folder icon">
+            <a:extLst>
+              <a:ext uri="{FF2B5EF4-FFF2-40B4-BE49-F238E27FC236}">
+                <a16:creationId xmlns:a16="http://schemas.microsoft.com/office/drawing/2014/main" id="{0A6BDCD2-A908-FD5F-6138-4D07284E1570}"/>
+              </a:ext>
+            </a:extLst>
+          </p:cNvPr>
+          <p:cNvPicPr>
+            <a:picLocks noChangeAspect="1"/>
+          </p:cNvPicPr>
+          <p:nvPr/>
+        </p:nvPicPr>
+        <p:blipFill>
+          <a:blip r:embed="rId3"/>
+          <a:stretch>
+            <a:fillRect/>
+          </a:stretch>
+        </p:blipFill>
+        <p:spPr>
+          <a:xfrm>
+            <a:off x="2469745" y="6001313"/>
+            <a:ext cx="371473" cy="371473"/>
+          </a:xfrm>
+          <a:prstGeom prst="rect">
+            <a:avLst/>
+          </a:prstGeom>
+        </p:spPr>
+      </p:pic>
+      <p:pic>
+        <p:nvPicPr>
+          <p:cNvPr id="17" name="Picture 16" descr="folder icon">
+            <a:extLst>
+              <a:ext uri="{FF2B5EF4-FFF2-40B4-BE49-F238E27FC236}">
+                <a16:creationId xmlns:a16="http://schemas.microsoft.com/office/drawing/2014/main" id="{932AB41C-7046-4812-D3E7-EFAACDA94A3C}"/>
+              </a:ext>
+            </a:extLst>
+          </p:cNvPr>
+          <p:cNvPicPr>
+            <a:picLocks noChangeAspect="1"/>
+          </p:cNvPicPr>
+          <p:nvPr/>
+        </p:nvPicPr>
+        <p:blipFill>
+          <a:blip r:embed="rId3"/>
+          <a:stretch>
+            <a:fillRect/>
+          </a:stretch>
+        </p:blipFill>
+        <p:spPr>
+          <a:xfrm>
+            <a:off x="2469744" y="6263043"/>
+            <a:ext cx="371473" cy="371473"/>
+          </a:xfrm>
+          <a:prstGeom prst="rect">
+            <a:avLst/>
+          </a:prstGeom>
+        </p:spPr>
+      </p:pic>
+      <p:pic>
+        <p:nvPicPr>
+          <p:cNvPr id="18" name="Picture 17" descr="folder icon">
+            <a:extLst>
+              <a:ext uri="{FF2B5EF4-FFF2-40B4-BE49-F238E27FC236}">
+                <a16:creationId xmlns:a16="http://schemas.microsoft.com/office/drawing/2014/main" id="{7A975198-BD07-882B-BFBE-F3C94CFA74D1}"/>
+              </a:ext>
+            </a:extLst>
+          </p:cNvPr>
+          <p:cNvPicPr>
+            <a:picLocks noChangeAspect="1"/>
+          </p:cNvPicPr>
+          <p:nvPr/>
+        </p:nvPicPr>
+        <p:blipFill>
+          <a:blip r:embed="rId3"/>
+          <a:stretch>
+            <a:fillRect/>
+          </a:stretch>
+        </p:blipFill>
+        <p:spPr>
+          <a:xfrm>
+            <a:off x="2467183" y="6525380"/>
+            <a:ext cx="371473" cy="371473"/>
+          </a:xfrm>
+          <a:prstGeom prst="rect">
+            <a:avLst/>
+          </a:prstGeom>
+        </p:spPr>
+      </p:pic>
+      <p:pic>
+        <p:nvPicPr>
+          <p:cNvPr id="19" name="Picture 18" descr="folder icon">
+            <a:extLst>
+              <a:ext uri="{FF2B5EF4-FFF2-40B4-BE49-F238E27FC236}">
+                <a16:creationId xmlns:a16="http://schemas.microsoft.com/office/drawing/2014/main" id="{459F8FFD-FB28-E99A-E192-9A7C79595207}"/>
+              </a:ext>
+            </a:extLst>
+          </p:cNvPr>
+          <p:cNvPicPr>
+            <a:picLocks noChangeAspect="1"/>
+          </p:cNvPicPr>
+          <p:nvPr/>
+        </p:nvPicPr>
+        <p:blipFill>
+          <a:blip r:embed="rId3"/>
+          <a:stretch>
+            <a:fillRect/>
+          </a:stretch>
+        </p:blipFill>
+        <p:spPr>
+          <a:xfrm>
+            <a:off x="3392508" y="4547477"/>
+            <a:ext cx="371473" cy="371473"/>
+          </a:xfrm>
+          <a:prstGeom prst="rect">
+            <a:avLst/>
+          </a:prstGeom>
+        </p:spPr>
+      </p:pic>
+      <p:grpSp>
+        <p:nvGrpSpPr>
+          <p:cNvPr id="23" name="Group 22" descr="file icons">
+            <a:extLst>
+              <a:ext uri="{FF2B5EF4-FFF2-40B4-BE49-F238E27FC236}">
+                <a16:creationId xmlns:a16="http://schemas.microsoft.com/office/drawing/2014/main" id="{59050C62-AD39-972F-D9CD-05682648035C}"/>
+              </a:ext>
+            </a:extLst>
+          </p:cNvPr>
+          <p:cNvGrpSpPr/>
+          <p:nvPr/>
+        </p:nvGrpSpPr>
+        <p:grpSpPr>
+          <a:xfrm>
+            <a:off x="3481888" y="1681029"/>
+            <a:ext cx="289726" cy="1024556"/>
+            <a:chOff x="3481888" y="1681029"/>
+            <a:chExt cx="289726" cy="1024556"/>
+          </a:xfrm>
+        </p:grpSpPr>
+        <p:pic>
+          <p:nvPicPr>
+            <p:cNvPr id="10" name="Picture 9" descr="A black background with a black square&#10;&#10;Description automatically generated with medium confidence">
+              <a:extLst>
+                <a:ext uri="{FF2B5EF4-FFF2-40B4-BE49-F238E27FC236}">
+                  <a16:creationId xmlns:a16="http://schemas.microsoft.com/office/drawing/2014/main" id="{1A659DBA-384B-8209-878F-FE2F624411A2}"/>
+                </a:ext>
+              </a:extLst>
+            </p:cNvPr>
+            <p:cNvPicPr>
+              <a:picLocks noChangeAspect="1"/>
+            </p:cNvPicPr>
+            <p:nvPr/>
+          </p:nvPicPr>
+          <p:blipFill>
+            <a:blip r:embed="rId5"/>
+            <a:stretch>
+              <a:fillRect/>
+            </a:stretch>
+          </p:blipFill>
+          <p:spPr>
+            <a:xfrm>
+              <a:off x="3481889" y="1681029"/>
+              <a:ext cx="289725" cy="289725"/>
+            </a:xfrm>
+            <a:prstGeom prst="rect">
+              <a:avLst/>
+            </a:prstGeom>
+          </p:spPr>
+        </p:pic>
+        <p:pic>
+          <p:nvPicPr>
+            <p:cNvPr id="20" name="Picture 19" descr="A black background with a black square&#10;&#10;Description automatically generated with medium confidence">
+              <a:extLst>
+                <a:ext uri="{FF2B5EF4-FFF2-40B4-BE49-F238E27FC236}">
+                  <a16:creationId xmlns:a16="http://schemas.microsoft.com/office/drawing/2014/main" id="{690A67B1-4667-A906-5C64-4847557244C4}"/>
+                </a:ext>
+              </a:extLst>
+            </p:cNvPr>
+            <p:cNvPicPr>
+              <a:picLocks noChangeAspect="1"/>
+            </p:cNvPicPr>
+            <p:nvPr/>
+          </p:nvPicPr>
+          <p:blipFill>
+            <a:blip r:embed="rId5"/>
+            <a:stretch>
+              <a:fillRect/>
+            </a:stretch>
+          </p:blipFill>
+          <p:spPr>
+            <a:xfrm>
+              <a:off x="3481888" y="1922097"/>
+              <a:ext cx="289725" cy="289725"/>
+            </a:xfrm>
+            <a:prstGeom prst="rect">
+              <a:avLst/>
+            </a:prstGeom>
+          </p:spPr>
+        </p:pic>
+        <p:pic>
+          <p:nvPicPr>
+            <p:cNvPr id="21" name="Picture 20" descr="A black background with a black square&#10;&#10;Description automatically generated with medium confidence">
+              <a:extLst>
+                <a:ext uri="{FF2B5EF4-FFF2-40B4-BE49-F238E27FC236}">
+                  <a16:creationId xmlns:a16="http://schemas.microsoft.com/office/drawing/2014/main" id="{E15344E5-82E5-9050-0EC0-FEC134354CEB}"/>
+                </a:ext>
+              </a:extLst>
+            </p:cNvPr>
+            <p:cNvPicPr>
+              <a:picLocks noChangeAspect="1"/>
+            </p:cNvPicPr>
+            <p:nvPr/>
+          </p:nvPicPr>
+          <p:blipFill>
+            <a:blip r:embed="rId5"/>
+            <a:stretch>
+              <a:fillRect/>
+            </a:stretch>
+          </p:blipFill>
+          <p:spPr>
+            <a:xfrm>
+              <a:off x="3481889" y="2165648"/>
+              <a:ext cx="289725" cy="289725"/>
+            </a:xfrm>
+            <a:prstGeom prst="rect">
+              <a:avLst/>
+            </a:prstGeom>
+          </p:spPr>
+        </p:pic>
+        <p:pic>
+          <p:nvPicPr>
+            <p:cNvPr id="22" name="Picture 21" descr="A black background with a black square&#10;&#10;Description automatically generated with medium confidence">
+              <a:extLst>
+                <a:ext uri="{FF2B5EF4-FFF2-40B4-BE49-F238E27FC236}">
+                  <a16:creationId xmlns:a16="http://schemas.microsoft.com/office/drawing/2014/main" id="{F72FD11A-4E0B-C3C1-B004-2FC8C0A4046F}"/>
+                </a:ext>
+              </a:extLst>
+            </p:cNvPr>
+            <p:cNvPicPr>
+              <a:picLocks noChangeAspect="1"/>
+            </p:cNvPicPr>
+            <p:nvPr/>
+          </p:nvPicPr>
+          <p:blipFill>
+            <a:blip r:embed="rId5"/>
+            <a:stretch>
+              <a:fillRect/>
+            </a:stretch>
+          </p:blipFill>
+          <p:spPr>
+            <a:xfrm>
+              <a:off x="3481888" y="2415860"/>
+              <a:ext cx="289725" cy="289725"/>
+            </a:xfrm>
+            <a:prstGeom prst="rect">
+              <a:avLst/>
+            </a:prstGeom>
+          </p:spPr>
+        </p:pic>
+      </p:grpSp>
+      <p:grpSp>
+        <p:nvGrpSpPr>
+          <p:cNvPr id="24" name="Group 23" descr="file icons">
+            <a:extLst>
+              <a:ext uri="{FF2B5EF4-FFF2-40B4-BE49-F238E27FC236}">
+                <a16:creationId xmlns:a16="http://schemas.microsoft.com/office/drawing/2014/main" id="{E9767197-D92B-82CF-C569-9AB60EC3F8CA}"/>
+              </a:ext>
+            </a:extLst>
+          </p:cNvPr>
+          <p:cNvGrpSpPr/>
+          <p:nvPr/>
+        </p:nvGrpSpPr>
+        <p:grpSpPr>
+          <a:xfrm>
+            <a:off x="3491031" y="2653333"/>
+            <a:ext cx="289726" cy="1024556"/>
+            <a:chOff x="3481888" y="1681029"/>
+            <a:chExt cx="289726" cy="1024556"/>
+          </a:xfrm>
+        </p:grpSpPr>
+        <p:pic>
+          <p:nvPicPr>
+            <p:cNvPr id="25" name="Picture 24" descr="A black background with a black square&#10;&#10;Description automatically generated with medium confidence">
+              <a:extLst>
+                <a:ext uri="{FF2B5EF4-FFF2-40B4-BE49-F238E27FC236}">
+                  <a16:creationId xmlns:a16="http://schemas.microsoft.com/office/drawing/2014/main" id="{27BCC713-3E78-0A2C-70A5-18BF81B2A52E}"/>
+                </a:ext>
+              </a:extLst>
+            </p:cNvPr>
+            <p:cNvPicPr>
+              <a:picLocks noChangeAspect="1"/>
+            </p:cNvPicPr>
+            <p:nvPr/>
+          </p:nvPicPr>
+          <p:blipFill>
+            <a:blip r:embed="rId5"/>
+            <a:stretch>
+              <a:fillRect/>
+            </a:stretch>
+          </p:blipFill>
+          <p:spPr>
+            <a:xfrm>
+              <a:off x="3481889" y="1681029"/>
+              <a:ext cx="289725" cy="289725"/>
+            </a:xfrm>
+            <a:prstGeom prst="rect">
+              <a:avLst/>
+            </a:prstGeom>
+          </p:spPr>
+        </p:pic>
+        <p:pic>
+          <p:nvPicPr>
+            <p:cNvPr id="26" name="Picture 25" descr="A black background with a black square&#10;&#10;Description automatically generated with medium confidence">
+              <a:extLst>
+                <a:ext uri="{FF2B5EF4-FFF2-40B4-BE49-F238E27FC236}">
+                  <a16:creationId xmlns:a16="http://schemas.microsoft.com/office/drawing/2014/main" id="{5AB7B540-6D4A-E039-BA2E-C9B6E559DAFA}"/>
+                </a:ext>
+              </a:extLst>
+            </p:cNvPr>
+            <p:cNvPicPr>
+              <a:picLocks noChangeAspect="1"/>
+            </p:cNvPicPr>
+            <p:nvPr/>
+          </p:nvPicPr>
+          <p:blipFill>
+            <a:blip r:embed="rId5"/>
+            <a:stretch>
+              <a:fillRect/>
+            </a:stretch>
+          </p:blipFill>
+          <p:spPr>
+            <a:xfrm>
+              <a:off x="3481888" y="1922097"/>
+              <a:ext cx="289725" cy="289725"/>
+            </a:xfrm>
+            <a:prstGeom prst="rect">
+              <a:avLst/>
+            </a:prstGeom>
+          </p:spPr>
+        </p:pic>
+        <p:pic>
+          <p:nvPicPr>
+            <p:cNvPr id="27" name="Picture 26" descr="A black background with a black square&#10;&#10;Description automatically generated with medium confidence">
+              <a:extLst>
+                <a:ext uri="{FF2B5EF4-FFF2-40B4-BE49-F238E27FC236}">
+                  <a16:creationId xmlns:a16="http://schemas.microsoft.com/office/drawing/2014/main" id="{23A64267-2036-575B-D45E-91D881810D82}"/>
+                </a:ext>
+              </a:extLst>
+            </p:cNvPr>
+            <p:cNvPicPr>
+              <a:picLocks noChangeAspect="1"/>
+            </p:cNvPicPr>
+            <p:nvPr/>
+          </p:nvPicPr>
+          <p:blipFill>
+            <a:blip r:embed="rId5"/>
+            <a:stretch>
+              <a:fillRect/>
+            </a:stretch>
+          </p:blipFill>
+          <p:spPr>
+            <a:xfrm>
+              <a:off x="3481889" y="2165648"/>
+              <a:ext cx="289725" cy="289725"/>
+            </a:xfrm>
+            <a:prstGeom prst="rect">
+              <a:avLst/>
+            </a:prstGeom>
+          </p:spPr>
+        </p:pic>
+        <p:pic>
+          <p:nvPicPr>
+            <p:cNvPr id="28" name="Picture 27" descr="A black background with a black square&#10;&#10;Description automatically generated with medium confidence">
+              <a:extLst>
+                <a:ext uri="{FF2B5EF4-FFF2-40B4-BE49-F238E27FC236}">
+                  <a16:creationId xmlns:a16="http://schemas.microsoft.com/office/drawing/2014/main" id="{36876650-33BC-8F1F-2D5D-4C8B2580C375}"/>
+                </a:ext>
+              </a:extLst>
+            </p:cNvPr>
+            <p:cNvPicPr>
+              <a:picLocks noChangeAspect="1"/>
+            </p:cNvPicPr>
+            <p:nvPr/>
+          </p:nvPicPr>
+          <p:blipFill>
+            <a:blip r:embed="rId5"/>
+            <a:stretch>
+              <a:fillRect/>
+            </a:stretch>
+          </p:blipFill>
+          <p:spPr>
+            <a:xfrm>
+              <a:off x="3481888" y="2415860"/>
+              <a:ext cx="289725" cy="289725"/>
+            </a:xfrm>
+            <a:prstGeom prst="rect">
+              <a:avLst/>
+            </a:prstGeom>
+          </p:spPr>
+        </p:pic>
+      </p:grpSp>
+      <p:pic>
+        <p:nvPicPr>
+          <p:cNvPr id="30" name="Picture 29" descr="A black background with a black square&#10;&#10;Description automatically generated with medium confidence">
+            <a:extLst>
+              <a:ext uri="{FF2B5EF4-FFF2-40B4-BE49-F238E27FC236}">
+                <a16:creationId xmlns:a16="http://schemas.microsoft.com/office/drawing/2014/main" id="{5B8100B1-5880-CBD2-5856-A2C2A9375845}"/>
+              </a:ext>
+            </a:extLst>
+          </p:cNvPr>
+          <p:cNvPicPr>
+            <a:picLocks noChangeAspect="1"/>
+          </p:cNvPicPr>
+          <p:nvPr/>
+        </p:nvPicPr>
+        <p:blipFill>
+          <a:blip r:embed="rId5"/>
+          <a:stretch>
+            <a:fillRect/>
+          </a:stretch>
+        </p:blipFill>
+        <p:spPr>
+          <a:xfrm>
+            <a:off x="3500175" y="3618282"/>
+            <a:ext cx="289725" cy="289725"/>
+          </a:xfrm>
+          <a:prstGeom prst="rect">
+            <a:avLst/>
+          </a:prstGeom>
+        </p:spPr>
+      </p:pic>
+      <p:pic>
+        <p:nvPicPr>
+          <p:cNvPr id="31" name="Picture 30" descr="file icon">
+            <a:extLst>
+              <a:ext uri="{FF2B5EF4-FFF2-40B4-BE49-F238E27FC236}">
+                <a16:creationId xmlns:a16="http://schemas.microsoft.com/office/drawing/2014/main" id="{D0617806-3D20-07D7-26C8-29B50E9D3D8F}"/>
+              </a:ext>
+            </a:extLst>
+          </p:cNvPr>
+          <p:cNvPicPr>
+            <a:picLocks noChangeAspect="1"/>
+          </p:cNvPicPr>
+          <p:nvPr/>
+        </p:nvPicPr>
+        <p:blipFill>
+          <a:blip r:embed="rId5"/>
+          <a:stretch>
+            <a:fillRect/>
+          </a:stretch>
+        </p:blipFill>
+        <p:spPr>
+          <a:xfrm>
+            <a:off x="3500174" y="3859350"/>
+            <a:ext cx="289725" cy="289725"/>
+          </a:xfrm>
+          <a:prstGeom prst="rect">
+            <a:avLst/>
+          </a:prstGeom>
+        </p:spPr>
+      </p:pic>
+      <p:pic>
+        <p:nvPicPr>
+          <p:cNvPr id="33" name="Picture 32" descr="file icon">
+            <a:extLst>
+              <a:ext uri="{FF2B5EF4-FFF2-40B4-BE49-F238E27FC236}">
+                <a16:creationId xmlns:a16="http://schemas.microsoft.com/office/drawing/2014/main" id="{78917015-812E-D50A-DECA-7425179307B6}"/>
+              </a:ext>
+            </a:extLst>
+          </p:cNvPr>
+          <p:cNvPicPr>
+            <a:picLocks noChangeAspect="1"/>
+          </p:cNvPicPr>
+          <p:nvPr/>
+        </p:nvPicPr>
+        <p:blipFill>
+          <a:blip r:embed="rId5"/>
+          <a:stretch>
+            <a:fillRect/>
+          </a:stretch>
+        </p:blipFill>
+        <p:spPr>
+          <a:xfrm>
+            <a:off x="3491030" y="4343969"/>
+            <a:ext cx="289725" cy="289725"/>
+          </a:xfrm>
+          <a:prstGeom prst="rect">
+            <a:avLst/>
+          </a:prstGeom>
+        </p:spPr>
+      </p:pic>
     </p:spTree>
     <p:extLst>
       <p:ext uri="{BB962C8B-B14F-4D97-AF65-F5344CB8AC3E}">
@@ -32139,15 +35143,21 @@
           </a:p>
           <a:p>
             <a:r>
-              <a:rPr lang="en-US" dirty="0"/>
-              <a:t>Device tree</a:t>
-            </a:r>
-          </a:p>
-          <a:p>
-            <a:r>
-              <a:rPr lang="en-US" dirty="0"/>
-              <a:t>System programs</a:t>
-            </a:r>
+              <a:rPr lang="en-US" dirty="0">
+                <a:ea typeface="ＭＳ Ｐゴシック"/>
+              </a:rPr>
+              <a:t>Device Tree</a:t>
+            </a:r>
+            <a:endParaRPr lang="en-US" dirty="0"/>
+          </a:p>
+          <a:p>
+            <a:r>
+              <a:rPr lang="en-US" dirty="0">
+                <a:ea typeface="ＭＳ Ｐゴシック"/>
+              </a:rPr>
+              <a:t>System Programs</a:t>
+            </a:r>
+            <a:endParaRPr lang="en-US" dirty="0"/>
           </a:p>
           <a:p>
             <a:r>
@@ -32157,9 +35167,12 @@
           </a:p>
           <a:p>
             <a:r>
-              <a:rPr lang="en-US" dirty="0"/>
-              <a:t>Root filesystem</a:t>
-            </a:r>
+              <a:rPr lang="en-US" dirty="0">
+                <a:ea typeface="ＭＳ Ｐゴシック"/>
+              </a:rPr>
+              <a:t>Root Filesystem</a:t>
+            </a:r>
+            <a:endParaRPr lang="en-US" dirty="0"/>
           </a:p>
         </p:txBody>
       </p:sp>
@@ -32218,8 +35231,10 @@
               <a:defRPr/>
             </a:pPr>
             <a:r>
-              <a:rPr lang="en-US" dirty="0"/>
-              <a:t>Linux-based Embedded System Components</a:t>
+              <a:rPr lang="en-US" dirty="0">
+                <a:ea typeface="ＭＳ Ｐゴシック"/>
+              </a:rPr>
+              <a:t>Linux-Based Embedded System Components</a:t>
             </a:r>
           </a:p>
         </p:txBody>
@@ -32954,7 +35969,7 @@
                   <a:schemeClr val="accent1"/>
                 </a:solidFill>
               </a:rPr>
-              <a:t>kernel</a:t>
+              <a:t>Kernel</a:t>
             </a:r>
           </a:p>
         </p:txBody>
@@ -33169,8 +36184,10 @@
               <a:defRPr/>
             </a:pPr>
             <a:r>
-              <a:rPr lang="en-US" dirty="0"/>
-              <a:t>Linux-based Embedded System Components</a:t>
+              <a:rPr lang="en-US" dirty="0">
+                <a:ea typeface="ＭＳ Ｐゴシック"/>
+              </a:rPr>
+              <a:t>Linux-Based Embedded System Components</a:t>
             </a:r>
           </a:p>
         </p:txBody>
@@ -33210,64 +36227,74 @@
                 <a:solidFill>
                   <a:srgbClr val="128CAB"/>
                 </a:solidFill>
-              </a:rPr>
-              <a:t>System programs</a:t>
-            </a:r>
-          </a:p>
-          <a:p>
-            <a:pPr lvl="1"/>
+                <a:ea typeface="ＭＳ Ｐゴシック"/>
+              </a:rPr>
+              <a:t>System Programs</a:t>
+            </a:r>
+            <a:endParaRPr lang="en-US" dirty="0">
+              <a:solidFill>
+                <a:srgbClr val="128CAB"/>
+              </a:solidFill>
+            </a:endParaRPr>
+          </a:p>
+          <a:p>
+            <a:pPr marL="398145" lvl="1" indent="-166370"/>
             <a:r>
               <a:rPr lang="en-US" dirty="0"/>
               <a:t>User-friendly utilities to access operating system services</a:t>
+            </a:r>
+            <a:endParaRPr lang="en-US" altLang="en-US" dirty="0">
+              <a:ea typeface="ＭＳ Ｐゴシック" panose="020B0600070205080204" pitchFamily="34" charset="-128"/>
+              <a:cs typeface="Calibri"/>
+            </a:endParaRPr>
+          </a:p>
+          <a:p>
+            <a:r>
+              <a:rPr lang="en-US" dirty="0">
+                <a:solidFill>
+                  <a:srgbClr val="128CAB"/>
+                </a:solidFill>
+              </a:rPr>
+              <a:t>Application</a:t>
             </a:r>
             <a:endParaRPr lang="en-US" altLang="en-US" dirty="0">
               <a:ea typeface="ＭＳ Ｐゴシック" panose="020B0600070205080204" pitchFamily="34" charset="-128"/>
             </a:endParaRPr>
           </a:p>
           <a:p>
+            <a:pPr marL="398145" lvl="1" indent="-166370"/>
+            <a:r>
+              <a:rPr lang="en-US" dirty="0"/>
+              <a:t>Software implementing the functionalities to be delivered to the embedded system user</a:t>
+            </a:r>
+            <a:endParaRPr lang="en-US" altLang="en-US" dirty="0">
+              <a:ea typeface="ＭＳ Ｐゴシック" panose="020B0600070205080204" pitchFamily="34" charset="-128"/>
+              <a:cs typeface="Calibri"/>
+            </a:endParaRPr>
+          </a:p>
+          <a:p>
             <a:r>
               <a:rPr lang="en-US" dirty="0">
                 <a:solidFill>
                   <a:srgbClr val="128CAB"/>
                 </a:solidFill>
-              </a:rPr>
-              <a:t>Application</a:t>
+                <a:ea typeface="ＭＳ Ｐゴシック"/>
+              </a:rPr>
+              <a:t>Root Filesystem</a:t>
             </a:r>
             <a:endParaRPr lang="en-US" altLang="en-US" dirty="0">
               <a:ea typeface="ＭＳ Ｐゴシック" panose="020B0600070205080204" pitchFamily="34" charset="-128"/>
             </a:endParaRPr>
           </a:p>
           <a:p>
-            <a:pPr lvl="1"/>
+            <a:pPr marL="398145" lvl="1" indent="-166370"/>
             <a:r>
               <a:rPr lang="en-US" dirty="0"/>
-              <a:t>Software implementing the functionalities to be delivered to the embedded system user</a:t>
+              <a:t>Container for the Linux Kernel configuration files, the system programs, and the application</a:t>
             </a:r>
             <a:endParaRPr lang="en-US" altLang="en-US" dirty="0">
               <a:ea typeface="ＭＳ Ｐゴシック" panose="020B0600070205080204" pitchFamily="34" charset="-128"/>
-            </a:endParaRPr>
-          </a:p>
-          <a:p>
-            <a:r>
-              <a:rPr lang="en-US" dirty="0">
-                <a:solidFill>
-                  <a:srgbClr val="128CAB"/>
-                </a:solidFill>
-              </a:rPr>
-              <a:t>Root filesystem</a:t>
-            </a:r>
-            <a:endParaRPr lang="en-US" altLang="en-US" dirty="0">
-              <a:ea typeface="ＭＳ Ｐゴシック" panose="020B0600070205080204" pitchFamily="34" charset="-128"/>
-            </a:endParaRPr>
-          </a:p>
-          <a:p>
-            <a:pPr lvl="1"/>
-            <a:r>
-              <a:rPr lang="en-US" dirty="0"/>
-              <a:t>Container for the Linux Kernel configuration files, the system programs, and the application</a:t>
-            </a:r>
-            <a:endParaRPr lang="en-US" altLang="en-US" dirty="0">
-              <a:ea typeface="ＭＳ Ｐゴシック" panose="020B0600070205080204" pitchFamily="34" charset="-128"/>
+              <a:cs typeface="Calibri"/>
             </a:endParaRPr>
           </a:p>
         </p:txBody>
@@ -34156,22 +37183,29 @@
             </a:endParaRPr>
           </a:p>
           <a:p>
-            <a:pPr lvl="1"/>
+            <a:pPr marL="398145" lvl="1" indent="-166370"/>
             <a:r>
               <a:rPr lang="en-US" dirty="0">
                 <a:solidFill>
                   <a:srgbClr val="128CAB"/>
                 </a:solidFill>
-              </a:rPr>
-              <a:t>RAM memory</a:t>
-            </a:r>
-            <a:r>
-              <a:rPr lang="en-US" dirty="0"/>
+                <a:ea typeface="ＭＳ Ｐゴシック"/>
+              </a:rPr>
+              <a:t>RAM</a:t>
+            </a:r>
+            <a:r>
+              <a:rPr lang="en-US" dirty="0">
+                <a:ea typeface="ＭＳ Ｐゴシック"/>
+              </a:rPr>
               <a:t>:  volatile memory storing data/code </a:t>
             </a:r>
-          </a:p>
-          <a:p>
-            <a:pPr lvl="1"/>
+            <a:endParaRPr lang="en-US" dirty="0">
+              <a:ea typeface="ＭＳ Ｐゴシック"/>
+              <a:cs typeface="Calibri"/>
+            </a:endParaRPr>
+          </a:p>
+          <a:p>
+            <a:pPr marL="398145" lvl="1" indent="-166370"/>
             <a:r>
               <a:rPr lang="en-US" dirty="0">
                 <a:solidFill>
@@ -34184,9 +37218,12 @@
               <a:rPr lang="en-US" dirty="0"/>
               <a:t>:  processor running software</a:t>
             </a:r>
-          </a:p>
-          <a:p>
-            <a:pPr lvl="1"/>
+            <a:endParaRPr lang="en-US" dirty="0">
+              <a:cs typeface="Calibri"/>
+            </a:endParaRPr>
+          </a:p>
+          <a:p>
+            <a:pPr marL="398145" lvl="1" indent="-166370"/>
             <a:r>
               <a:rPr lang="en-US" dirty="0">
                 <a:solidFill>
@@ -34199,9 +37236,12 @@
               <a:rPr lang="en-US" dirty="0"/>
               <a:t>:  peripherals to get inputs from the user, and to provide outputs to the user</a:t>
             </a:r>
-          </a:p>
-          <a:p>
-            <a:pPr lvl="1"/>
+            <a:endParaRPr lang="en-US" dirty="0">
+              <a:cs typeface="Calibri"/>
+            </a:endParaRPr>
+          </a:p>
+          <a:p>
+            <a:pPr marL="398145" lvl="1" indent="-166370"/>
             <a:r>
               <a:rPr lang="en-US" dirty="0">
                 <a:solidFill>
@@ -34214,9 +37254,12 @@
               <a:rPr lang="en-US" dirty="0"/>
               <a:t>:  small non-volatile memory needed at power-up (discussed later)</a:t>
             </a:r>
-          </a:p>
-          <a:p>
-            <a:pPr lvl="1"/>
+            <a:endParaRPr lang="en-US" dirty="0">
+              <a:cs typeface="Calibri"/>
+            </a:endParaRPr>
+          </a:p>
+          <a:p>
+            <a:pPr marL="398145" lvl="1" indent="-166370"/>
             <a:r>
               <a:rPr lang="en-US" dirty="0">
                 <a:solidFill>
@@ -34231,6 +37274,7 @@
             </a:r>
             <a:endParaRPr lang="en-US" altLang="en-US" dirty="0">
               <a:ea typeface="ＭＳ Ｐゴシック" panose="020B0600070205080204" pitchFamily="34" charset="-128"/>
+              <a:cs typeface="Calibri"/>
             </a:endParaRPr>
           </a:p>
         </p:txBody>
@@ -34823,44 +37867,57 @@
           <a:lstStyle/>
           <a:p>
             <a:r>
-              <a:rPr lang="en-US" dirty="0"/>
-              <a:t>Multiple implementations of the reference hardware model are possible.  For example:</a:t>
+              <a:rPr lang="en-US" dirty="0">
+                <a:ea typeface="ＭＳ Ｐゴシック"/>
+              </a:rPr>
+              <a:t>Multiple implementations of the reference hardware model are possible. For example:</a:t>
             </a:r>
             <a:endParaRPr lang="en-US" altLang="en-US" dirty="0">
-              <a:ea typeface="ＭＳ Ｐゴシック" panose="020B0600070205080204" pitchFamily="34" charset="-128"/>
+              <a:ea typeface="ＭＳ Ｐゴシック"/>
             </a:endParaRPr>
           </a:p>
           <a:p>
-            <a:pPr lvl="1"/>
+            <a:pPr marL="398145" lvl="1" indent="-166370"/>
             <a:r>
               <a:rPr lang="en-US" dirty="0">
                 <a:solidFill>
                   <a:srgbClr val="128CAB"/>
                 </a:solidFill>
+                <a:ea typeface="ＭＳ Ｐゴシック"/>
               </a:rPr>
               <a:t>Microcontroller-based implementation</a:t>
             </a:r>
             <a:r>
-              <a:rPr lang="en-US" dirty="0"/>
-              <a:t>:  a single device hosts most of the reference model components (e.g. CPU, RAM memory, boot flash).</a:t>
-            </a:r>
-          </a:p>
-          <a:p>
-            <a:pPr lvl="1"/>
-            <a:r>
               <a:rPr lang="en-US" dirty="0">
+                <a:ea typeface="ＭＳ Ｐゴシック"/>
+              </a:rPr>
+              <a:t>:  a single device hosts most of the reference model components (e.g., CPU, RAM, boot flash).</a:t>
+            </a:r>
+            <a:endParaRPr lang="en-US" dirty="0">
+              <a:ea typeface="ＭＳ Ｐゴシック"/>
+              <a:cs typeface="Calibri"/>
+            </a:endParaRPr>
+          </a:p>
+          <a:p>
+            <a:pPr marL="398145" lvl="1" indent="-166370"/>
+            <a:r>
+              <a:rPr lang="en-US" dirty="0">
                 <a:solidFill>
                   <a:srgbClr val="128CAB"/>
                 </a:solidFill>
+                <a:ea typeface="ＭＳ Ｐゴシック"/>
               </a:rPr>
               <a:t>System-on-Chip implementation</a:t>
             </a:r>
             <a:r>
-              <a:rPr lang="en-US" dirty="0"/>
-              <a:t>:  most of the reference model components are discrete components, while the CPU is integrated with some of them (e.g. I/O, boot flash).</a:t>
+              <a:rPr lang="en-US" dirty="0">
+                <a:ea typeface="ＭＳ Ｐゴシック"/>
+              </a:rPr>
+              <a:t>:  most of the reference model components are discrete components, while the CPU is integrated with some of them (e.g., I/O, boot flash).</a:t>
             </a:r>
             <a:endParaRPr lang="en-US" altLang="en-US" dirty="0">
-              <a:ea typeface="ＭＳ Ｐゴシック" panose="020B0600070205080204" pitchFamily="34" charset="-128"/>
+              <a:ea typeface="ＭＳ Ｐゴシック"/>
+              <a:cs typeface="Calibri"/>
             </a:endParaRPr>
           </a:p>
         </p:txBody>
@@ -35178,7 +38235,7 @@
             <a:effectLst/>
           </p:spPr>
           <p:txBody>
-            <a:bodyPr wrap="square" rtlCol="0">
+            <a:bodyPr wrap="square" lIns="91440" tIns="45720" rIns="91440" bIns="45720" rtlCol="0" anchor="t">
               <a:noAutofit/>
             </a:bodyPr>
             <a:lstStyle/>
@@ -35205,27 +38262,20 @@
                   <a:solidFill>
                     <a:schemeClr val="bg1"/>
                   </a:solidFill>
+                  <a:latin typeface="Calibri"/>
+                  <a:ea typeface="ＭＳ Ｐゴシック"/>
+                  <a:cs typeface="Calibri"/>
                 </a:rPr>
                 <a:t>RAM</a:t>
               </a:r>
             </a:p>
             <a:p>
               <a:pPr algn="ctr"/>
-              <a:r>
-                <a:rPr lang="en-US" dirty="0">
-                  <a:solidFill>
-                    <a:schemeClr val="bg1"/>
-                  </a:solidFill>
-                </a:rPr>
-                <a:t>Memory</a:t>
-              </a:r>
-            </a:p>
-            <a:p>
-              <a:pPr algn="ctr"/>
               <a:endParaRPr lang="en-US" dirty="0">
                 <a:solidFill>
                   <a:schemeClr val="bg1"/>
                 </a:solidFill>
+                <a:cs typeface="Calibri" panose="020F0502020204030204" pitchFamily="34" charset="0"/>
               </a:endParaRPr>
             </a:p>
             <a:p>
@@ -35756,7 +38806,7 @@
             <a:effectLst/>
           </p:spPr>
           <p:txBody>
-            <a:bodyPr wrap="square" rtlCol="0">
+            <a:bodyPr wrap="square" lIns="91440" tIns="45720" rIns="91440" bIns="45720" rtlCol="0" anchor="t">
               <a:noAutofit/>
             </a:bodyPr>
             <a:lstStyle/>
@@ -35783,19 +38833,11 @@
                   <a:solidFill>
                     <a:schemeClr val="bg1"/>
                   </a:solidFill>
+                  <a:latin typeface="Calibri"/>
+                  <a:ea typeface="ＭＳ Ｐゴシック"/>
+                  <a:cs typeface="Calibri"/>
                 </a:rPr>
                 <a:t>RAM</a:t>
-              </a:r>
-            </a:p>
-            <a:p>
-              <a:pPr algn="ctr"/>
-              <a:r>
-                <a:rPr lang="en-US" dirty="0">
-                  <a:solidFill>
-                    <a:schemeClr val="bg1"/>
-                  </a:solidFill>
-                </a:rPr>
-                <a:t>Memory</a:t>
               </a:r>
             </a:p>
             <a:p>
@@ -36017,92 +39059,112 @@
           <a:lstStyle/>
           <a:p>
             <a:r>
+              <a:rPr lang="en-US" dirty="0">
+                <a:ea typeface="ＭＳ Ｐゴシック"/>
+              </a:rPr>
+              <a:t>The CPU generates 2</a:t>
+            </a:r>
+            <a:r>
+              <a:rPr lang="en-US" baseline="30000" dirty="0">
+                <a:ea typeface="ＭＳ Ｐゴシック"/>
+              </a:rPr>
+              <a:t>N</a:t>
+            </a:r>
+            <a:r>
+              <a:rPr lang="en-US" dirty="0">
+                <a:ea typeface="ＭＳ Ｐゴシック"/>
+              </a:rPr>
+              <a:t> different addresses (0</a:t>
+            </a:r>
+            <a:r>
+              <a:rPr lang="en-US" dirty="0">
+                <a:ea typeface="ＭＳ Ｐゴシック"/>
+                <a:sym typeface="Wingdings"/>
+              </a:rPr>
+              <a:t></a:t>
+            </a:r>
+            <a:r>
+              <a:rPr lang="en-US" dirty="0">
+                <a:ea typeface="ＭＳ Ｐゴシック"/>
+              </a:rPr>
+              <a:t>2</a:t>
+            </a:r>
+            <a:r>
+              <a:rPr lang="en-US" baseline="30000" dirty="0">
+                <a:ea typeface="ＭＳ Ｐゴシック"/>
+              </a:rPr>
+              <a:t>N</a:t>
+            </a:r>
+            <a:r>
+              <a:rPr lang="en-US" dirty="0">
+                <a:ea typeface="ＭＳ Ｐゴシック"/>
+              </a:rPr>
+              <a:t>-1).</a:t>
+            </a:r>
+            <a:endParaRPr lang="en-US" altLang="en-US" dirty="0">
+              <a:ea typeface="ＭＳ Ｐゴシック"/>
+            </a:endParaRPr>
+          </a:p>
+          <a:p>
+            <a:pPr marL="398145" lvl="1" indent="-166370"/>
+            <a:r>
+              <a:rPr lang="en-US" dirty="0">
+                <a:ea typeface="ＭＳ Ｐゴシック"/>
+              </a:rPr>
+              <a:t>N=number of bits of the address bus</a:t>
+            </a:r>
+            <a:endParaRPr lang="en-US" dirty="0">
+              <a:ea typeface="ＭＳ Ｐゴシック"/>
+              <a:cs typeface="Calibri"/>
+            </a:endParaRPr>
+          </a:p>
+          <a:p>
+            <a:pPr marL="398145" lvl="1" indent="-166370"/>
+            <a:r>
+              <a:rPr lang="en-US" altLang="en-US" dirty="0">
+                <a:ea typeface="ＭＳ Ｐゴシック"/>
+              </a:rPr>
+              <a:t>a 32-bit address bus implies 2^32 (~4 billion ) addresses</a:t>
+            </a:r>
+            <a:endParaRPr lang="en-US" altLang="en-US" dirty="0">
+              <a:ea typeface="ＭＳ Ｐゴシック"/>
+              <a:cs typeface="Calibri"/>
+            </a:endParaRPr>
+          </a:p>
+          <a:p>
+            <a:r>
+              <a:rPr lang="en-US" dirty="0">
+                <a:ea typeface="ＭＳ Ｐゴシック"/>
+              </a:rPr>
+              <a:t>Each device (e.g., memory, I/O) is associated with a range of addresses.</a:t>
+            </a:r>
+          </a:p>
+          <a:p>
+            <a:r>
               <a:rPr lang="en-US" dirty="0"/>
-              <a:t>The CPU generates </a:t>
-            </a:r>
-            <a:r>
-              <a:rPr lang="en-US" dirty="0" err="1"/>
-              <a:t>2</a:t>
-            </a:r>
-            <a:r>
-              <a:rPr lang="en-US" baseline="30000" dirty="0" err="1"/>
-              <a:t>N</a:t>
+              <a:t>The </a:t>
+            </a:r>
+            <a:r>
+              <a:rPr lang="en-US" dirty="0">
+                <a:solidFill>
+                  <a:srgbClr val="128CAB"/>
+                </a:solidFill>
+              </a:rPr>
+              <a:t>memory map</a:t>
             </a:r>
             <a:r>
               <a:rPr lang="en-US" dirty="0"/>
-              <a:t> different addresses (</a:t>
-            </a:r>
-            <a:r>
-              <a:rPr lang="en-US" dirty="0" err="1"/>
-              <a:t>0</a:t>
-            </a:r>
-            <a:r>
-              <a:rPr lang="en-US" dirty="0" err="1">
-                <a:sym typeface="Wingdings"/>
-              </a:rPr>
-              <a:t></a:t>
-            </a:r>
-            <a:r>
-              <a:rPr lang="en-US" dirty="0" err="1"/>
-              <a:t>2</a:t>
-            </a:r>
-            <a:r>
-              <a:rPr lang="en-US" baseline="30000" dirty="0" err="1"/>
-              <a:t>N</a:t>
-            </a:r>
-            <a:r>
-              <a:rPr lang="en-US" dirty="0" err="1"/>
-              <a:t>-1</a:t>
-            </a:r>
-            <a:r>
-              <a:rPr lang="en-US" dirty="0"/>
-              <a:t>).</a:t>
+              <a:t> describes this association for all the devices.</a:t>
             </a:r>
             <a:endParaRPr lang="en-US" altLang="en-US" dirty="0">
               <a:ea typeface="ＭＳ Ｐゴシック" panose="020B0600070205080204" pitchFamily="34" charset="-128"/>
             </a:endParaRPr>
           </a:p>
           <a:p>
-            <a:pPr lvl="1"/>
-            <a:r>
-              <a:rPr lang="en-US" dirty="0"/>
-              <a:t>N=number of bits of the address bus</a:t>
-            </a:r>
+            <a:pPr marL="855345" lvl="2" indent="-166370"/>
             <a:endParaRPr lang="en-US" altLang="en-US" dirty="0">
               <a:ea typeface="ＭＳ Ｐゴシック" panose="020B0600070205080204" pitchFamily="34" charset="-128"/>
-            </a:endParaRPr>
-          </a:p>
-          <a:p>
-            <a:r>
-              <a:rPr lang="en-US" dirty="0"/>
-              <a:t>Each device (memory, I/O, etc.) is associated with a range of addresses.</a:t>
-            </a:r>
-          </a:p>
-          <a:p>
-            <a:r>
-              <a:rPr lang="en-US" dirty="0"/>
-              <a:t>The </a:t>
-            </a:r>
-            <a:r>
-              <a:rPr lang="en-US" dirty="0">
-                <a:solidFill>
-                  <a:srgbClr val="128CAB"/>
-                </a:solidFill>
-              </a:rPr>
-              <a:t>memory map</a:t>
-            </a:r>
-            <a:r>
-              <a:rPr lang="en-US" dirty="0"/>
-              <a:t> describes this association for all the devices.</a:t>
-            </a:r>
-            <a:endParaRPr lang="en-US" altLang="en-US" dirty="0">
-              <a:ea typeface="ＭＳ Ｐゴシック" panose="020B0600070205080204" pitchFamily="34" charset="-128"/>
-            </a:endParaRPr>
-          </a:p>
-          <a:p>
-            <a:pPr lvl="2"/>
-            <a:endParaRPr lang="en-US" altLang="en-US" dirty="0">
-              <a:ea typeface="ＭＳ Ｐゴシック" panose="020B0600070205080204" pitchFamily="34" charset="-128"/>
+              <a:cs typeface="Calibri"/>
             </a:endParaRPr>
           </a:p>
         </p:txBody>
@@ -37163,21 +40225,6 @@
 </file>
 
 <file path=customXml/item1.xml><?xml version="1.0" encoding="utf-8"?>
-<?mso-contentType ?>
-<FormTemplates xmlns="http://schemas.microsoft.com/sharepoint/v3/contenttype/forms">
-  <Display>DocumentLibraryForm</Display>
-  <Edit>DocumentLibraryForm</Edit>
-  <New>DocumentLibraryForm</New>
-</FormTemplates>
-</file>
-
-<file path=customXml/item2.xml><?xml version="1.0" encoding="utf-8"?>
-<p:properties xmlns:p="http://schemas.microsoft.com/office/2006/metadata/properties" xmlns:xsi="http://www.w3.org/2001/XMLSchema-instance" xmlns:pc="http://schemas.microsoft.com/office/infopath/2007/PartnerControls">
-  <documentManagement/>
-</p:properties>
-</file>
-
-<file path=customXml/item3.xml><?xml version="1.0" encoding="utf-8"?>
 <ct:contentTypeSchema xmlns:ct="http://schemas.microsoft.com/office/2006/metadata/contentType" xmlns:ma="http://schemas.microsoft.com/office/2006/metadata/properties/metaAttributes" ct:_="" ma:_="" ma:contentTypeName="Document" ma:contentTypeID="0x0101001AB4C7B3E1FC394489A73CF7D7E3C9BF" ma:contentTypeVersion="0" ma:contentTypeDescription="Create a new document." ma:contentTypeScope="" ma:versionID="45cafcb85e4a634abde564ce1863f081">
   <xsd:schema xmlns:xsd="http://www.w3.org/2001/XMLSchema" xmlns:xs="http://www.w3.org/2001/XMLSchema" xmlns:p="http://schemas.microsoft.com/office/2006/metadata/properties" targetNamespace="http://schemas.microsoft.com/office/2006/metadata/properties" ma:root="true" ma:fieldsID="c64490b4aec6201516c3a874156f37b2">
     <xsd:element name="properties">
@@ -37291,30 +40338,22 @@
 </ct:contentTypeSchema>
 </file>
 
-<file path=customXml/itemProps1.xml><?xml version="1.0" encoding="utf-8"?>
-<ds:datastoreItem xmlns:ds="http://schemas.openxmlformats.org/officeDocument/2006/customXml" ds:itemID="{A2F4DB20-F02C-4139-BE14-4D908EF1BA88}">
-  <ds:schemaRefs>
-    <ds:schemaRef ds:uri="http://schemas.microsoft.com/sharepoint/v3/contenttype/forms"/>
-  </ds:schemaRefs>
-</ds:datastoreItem>
+<file path=customXml/item2.xml><?xml version="1.0" encoding="utf-8"?>
+<?mso-contentType ?>
+<FormTemplates xmlns="http://schemas.microsoft.com/sharepoint/v3/contenttype/forms">
+  <Display>DocumentLibraryForm</Display>
+  <Edit>DocumentLibraryForm</Edit>
+  <New>DocumentLibraryForm</New>
+</FormTemplates>
 </file>
 
-<file path=customXml/itemProps2.xml><?xml version="1.0" encoding="utf-8"?>
-<ds:datastoreItem xmlns:ds="http://schemas.openxmlformats.org/officeDocument/2006/customXml" ds:itemID="{3546F3D9-27DD-4F07-9983-380B33535F9E}">
-  <ds:schemaRefs>
-    <ds:schemaRef ds:uri="http://purl.org/dc/elements/1.1/"/>
-    <ds:schemaRef ds:uri="http://schemas.microsoft.com/office/2006/metadata/properties"/>
-    <ds:schemaRef ds:uri="http://purl.org/dc/terms/"/>
-    <ds:schemaRef ds:uri="http://schemas.openxmlformats.org/package/2006/metadata/core-properties"/>
-    <ds:schemaRef ds:uri="http://schemas.microsoft.com/office/2006/documentManagement/types"/>
-    <ds:schemaRef ds:uri="http://schemas.microsoft.com/office/infopath/2007/PartnerControls"/>
-    <ds:schemaRef ds:uri="http://www.w3.org/XML/1998/namespace"/>
-    <ds:schemaRef ds:uri="http://purl.org/dc/dcmitype/"/>
-  </ds:schemaRefs>
-</ds:datastoreItem>
+<file path=customXml/item3.xml><?xml version="1.0" encoding="utf-8"?>
+<p:properties xmlns:p="http://schemas.microsoft.com/office/2006/metadata/properties" xmlns:xsi="http://www.w3.org/2001/XMLSchema-instance" xmlns:pc="http://schemas.microsoft.com/office/infopath/2007/PartnerControls">
+  <documentManagement/>
+</p:properties>
 </file>
 
-<file path=customXml/itemProps3.xml><?xml version="1.0" encoding="utf-8"?>
+<file path=customXml/itemProps1.xml><?xml version="1.0" encoding="utf-8"?>
 <ds:datastoreItem xmlns:ds="http://schemas.openxmlformats.org/officeDocument/2006/customXml" ds:itemID="{776A7FD9-EB25-40DB-BD4D-0724701A0CC5}">
   <ds:schemaRefs>
     <ds:schemaRef ds:uri="http://schemas.microsoft.com/office/2006/metadata/contentType"/>
@@ -37328,4 +40367,27 @@
     <ds:schemaRef ds:uri="http://schemas.microsoft.com/office/infopath/2007/PartnerControls"/>
   </ds:schemaRefs>
 </ds:datastoreItem>
+</file>
+
+<file path=customXml/itemProps2.xml><?xml version="1.0" encoding="utf-8"?>
+<ds:datastoreItem xmlns:ds="http://schemas.openxmlformats.org/officeDocument/2006/customXml" ds:itemID="{A2F4DB20-F02C-4139-BE14-4D908EF1BA88}">
+  <ds:schemaRefs>
+    <ds:schemaRef ds:uri="http://schemas.microsoft.com/sharepoint/v3/contenttype/forms"/>
+  </ds:schemaRefs>
+</ds:datastoreItem>
+</file>
+
+<file path=customXml/itemProps3.xml><?xml version="1.0" encoding="utf-8"?>
+<ds:datastoreItem xmlns:ds="http://schemas.openxmlformats.org/officeDocument/2006/customXml" ds:itemID="{3546F3D9-27DD-4F07-9983-380B33535F9E}">
+  <ds:schemaRefs>
+    <ds:schemaRef ds:uri="http://purl.org/dc/elements/1.1/"/>
+    <ds:schemaRef ds:uri="http://schemas.microsoft.com/office/2006/metadata/properties"/>
+    <ds:schemaRef ds:uri="http://purl.org/dc/terms/"/>
+    <ds:schemaRef ds:uri="http://schemas.openxmlformats.org/package/2006/metadata/core-properties"/>
+    <ds:schemaRef ds:uri="http://schemas.microsoft.com/office/2006/documentManagement/types"/>
+    <ds:schemaRef ds:uri="http://schemas.microsoft.com/office/infopath/2007/PartnerControls"/>
+    <ds:schemaRef ds:uri="http://www.w3.org/XML/1998/namespace"/>
+    <ds:schemaRef ds:uri="http://purl.org/dc/dcmitype/"/>
+  </ds:schemaRefs>
+</ds:datastoreItem>
 </file>